--- a/presentacion-lunes/Resumen_Riesgos_2026_Opcion_C.pptx
+++ b/presentacion-lunes/Resumen_Riesgos_2026_Opcion_C.pptx
@@ -195,7 +195,7 @@
             </a:solidFill>
           </c:spPr>
           <c:dPt>
-            <c:idx val="6"/>
+            <c:idx val="7"/>
             <c:spPr>
               <a:solidFill>
                 <a:srgbClr val="003D6F"/>
@@ -204,9 +204,9 @@
           </c:dPt>
           <c:cat>
             <c:strRef>
-              <c:f>Sheet1!$A$2:$A$8</c:f>
+              <c:f>Sheet1!$A$2:$A$9</c:f>
               <c:strCache>
-                <c:ptCount val="7"/>
+                <c:ptCount val="8"/>
                 <c:pt idx="0">
                   <c:v>NRSF-03</c:v>
                 </c:pt>
@@ -214,18 +214,21 @@
                   <c:v>NRSF-01</c:v>
                 </c:pt>
                 <c:pt idx="2">
-                  <c:v>NRP-24</c:v>
+                  <c:v>NRP-17</c:v>
                 </c:pt>
                 <c:pt idx="3">
-                  <c:v>NRP-17</c:v>
+                  <c:v>NRP-25</c:v>
                 </c:pt>
                 <c:pt idx="4">
                   <c:v>NPB4-49</c:v>
                 </c:pt>
                 <c:pt idx="5">
+                  <c:v>NRP-24</c:v>
+                </c:pt>
+                <c:pt idx="6">
                   <c:v>NCB-022</c:v>
                 </c:pt>
-                <c:pt idx="6">
+                <c:pt idx="7">
                   <c:v>NRP-20</c:v>
                 </c:pt>
               </c:strCache>
@@ -233,10 +236,10 @@
           </c:cat>
           <c:val>
             <c:numRef>
-              <c:f>Sheet1!$B$2:$B$8</c:f>
+              <c:f>Sheet1!$B$2:$B$9</c:f>
               <c:numCache>
                 <c:formatCode>General</c:formatCode>
-                <c:ptCount val="7"/>
+                <c:ptCount val="8"/>
                 <c:pt idx="0">
                   <c:v>2</c:v>
                 </c:pt>
@@ -253,9 +256,12 @@
                   <c:v>2</c:v>
                 </c:pt>
                 <c:pt idx="5">
-                  <c:v>2</c:v>
+                  <c:v>3</c:v>
                 </c:pt>
                 <c:pt idx="6">
+                  <c:v>3</c:v>
+                </c:pt>
+                <c:pt idx="7">
                   <c:v>5</c:v>
                 </c:pt>
               </c:numCache>
@@ -774,7 +780,7 @@
           <a:lstStyle/>
           <a:p>
             <a:r>
-              <a:t>Resumen de lo que nos pidieron en 2026. Vinieron 12 veces: 3 auditorías internas, 1 externa y 8 visitas de la SSF. Seis temas los pidieron 2 o más entidades: hay que tenerlos siempre listos, sobre todo las Actas del Comité de Riesgos (NRP-20), que se pidieron 4 veces. NRP-20 es la norma más revisada (5 veces, 3 entidades). Octubre fue el mes de mayor carga: coincidieron Interna, Externa y SSF.</a:t>
+              <a:t>Resumen de lo que nos pidieron en 2026. Vinieron 19 veces: 7 auditorías internas, 4 externas y 8 visitas de la SSF. Seis temas los pidieron 2 o más entidades: hay que tenerlos siempre listos, sobre todo las Actas del Comité de Riesgos (NRP-20), pedidas 4 veces, y Clasificación de cartera y el Plan de Continuidad, pedidos 3 veces cada uno. NRP-20 es la norma más revisada (5 veces, 3 entidades). En octubre coincidieron Interna, Externa y SSF.</a:t>
             </a:r>
           </a:p>
         </p:txBody>
@@ -4307,7 +4313,7 @@
                 </a:solidFill>
                 <a:latin typeface="Century Gothic"/>
               </a:rPr>
-              <a:t>12</a:t>
+              <a:t>19</a:t>
             </a:r>
           </a:p>
         </p:txBody>
@@ -4377,7 +4383,7 @@
                 </a:solidFill>
                 <a:latin typeface="Arial"/>
               </a:rPr>
-              <a:t>3 Interna · 1 Externa · 8 SSF</a:t>
+              <a:t>7 Interna · 4 Externa · 8 SSF</a:t>
             </a:r>
           </a:p>
         </p:txBody>
@@ -4723,6 +4729,50 @@
             <a:avLst/>
           </a:prstGeom>
           <a:solidFill>
+            <a:srgbClr val="E8871E"/>
+          </a:solidFill>
+          <a:ln>
+            <a:noFill/>
+          </a:ln>
+          <a:effectLst/>
+        </p:spPr>
+        <p:style>
+          <a:lnRef idx="1">
+            <a:schemeClr val="accent1"/>
+          </a:lnRef>
+          <a:fillRef idx="3">
+            <a:schemeClr val="accent1"/>
+          </a:fillRef>
+          <a:effectRef idx="2">
+            <a:schemeClr val="accent1"/>
+          </a:effectRef>
+          <a:fontRef idx="minor">
+            <a:schemeClr val="lt1"/>
+          </a:fontRef>
+        </p:style>
+        <p:txBody>
+          <a:bodyPr rtlCol="0" anchor="ctr"/>
+          <a:lstStyle/>
+          <a:p>
+            <a:pPr algn="ctr"/>
+          </a:p>
+        </p:txBody>
+      </p:sp>
+      <p:sp>
+        <p:nvSpPr>
+          <p:cNvPr id="22" name="Oval 21"/>
+          <p:cNvSpPr/>
+          <p:nvPr/>
+        </p:nvSpPr>
+        <p:spPr>
+          <a:xfrm>
+            <a:off x="3828288" y="2167128"/>
+            <a:ext cx="237744" cy="237744"/>
+          </a:xfrm>
+          <a:prstGeom prst="ellipse">
+            <a:avLst/>
+          </a:prstGeom>
+          <a:solidFill>
             <a:srgbClr val="2E9E5B"/>
           </a:solidFill>
           <a:ln>
@@ -4754,7 +4804,7 @@
       </p:sp>
       <p:sp>
         <p:nvSpPr>
-          <p:cNvPr id="22" name="Rounded Rectangle 21"/>
+          <p:cNvPr id="23" name="Rounded Rectangle 22"/>
           <p:cNvSpPr/>
           <p:nvPr/>
         </p:nvSpPr>
@@ -4800,7 +4850,7 @@
       </p:sp>
       <p:sp>
         <p:nvSpPr>
-          <p:cNvPr id="23" name="TextBox 22"/>
+          <p:cNvPr id="24" name="TextBox 23"/>
           <p:cNvSpPr txBox="1"/>
           <p:nvPr/>
         </p:nvSpPr>
@@ -4835,7 +4885,7 @@
       </p:sp>
       <p:sp>
         <p:nvSpPr>
-          <p:cNvPr id="24" name="Oval 23"/>
+          <p:cNvPr id="25" name="Oval 24"/>
           <p:cNvSpPr/>
           <p:nvPr/>
         </p:nvSpPr>
@@ -4879,7 +4929,7 @@
       </p:sp>
       <p:sp>
         <p:nvSpPr>
-          <p:cNvPr id="25" name="Oval 24"/>
+          <p:cNvPr id="26" name="Oval 25"/>
           <p:cNvSpPr/>
           <p:nvPr/>
         </p:nvSpPr>
@@ -4923,13 +4973,1367 @@
       </p:sp>
       <p:sp>
         <p:nvSpPr>
-          <p:cNvPr id="26" name="Rounded Rectangle 25"/>
+          <p:cNvPr id="27" name="Rounded Rectangle 26"/>
           <p:cNvSpPr/>
           <p:nvPr/>
         </p:nvSpPr>
         <p:spPr>
           <a:xfrm>
             <a:off x="4989576" y="1481328"/>
+            <a:ext cx="597408" cy="1554480"/>
+          </a:xfrm>
+          <a:prstGeom prst="roundRect">
+            <a:avLst>
+              <a:gd name="adj" fmla="val 10000"/>
+            </a:avLst>
+          </a:prstGeom>
+          <a:solidFill>
+            <a:srgbClr val="EEF3F9"/>
+          </a:solidFill>
+          <a:ln>
+            <a:noFill/>
+          </a:ln>
+          <a:effectLst/>
+        </p:spPr>
+        <p:style>
+          <a:lnRef idx="1">
+            <a:schemeClr val="accent1"/>
+          </a:lnRef>
+          <a:fillRef idx="3">
+            <a:schemeClr val="accent1"/>
+          </a:fillRef>
+          <a:effectRef idx="2">
+            <a:schemeClr val="accent1"/>
+          </a:effectRef>
+          <a:fontRef idx="minor">
+            <a:schemeClr val="lt1"/>
+          </a:fontRef>
+        </p:style>
+        <p:txBody>
+          <a:bodyPr rtlCol="0" anchor="ctr"/>
+          <a:lstStyle/>
+          <a:p>
+            <a:pPr algn="ctr"/>
+          </a:p>
+        </p:txBody>
+      </p:sp>
+      <p:sp>
+        <p:nvSpPr>
+          <p:cNvPr id="28" name="TextBox 27"/>
+          <p:cNvSpPr txBox="1"/>
+          <p:nvPr/>
+        </p:nvSpPr>
+        <p:spPr>
+          <a:xfrm>
+            <a:off x="4953000" y="1572768"/>
+            <a:ext cx="670560" cy="228600"/>
+          </a:xfrm>
+          <a:prstGeom prst="rect">
+            <a:avLst/>
+          </a:prstGeom>
+          <a:noFill/>
+        </p:spPr>
+        <p:txBody>
+          <a:bodyPr wrap="square" lIns="0" rIns="0" tIns="0" bIns="0" anchor="t">
+            <a:spAutoFit/>
+          </a:bodyPr>
+          <a:lstStyle/>
+          <a:p>
+            <a:pPr algn="ctr"/>
+            <a:r>
+              <a:rPr sz="1000" b="1">
+                <a:solidFill>
+                  <a:srgbClr val="1F2A37"/>
+                </a:solidFill>
+                <a:latin typeface="Arial"/>
+              </a:rPr>
+              <a:t>Mar</a:t>
+            </a:r>
+          </a:p>
+        </p:txBody>
+      </p:sp>
+      <p:sp>
+        <p:nvSpPr>
+          <p:cNvPr id="29" name="Oval 28"/>
+          <p:cNvSpPr/>
+          <p:nvPr/>
+        </p:nvSpPr>
+        <p:spPr>
+          <a:xfrm>
+            <a:off x="5169408" y="1892808"/>
+            <a:ext cx="237744" cy="237744"/>
+          </a:xfrm>
+          <a:prstGeom prst="ellipse">
+            <a:avLst/>
+          </a:prstGeom>
+          <a:solidFill>
+            <a:srgbClr val="1565C0"/>
+          </a:solidFill>
+          <a:ln>
+            <a:noFill/>
+          </a:ln>
+          <a:effectLst/>
+        </p:spPr>
+        <p:style>
+          <a:lnRef idx="1">
+            <a:schemeClr val="accent1"/>
+          </a:lnRef>
+          <a:fillRef idx="3">
+            <a:schemeClr val="accent1"/>
+          </a:fillRef>
+          <a:effectRef idx="2">
+            <a:schemeClr val="accent1"/>
+          </a:effectRef>
+          <a:fontRef idx="minor">
+            <a:schemeClr val="lt1"/>
+          </a:fontRef>
+        </p:style>
+        <p:txBody>
+          <a:bodyPr rtlCol="0" anchor="ctr"/>
+          <a:lstStyle/>
+          <a:p>
+            <a:pPr algn="ctr"/>
+          </a:p>
+        </p:txBody>
+      </p:sp>
+      <p:sp>
+        <p:nvSpPr>
+          <p:cNvPr id="30" name="Rounded Rectangle 29"/>
+          <p:cNvSpPr/>
+          <p:nvPr/>
+        </p:nvSpPr>
+        <p:spPr>
+          <a:xfrm>
+            <a:off x="5660136" y="1481328"/>
+            <a:ext cx="597408" cy="1554480"/>
+          </a:xfrm>
+          <a:prstGeom prst="roundRect">
+            <a:avLst>
+              <a:gd name="adj" fmla="val 10000"/>
+            </a:avLst>
+          </a:prstGeom>
+          <a:solidFill>
+            <a:srgbClr val="EEF3F9"/>
+          </a:solidFill>
+          <a:ln>
+            <a:noFill/>
+          </a:ln>
+          <a:effectLst/>
+        </p:spPr>
+        <p:style>
+          <a:lnRef idx="1">
+            <a:schemeClr val="accent1"/>
+          </a:lnRef>
+          <a:fillRef idx="3">
+            <a:schemeClr val="accent1"/>
+          </a:fillRef>
+          <a:effectRef idx="2">
+            <a:schemeClr val="accent1"/>
+          </a:effectRef>
+          <a:fontRef idx="minor">
+            <a:schemeClr val="lt1"/>
+          </a:fontRef>
+        </p:style>
+        <p:txBody>
+          <a:bodyPr rtlCol="0" anchor="ctr"/>
+          <a:lstStyle/>
+          <a:p>
+            <a:pPr algn="ctr"/>
+          </a:p>
+        </p:txBody>
+      </p:sp>
+      <p:sp>
+        <p:nvSpPr>
+          <p:cNvPr id="31" name="TextBox 30"/>
+          <p:cNvSpPr txBox="1"/>
+          <p:nvPr/>
+        </p:nvSpPr>
+        <p:spPr>
+          <a:xfrm>
+            <a:off x="5623560" y="1572768"/>
+            <a:ext cx="670560" cy="228600"/>
+          </a:xfrm>
+          <a:prstGeom prst="rect">
+            <a:avLst/>
+          </a:prstGeom>
+          <a:noFill/>
+        </p:spPr>
+        <p:txBody>
+          <a:bodyPr wrap="square" lIns="0" rIns="0" tIns="0" bIns="0" anchor="t">
+            <a:spAutoFit/>
+          </a:bodyPr>
+          <a:lstStyle/>
+          <a:p>
+            <a:pPr algn="ctr"/>
+            <a:r>
+              <a:rPr sz="1000" b="1">
+                <a:solidFill>
+                  <a:srgbClr val="1F2A37"/>
+                </a:solidFill>
+                <a:latin typeface="Arial"/>
+              </a:rPr>
+              <a:t>Abr</a:t>
+            </a:r>
+          </a:p>
+        </p:txBody>
+      </p:sp>
+      <p:sp>
+        <p:nvSpPr>
+          <p:cNvPr id="32" name="Oval 31"/>
+          <p:cNvSpPr/>
+          <p:nvPr/>
+        </p:nvSpPr>
+        <p:spPr>
+          <a:xfrm>
+            <a:off x="5839968" y="1892808"/>
+            <a:ext cx="237744" cy="237744"/>
+          </a:xfrm>
+          <a:prstGeom prst="ellipse">
+            <a:avLst/>
+          </a:prstGeom>
+          <a:solidFill>
+            <a:srgbClr val="E8871E"/>
+          </a:solidFill>
+          <a:ln>
+            <a:noFill/>
+          </a:ln>
+          <a:effectLst/>
+        </p:spPr>
+        <p:style>
+          <a:lnRef idx="1">
+            <a:schemeClr val="accent1"/>
+          </a:lnRef>
+          <a:fillRef idx="3">
+            <a:schemeClr val="accent1"/>
+          </a:fillRef>
+          <a:effectRef idx="2">
+            <a:schemeClr val="accent1"/>
+          </a:effectRef>
+          <a:fontRef idx="minor">
+            <a:schemeClr val="lt1"/>
+          </a:fontRef>
+        </p:style>
+        <p:txBody>
+          <a:bodyPr rtlCol="0" anchor="ctr"/>
+          <a:lstStyle/>
+          <a:p>
+            <a:pPr algn="ctr"/>
+          </a:p>
+        </p:txBody>
+      </p:sp>
+      <p:sp>
+        <p:nvSpPr>
+          <p:cNvPr id="33" name="Rounded Rectangle 32"/>
+          <p:cNvSpPr/>
+          <p:nvPr/>
+        </p:nvSpPr>
+        <p:spPr>
+          <a:xfrm>
+            <a:off x="6330696" y="1481328"/>
+            <a:ext cx="597408" cy="1554480"/>
+          </a:xfrm>
+          <a:prstGeom prst="roundRect">
+            <a:avLst>
+              <a:gd name="adj" fmla="val 10000"/>
+            </a:avLst>
+          </a:prstGeom>
+          <a:solidFill>
+            <a:srgbClr val="EEF3F9"/>
+          </a:solidFill>
+          <a:ln>
+            <a:noFill/>
+          </a:ln>
+          <a:effectLst/>
+        </p:spPr>
+        <p:style>
+          <a:lnRef idx="1">
+            <a:schemeClr val="accent1"/>
+          </a:lnRef>
+          <a:fillRef idx="3">
+            <a:schemeClr val="accent1"/>
+          </a:fillRef>
+          <a:effectRef idx="2">
+            <a:schemeClr val="accent1"/>
+          </a:effectRef>
+          <a:fontRef idx="minor">
+            <a:schemeClr val="lt1"/>
+          </a:fontRef>
+        </p:style>
+        <p:txBody>
+          <a:bodyPr rtlCol="0" anchor="ctr"/>
+          <a:lstStyle/>
+          <a:p>
+            <a:pPr algn="ctr"/>
+          </a:p>
+        </p:txBody>
+      </p:sp>
+      <p:sp>
+        <p:nvSpPr>
+          <p:cNvPr id="34" name="TextBox 33"/>
+          <p:cNvSpPr txBox="1"/>
+          <p:nvPr/>
+        </p:nvSpPr>
+        <p:spPr>
+          <a:xfrm>
+            <a:off x="6294120" y="1572768"/>
+            <a:ext cx="670560" cy="228600"/>
+          </a:xfrm>
+          <a:prstGeom prst="rect">
+            <a:avLst/>
+          </a:prstGeom>
+          <a:noFill/>
+        </p:spPr>
+        <p:txBody>
+          <a:bodyPr wrap="square" lIns="0" rIns="0" tIns="0" bIns="0" anchor="t">
+            <a:spAutoFit/>
+          </a:bodyPr>
+          <a:lstStyle/>
+          <a:p>
+            <a:pPr algn="ctr"/>
+            <a:r>
+              <a:rPr sz="1000" b="1">
+                <a:solidFill>
+                  <a:srgbClr val="1F2A37"/>
+                </a:solidFill>
+                <a:latin typeface="Arial"/>
+              </a:rPr>
+              <a:t>May</a:t>
+            </a:r>
+          </a:p>
+        </p:txBody>
+      </p:sp>
+      <p:sp>
+        <p:nvSpPr>
+          <p:cNvPr id="35" name="Oval 34"/>
+          <p:cNvSpPr/>
+          <p:nvPr/>
+        </p:nvSpPr>
+        <p:spPr>
+          <a:xfrm>
+            <a:off x="6510528" y="1892808"/>
+            <a:ext cx="237744" cy="237744"/>
+          </a:xfrm>
+          <a:prstGeom prst="ellipse">
+            <a:avLst/>
+          </a:prstGeom>
+          <a:solidFill>
+            <a:srgbClr val="1565C0"/>
+          </a:solidFill>
+          <a:ln>
+            <a:noFill/>
+          </a:ln>
+          <a:effectLst/>
+        </p:spPr>
+        <p:style>
+          <a:lnRef idx="1">
+            <a:schemeClr val="accent1"/>
+          </a:lnRef>
+          <a:fillRef idx="3">
+            <a:schemeClr val="accent1"/>
+          </a:fillRef>
+          <a:effectRef idx="2">
+            <a:schemeClr val="accent1"/>
+          </a:effectRef>
+          <a:fontRef idx="minor">
+            <a:schemeClr val="lt1"/>
+          </a:fontRef>
+        </p:style>
+        <p:txBody>
+          <a:bodyPr rtlCol="0" anchor="ctr"/>
+          <a:lstStyle/>
+          <a:p>
+            <a:pPr algn="ctr"/>
+          </a:p>
+        </p:txBody>
+      </p:sp>
+      <p:sp>
+        <p:nvSpPr>
+          <p:cNvPr id="36" name="Oval 35"/>
+          <p:cNvSpPr/>
+          <p:nvPr/>
+        </p:nvSpPr>
+        <p:spPr>
+          <a:xfrm>
+            <a:off x="6510528" y="2167128"/>
+            <a:ext cx="237744" cy="237744"/>
+          </a:xfrm>
+          <a:prstGeom prst="ellipse">
+            <a:avLst/>
+          </a:prstGeom>
+          <a:solidFill>
+            <a:srgbClr val="1565C0"/>
+          </a:solidFill>
+          <a:ln>
+            <a:noFill/>
+          </a:ln>
+          <a:effectLst/>
+        </p:spPr>
+        <p:style>
+          <a:lnRef idx="1">
+            <a:schemeClr val="accent1"/>
+          </a:lnRef>
+          <a:fillRef idx="3">
+            <a:schemeClr val="accent1"/>
+          </a:fillRef>
+          <a:effectRef idx="2">
+            <a:schemeClr val="accent1"/>
+          </a:effectRef>
+          <a:fontRef idx="minor">
+            <a:schemeClr val="lt1"/>
+          </a:fontRef>
+        </p:style>
+        <p:txBody>
+          <a:bodyPr rtlCol="0" anchor="ctr"/>
+          <a:lstStyle/>
+          <a:p>
+            <a:pPr algn="ctr"/>
+          </a:p>
+        </p:txBody>
+      </p:sp>
+      <p:sp>
+        <p:nvSpPr>
+          <p:cNvPr id="37" name="Rounded Rectangle 36"/>
+          <p:cNvSpPr/>
+          <p:nvPr/>
+        </p:nvSpPr>
+        <p:spPr>
+          <a:xfrm>
+            <a:off x="7001256" y="1481328"/>
+            <a:ext cx="597408" cy="1554480"/>
+          </a:xfrm>
+          <a:prstGeom prst="roundRect">
+            <a:avLst>
+              <a:gd name="adj" fmla="val 10000"/>
+            </a:avLst>
+          </a:prstGeom>
+          <a:solidFill>
+            <a:srgbClr val="EEF3F9"/>
+          </a:solidFill>
+          <a:ln>
+            <a:noFill/>
+          </a:ln>
+          <a:effectLst/>
+        </p:spPr>
+        <p:style>
+          <a:lnRef idx="1">
+            <a:schemeClr val="accent1"/>
+          </a:lnRef>
+          <a:fillRef idx="3">
+            <a:schemeClr val="accent1"/>
+          </a:fillRef>
+          <a:effectRef idx="2">
+            <a:schemeClr val="accent1"/>
+          </a:effectRef>
+          <a:fontRef idx="minor">
+            <a:schemeClr val="lt1"/>
+          </a:fontRef>
+        </p:style>
+        <p:txBody>
+          <a:bodyPr rtlCol="0" anchor="ctr"/>
+          <a:lstStyle/>
+          <a:p>
+            <a:pPr algn="ctr"/>
+          </a:p>
+        </p:txBody>
+      </p:sp>
+      <p:sp>
+        <p:nvSpPr>
+          <p:cNvPr id="38" name="TextBox 37"/>
+          <p:cNvSpPr txBox="1"/>
+          <p:nvPr/>
+        </p:nvSpPr>
+        <p:spPr>
+          <a:xfrm>
+            <a:off x="6964680" y="1572768"/>
+            <a:ext cx="670560" cy="228600"/>
+          </a:xfrm>
+          <a:prstGeom prst="rect">
+            <a:avLst/>
+          </a:prstGeom>
+          <a:noFill/>
+        </p:spPr>
+        <p:txBody>
+          <a:bodyPr wrap="square" lIns="0" rIns="0" tIns="0" bIns="0" anchor="t">
+            <a:spAutoFit/>
+          </a:bodyPr>
+          <a:lstStyle/>
+          <a:p>
+            <a:pPr algn="ctr"/>
+            <a:r>
+              <a:rPr sz="1000" b="1">
+                <a:solidFill>
+                  <a:srgbClr val="1F2A37"/>
+                </a:solidFill>
+                <a:latin typeface="Arial"/>
+              </a:rPr>
+              <a:t>Jun</a:t>
+            </a:r>
+          </a:p>
+        </p:txBody>
+      </p:sp>
+      <p:sp>
+        <p:nvSpPr>
+          <p:cNvPr id="39" name="Oval 38"/>
+          <p:cNvSpPr/>
+          <p:nvPr/>
+        </p:nvSpPr>
+        <p:spPr>
+          <a:xfrm>
+            <a:off x="7181088" y="1892808"/>
+            <a:ext cx="237744" cy="237744"/>
+          </a:xfrm>
+          <a:prstGeom prst="ellipse">
+            <a:avLst/>
+          </a:prstGeom>
+          <a:solidFill>
+            <a:srgbClr val="1565C0"/>
+          </a:solidFill>
+          <a:ln>
+            <a:noFill/>
+          </a:ln>
+          <a:effectLst/>
+        </p:spPr>
+        <p:style>
+          <a:lnRef idx="1">
+            <a:schemeClr val="accent1"/>
+          </a:lnRef>
+          <a:fillRef idx="3">
+            <a:schemeClr val="accent1"/>
+          </a:fillRef>
+          <a:effectRef idx="2">
+            <a:schemeClr val="accent1"/>
+          </a:effectRef>
+          <a:fontRef idx="minor">
+            <a:schemeClr val="lt1"/>
+          </a:fontRef>
+        </p:style>
+        <p:txBody>
+          <a:bodyPr rtlCol="0" anchor="ctr"/>
+          <a:lstStyle/>
+          <a:p>
+            <a:pPr algn="ctr"/>
+          </a:p>
+        </p:txBody>
+      </p:sp>
+      <p:sp>
+        <p:nvSpPr>
+          <p:cNvPr id="40" name="Oval 39"/>
+          <p:cNvSpPr/>
+          <p:nvPr/>
+        </p:nvSpPr>
+        <p:spPr>
+          <a:xfrm>
+            <a:off x="7181088" y="2167128"/>
+            <a:ext cx="237744" cy="237744"/>
+          </a:xfrm>
+          <a:prstGeom prst="ellipse">
+            <a:avLst/>
+          </a:prstGeom>
+          <a:solidFill>
+            <a:srgbClr val="1565C0"/>
+          </a:solidFill>
+          <a:ln>
+            <a:noFill/>
+          </a:ln>
+          <a:effectLst/>
+        </p:spPr>
+        <p:style>
+          <a:lnRef idx="1">
+            <a:schemeClr val="accent1"/>
+          </a:lnRef>
+          <a:fillRef idx="3">
+            <a:schemeClr val="accent1"/>
+          </a:fillRef>
+          <a:effectRef idx="2">
+            <a:schemeClr val="accent1"/>
+          </a:effectRef>
+          <a:fontRef idx="minor">
+            <a:schemeClr val="lt1"/>
+          </a:fontRef>
+        </p:style>
+        <p:txBody>
+          <a:bodyPr rtlCol="0" anchor="ctr"/>
+          <a:lstStyle/>
+          <a:p>
+            <a:pPr algn="ctr"/>
+          </a:p>
+        </p:txBody>
+      </p:sp>
+      <p:sp>
+        <p:nvSpPr>
+          <p:cNvPr id="41" name="Rounded Rectangle 40"/>
+          <p:cNvSpPr/>
+          <p:nvPr/>
+        </p:nvSpPr>
+        <p:spPr>
+          <a:xfrm>
+            <a:off x="7671816" y="1481328"/>
+            <a:ext cx="597408" cy="1554480"/>
+          </a:xfrm>
+          <a:prstGeom prst="roundRect">
+            <a:avLst>
+              <a:gd name="adj" fmla="val 10000"/>
+            </a:avLst>
+          </a:prstGeom>
+          <a:solidFill>
+            <a:srgbClr val="EEF3F9"/>
+          </a:solidFill>
+          <a:ln>
+            <a:noFill/>
+          </a:ln>
+          <a:effectLst/>
+        </p:spPr>
+        <p:style>
+          <a:lnRef idx="1">
+            <a:schemeClr val="accent1"/>
+          </a:lnRef>
+          <a:fillRef idx="3">
+            <a:schemeClr val="accent1"/>
+          </a:fillRef>
+          <a:effectRef idx="2">
+            <a:schemeClr val="accent1"/>
+          </a:effectRef>
+          <a:fontRef idx="minor">
+            <a:schemeClr val="lt1"/>
+          </a:fontRef>
+        </p:style>
+        <p:txBody>
+          <a:bodyPr rtlCol="0" anchor="ctr"/>
+          <a:lstStyle/>
+          <a:p>
+            <a:pPr algn="ctr"/>
+          </a:p>
+        </p:txBody>
+      </p:sp>
+      <p:sp>
+        <p:nvSpPr>
+          <p:cNvPr id="42" name="TextBox 41"/>
+          <p:cNvSpPr txBox="1"/>
+          <p:nvPr/>
+        </p:nvSpPr>
+        <p:spPr>
+          <a:xfrm>
+            <a:off x="7635240" y="1572768"/>
+            <a:ext cx="670560" cy="228600"/>
+          </a:xfrm>
+          <a:prstGeom prst="rect">
+            <a:avLst/>
+          </a:prstGeom>
+          <a:noFill/>
+        </p:spPr>
+        <p:txBody>
+          <a:bodyPr wrap="square" lIns="0" rIns="0" tIns="0" bIns="0" anchor="t">
+            <a:spAutoFit/>
+          </a:bodyPr>
+          <a:lstStyle/>
+          <a:p>
+            <a:pPr algn="ctr"/>
+            <a:r>
+              <a:rPr sz="1000" b="1">
+                <a:solidFill>
+                  <a:srgbClr val="1F2A37"/>
+                </a:solidFill>
+                <a:latin typeface="Arial"/>
+              </a:rPr>
+              <a:t>Jul</a:t>
+            </a:r>
+          </a:p>
+        </p:txBody>
+      </p:sp>
+      <p:sp>
+        <p:nvSpPr>
+          <p:cNvPr id="43" name="Oval 42"/>
+          <p:cNvSpPr/>
+          <p:nvPr/>
+        </p:nvSpPr>
+        <p:spPr>
+          <a:xfrm>
+            <a:off x="7851648" y="1892808"/>
+            <a:ext cx="237744" cy="237744"/>
+          </a:xfrm>
+          <a:prstGeom prst="ellipse">
+            <a:avLst/>
+          </a:prstGeom>
+          <a:solidFill>
+            <a:srgbClr val="E8871E"/>
+          </a:solidFill>
+          <a:ln>
+            <a:noFill/>
+          </a:ln>
+          <a:effectLst/>
+        </p:spPr>
+        <p:style>
+          <a:lnRef idx="1">
+            <a:schemeClr val="accent1"/>
+          </a:lnRef>
+          <a:fillRef idx="3">
+            <a:schemeClr val="accent1"/>
+          </a:fillRef>
+          <a:effectRef idx="2">
+            <a:schemeClr val="accent1"/>
+          </a:effectRef>
+          <a:fontRef idx="minor">
+            <a:schemeClr val="lt1"/>
+          </a:fontRef>
+        </p:style>
+        <p:txBody>
+          <a:bodyPr rtlCol="0" anchor="ctr"/>
+          <a:lstStyle/>
+          <a:p>
+            <a:pPr algn="ctr"/>
+          </a:p>
+        </p:txBody>
+      </p:sp>
+      <p:sp>
+        <p:nvSpPr>
+          <p:cNvPr id="44" name="Oval 43"/>
+          <p:cNvSpPr/>
+          <p:nvPr/>
+        </p:nvSpPr>
+        <p:spPr>
+          <a:xfrm>
+            <a:off x="7851648" y="2167128"/>
+            <a:ext cx="237744" cy="237744"/>
+          </a:xfrm>
+          <a:prstGeom prst="ellipse">
+            <a:avLst/>
+          </a:prstGeom>
+          <a:solidFill>
+            <a:srgbClr val="2E9E5B"/>
+          </a:solidFill>
+          <a:ln>
+            <a:noFill/>
+          </a:ln>
+          <a:effectLst/>
+        </p:spPr>
+        <p:style>
+          <a:lnRef idx="1">
+            <a:schemeClr val="accent1"/>
+          </a:lnRef>
+          <a:fillRef idx="3">
+            <a:schemeClr val="accent1"/>
+          </a:fillRef>
+          <a:effectRef idx="2">
+            <a:schemeClr val="accent1"/>
+          </a:effectRef>
+          <a:fontRef idx="minor">
+            <a:schemeClr val="lt1"/>
+          </a:fontRef>
+        </p:style>
+        <p:txBody>
+          <a:bodyPr rtlCol="0" anchor="ctr"/>
+          <a:lstStyle/>
+          <a:p>
+            <a:pPr algn="ctr"/>
+          </a:p>
+        </p:txBody>
+      </p:sp>
+      <p:sp>
+        <p:nvSpPr>
+          <p:cNvPr id="45" name="Rounded Rectangle 44"/>
+          <p:cNvSpPr/>
+          <p:nvPr/>
+        </p:nvSpPr>
+        <p:spPr>
+          <a:xfrm>
+            <a:off x="8342376" y="1481328"/>
+            <a:ext cx="597408" cy="1554480"/>
+          </a:xfrm>
+          <a:prstGeom prst="roundRect">
+            <a:avLst>
+              <a:gd name="adj" fmla="val 10000"/>
+            </a:avLst>
+          </a:prstGeom>
+          <a:solidFill>
+            <a:srgbClr val="EEF3F9"/>
+          </a:solidFill>
+          <a:ln>
+            <a:noFill/>
+          </a:ln>
+          <a:effectLst/>
+        </p:spPr>
+        <p:style>
+          <a:lnRef idx="1">
+            <a:schemeClr val="accent1"/>
+          </a:lnRef>
+          <a:fillRef idx="3">
+            <a:schemeClr val="accent1"/>
+          </a:fillRef>
+          <a:effectRef idx="2">
+            <a:schemeClr val="accent1"/>
+          </a:effectRef>
+          <a:fontRef idx="minor">
+            <a:schemeClr val="lt1"/>
+          </a:fontRef>
+        </p:style>
+        <p:txBody>
+          <a:bodyPr rtlCol="0" anchor="ctr"/>
+          <a:lstStyle/>
+          <a:p>
+            <a:pPr algn="ctr"/>
+          </a:p>
+        </p:txBody>
+      </p:sp>
+      <p:sp>
+        <p:nvSpPr>
+          <p:cNvPr id="46" name="TextBox 45"/>
+          <p:cNvSpPr txBox="1"/>
+          <p:nvPr/>
+        </p:nvSpPr>
+        <p:spPr>
+          <a:xfrm>
+            <a:off x="8305800" y="1572768"/>
+            <a:ext cx="670560" cy="228600"/>
+          </a:xfrm>
+          <a:prstGeom prst="rect">
+            <a:avLst/>
+          </a:prstGeom>
+          <a:noFill/>
+        </p:spPr>
+        <p:txBody>
+          <a:bodyPr wrap="square" lIns="0" rIns="0" tIns="0" bIns="0" anchor="t">
+            <a:spAutoFit/>
+          </a:bodyPr>
+          <a:lstStyle/>
+          <a:p>
+            <a:pPr algn="ctr"/>
+            <a:r>
+              <a:rPr sz="1000" b="1">
+                <a:solidFill>
+                  <a:srgbClr val="1F2A37"/>
+                </a:solidFill>
+                <a:latin typeface="Arial"/>
+              </a:rPr>
+              <a:t>Ago</a:t>
+            </a:r>
+          </a:p>
+        </p:txBody>
+      </p:sp>
+      <p:sp>
+        <p:nvSpPr>
+          <p:cNvPr id="47" name="Oval 46"/>
+          <p:cNvSpPr/>
+          <p:nvPr/>
+        </p:nvSpPr>
+        <p:spPr>
+          <a:xfrm>
+            <a:off x="8522208" y="1892808"/>
+            <a:ext cx="237744" cy="237744"/>
+          </a:xfrm>
+          <a:prstGeom prst="ellipse">
+            <a:avLst/>
+          </a:prstGeom>
+          <a:solidFill>
+            <a:srgbClr val="1565C0"/>
+          </a:solidFill>
+          <a:ln>
+            <a:noFill/>
+          </a:ln>
+          <a:effectLst/>
+        </p:spPr>
+        <p:style>
+          <a:lnRef idx="1">
+            <a:schemeClr val="accent1"/>
+          </a:lnRef>
+          <a:fillRef idx="3">
+            <a:schemeClr val="accent1"/>
+          </a:fillRef>
+          <a:effectRef idx="2">
+            <a:schemeClr val="accent1"/>
+          </a:effectRef>
+          <a:fontRef idx="minor">
+            <a:schemeClr val="lt1"/>
+          </a:fontRef>
+        </p:style>
+        <p:txBody>
+          <a:bodyPr rtlCol="0" anchor="ctr"/>
+          <a:lstStyle/>
+          <a:p>
+            <a:pPr algn="ctr"/>
+          </a:p>
+        </p:txBody>
+      </p:sp>
+      <p:sp>
+        <p:nvSpPr>
+          <p:cNvPr id="48" name="Oval 47"/>
+          <p:cNvSpPr/>
+          <p:nvPr/>
+        </p:nvSpPr>
+        <p:spPr>
+          <a:xfrm>
+            <a:off x="8522208" y="2167128"/>
+            <a:ext cx="237744" cy="237744"/>
+          </a:xfrm>
+          <a:prstGeom prst="ellipse">
+            <a:avLst/>
+          </a:prstGeom>
+          <a:solidFill>
+            <a:srgbClr val="2E9E5B"/>
+          </a:solidFill>
+          <a:ln>
+            <a:noFill/>
+          </a:ln>
+          <a:effectLst/>
+        </p:spPr>
+        <p:style>
+          <a:lnRef idx="1">
+            <a:schemeClr val="accent1"/>
+          </a:lnRef>
+          <a:fillRef idx="3">
+            <a:schemeClr val="accent1"/>
+          </a:fillRef>
+          <a:effectRef idx="2">
+            <a:schemeClr val="accent1"/>
+          </a:effectRef>
+          <a:fontRef idx="minor">
+            <a:schemeClr val="lt1"/>
+          </a:fontRef>
+        </p:style>
+        <p:txBody>
+          <a:bodyPr rtlCol="0" anchor="ctr"/>
+          <a:lstStyle/>
+          <a:p>
+            <a:pPr algn="ctr"/>
+          </a:p>
+        </p:txBody>
+      </p:sp>
+      <p:sp>
+        <p:nvSpPr>
+          <p:cNvPr id="49" name="Oval 48"/>
+          <p:cNvSpPr/>
+          <p:nvPr/>
+        </p:nvSpPr>
+        <p:spPr>
+          <a:xfrm>
+            <a:off x="8522208" y="2441448"/>
+            <a:ext cx="237744" cy="237744"/>
+          </a:xfrm>
+          <a:prstGeom prst="ellipse">
+            <a:avLst/>
+          </a:prstGeom>
+          <a:solidFill>
+            <a:srgbClr val="2E9E5B"/>
+          </a:solidFill>
+          <a:ln>
+            <a:noFill/>
+          </a:ln>
+          <a:effectLst/>
+        </p:spPr>
+        <p:style>
+          <a:lnRef idx="1">
+            <a:schemeClr val="accent1"/>
+          </a:lnRef>
+          <a:fillRef idx="3">
+            <a:schemeClr val="accent1"/>
+          </a:fillRef>
+          <a:effectRef idx="2">
+            <a:schemeClr val="accent1"/>
+          </a:effectRef>
+          <a:fontRef idx="minor">
+            <a:schemeClr val="lt1"/>
+          </a:fontRef>
+        </p:style>
+        <p:txBody>
+          <a:bodyPr rtlCol="0" anchor="ctr"/>
+          <a:lstStyle/>
+          <a:p>
+            <a:pPr algn="ctr"/>
+          </a:p>
+        </p:txBody>
+      </p:sp>
+      <p:sp>
+        <p:nvSpPr>
+          <p:cNvPr id="50" name="Rounded Rectangle 49"/>
+          <p:cNvSpPr/>
+          <p:nvPr/>
+        </p:nvSpPr>
+        <p:spPr>
+          <a:xfrm>
+            <a:off x="9012935" y="1481328"/>
+            <a:ext cx="597408" cy="1554480"/>
+          </a:xfrm>
+          <a:prstGeom prst="roundRect">
+            <a:avLst>
+              <a:gd name="adj" fmla="val 10000"/>
+            </a:avLst>
+          </a:prstGeom>
+          <a:solidFill>
+            <a:srgbClr val="EEF3F9"/>
+          </a:solidFill>
+          <a:ln>
+            <a:noFill/>
+          </a:ln>
+          <a:effectLst/>
+        </p:spPr>
+        <p:style>
+          <a:lnRef idx="1">
+            <a:schemeClr val="accent1"/>
+          </a:lnRef>
+          <a:fillRef idx="3">
+            <a:schemeClr val="accent1"/>
+          </a:fillRef>
+          <a:effectRef idx="2">
+            <a:schemeClr val="accent1"/>
+          </a:effectRef>
+          <a:fontRef idx="minor">
+            <a:schemeClr val="lt1"/>
+          </a:fontRef>
+        </p:style>
+        <p:txBody>
+          <a:bodyPr rtlCol="0" anchor="ctr"/>
+          <a:lstStyle/>
+          <a:p>
+            <a:pPr algn="ctr"/>
+          </a:p>
+        </p:txBody>
+      </p:sp>
+      <p:sp>
+        <p:nvSpPr>
+          <p:cNvPr id="51" name="TextBox 50"/>
+          <p:cNvSpPr txBox="1"/>
+          <p:nvPr/>
+        </p:nvSpPr>
+        <p:spPr>
+          <a:xfrm>
+            <a:off x="8976360" y="1572768"/>
+            <a:ext cx="670560" cy="228600"/>
+          </a:xfrm>
+          <a:prstGeom prst="rect">
+            <a:avLst/>
+          </a:prstGeom>
+          <a:noFill/>
+        </p:spPr>
+        <p:txBody>
+          <a:bodyPr wrap="square" lIns="0" rIns="0" tIns="0" bIns="0" anchor="t">
+            <a:spAutoFit/>
+          </a:bodyPr>
+          <a:lstStyle/>
+          <a:p>
+            <a:pPr algn="ctr"/>
+            <a:r>
+              <a:rPr sz="1000" b="1">
+                <a:solidFill>
+                  <a:srgbClr val="1F2A37"/>
+                </a:solidFill>
+                <a:latin typeface="Arial"/>
+              </a:rPr>
+              <a:t>Sep</a:t>
+            </a:r>
+          </a:p>
+        </p:txBody>
+      </p:sp>
+      <p:sp>
+        <p:nvSpPr>
+          <p:cNvPr id="52" name="Oval 51"/>
+          <p:cNvSpPr/>
+          <p:nvPr/>
+        </p:nvSpPr>
+        <p:spPr>
+          <a:xfrm>
+            <a:off x="9192768" y="1892808"/>
+            <a:ext cx="237744" cy="237744"/>
+          </a:xfrm>
+          <a:prstGeom prst="ellipse">
+            <a:avLst/>
+          </a:prstGeom>
+          <a:solidFill>
+            <a:srgbClr val="2E9E5B"/>
+          </a:solidFill>
+          <a:ln>
+            <a:noFill/>
+          </a:ln>
+          <a:effectLst/>
+        </p:spPr>
+        <p:style>
+          <a:lnRef idx="1">
+            <a:schemeClr val="accent1"/>
+          </a:lnRef>
+          <a:fillRef idx="3">
+            <a:schemeClr val="accent1"/>
+          </a:fillRef>
+          <a:effectRef idx="2">
+            <a:schemeClr val="accent1"/>
+          </a:effectRef>
+          <a:fontRef idx="minor">
+            <a:schemeClr val="lt1"/>
+          </a:fontRef>
+        </p:style>
+        <p:txBody>
+          <a:bodyPr rtlCol="0" anchor="ctr"/>
+          <a:lstStyle/>
+          <a:p>
+            <a:pPr algn="ctr"/>
+          </a:p>
+        </p:txBody>
+      </p:sp>
+      <p:sp>
+        <p:nvSpPr>
+          <p:cNvPr id="53" name="Rounded Rectangle 52"/>
+          <p:cNvSpPr/>
+          <p:nvPr/>
+        </p:nvSpPr>
+        <p:spPr>
+          <a:xfrm>
+            <a:off x="9683496" y="1481328"/>
+            <a:ext cx="597408" cy="1554480"/>
+          </a:xfrm>
+          <a:prstGeom prst="roundRect">
+            <a:avLst>
+              <a:gd name="adj" fmla="val 10000"/>
+            </a:avLst>
+          </a:prstGeom>
+          <a:solidFill>
+            <a:srgbClr val="EEF3F9"/>
+          </a:solidFill>
+          <a:ln>
+            <a:noFill/>
+          </a:ln>
+          <a:effectLst/>
+        </p:spPr>
+        <p:style>
+          <a:lnRef idx="1">
+            <a:schemeClr val="accent1"/>
+          </a:lnRef>
+          <a:fillRef idx="3">
+            <a:schemeClr val="accent1"/>
+          </a:fillRef>
+          <a:effectRef idx="2">
+            <a:schemeClr val="accent1"/>
+          </a:effectRef>
+          <a:fontRef idx="minor">
+            <a:schemeClr val="lt1"/>
+          </a:fontRef>
+        </p:style>
+        <p:txBody>
+          <a:bodyPr rtlCol="0" anchor="ctr"/>
+          <a:lstStyle/>
+          <a:p>
+            <a:pPr algn="ctr"/>
+          </a:p>
+        </p:txBody>
+      </p:sp>
+      <p:sp>
+        <p:nvSpPr>
+          <p:cNvPr id="54" name="Rounded Rectangle 53"/>
+          <p:cNvSpPr/>
+          <p:nvPr/>
+        </p:nvSpPr>
+        <p:spPr>
+          <a:xfrm>
+            <a:off x="9683496" y="1481328"/>
+            <a:ext cx="597408" cy="1554480"/>
+          </a:xfrm>
+          <a:prstGeom prst="roundRect">
+            <a:avLst>
+              <a:gd name="adj" fmla="val 10000"/>
+            </a:avLst>
+          </a:prstGeom>
+          <a:noFill/>
+          <a:ln w="12700">
+            <a:solidFill>
+              <a:srgbClr val="C62828"/>
+            </a:solidFill>
+          </a:ln>
+          <a:effectLst/>
+        </p:spPr>
+        <p:style>
+          <a:lnRef idx="1">
+            <a:schemeClr val="accent1"/>
+          </a:lnRef>
+          <a:fillRef idx="3">
+            <a:schemeClr val="accent1"/>
+          </a:fillRef>
+          <a:effectRef idx="2">
+            <a:schemeClr val="accent1"/>
+          </a:effectRef>
+          <a:fontRef idx="minor">
+            <a:schemeClr val="lt1"/>
+          </a:fontRef>
+        </p:style>
+        <p:txBody>
+          <a:bodyPr rtlCol="0" anchor="ctr"/>
+          <a:lstStyle/>
+          <a:p>
+            <a:pPr algn="ctr"/>
+          </a:p>
+        </p:txBody>
+      </p:sp>
+      <p:sp>
+        <p:nvSpPr>
+          <p:cNvPr id="55" name="TextBox 54"/>
+          <p:cNvSpPr txBox="1"/>
+          <p:nvPr/>
+        </p:nvSpPr>
+        <p:spPr>
+          <a:xfrm>
+            <a:off x="9646920" y="1572768"/>
+            <a:ext cx="670560" cy="228600"/>
+          </a:xfrm>
+          <a:prstGeom prst="rect">
+            <a:avLst/>
+          </a:prstGeom>
+          <a:noFill/>
+        </p:spPr>
+        <p:txBody>
+          <a:bodyPr wrap="square" lIns="0" rIns="0" tIns="0" bIns="0" anchor="t">
+            <a:spAutoFit/>
+          </a:bodyPr>
+          <a:lstStyle/>
+          <a:p>
+            <a:pPr algn="ctr"/>
+            <a:r>
+              <a:rPr sz="1000" b="1">
+                <a:solidFill>
+                  <a:srgbClr val="C62828"/>
+                </a:solidFill>
+                <a:latin typeface="Arial"/>
+              </a:rPr>
+              <a:t>Oct</a:t>
+            </a:r>
+          </a:p>
+        </p:txBody>
+      </p:sp>
+      <p:sp>
+        <p:nvSpPr>
+          <p:cNvPr id="56" name="Oval 55"/>
+          <p:cNvSpPr/>
+          <p:nvPr/>
+        </p:nvSpPr>
+        <p:spPr>
+          <a:xfrm>
+            <a:off x="9863328" y="1892808"/>
+            <a:ext cx="237744" cy="237744"/>
+          </a:xfrm>
+          <a:prstGeom prst="ellipse">
+            <a:avLst/>
+          </a:prstGeom>
+          <a:solidFill>
+            <a:srgbClr val="1565C0"/>
+          </a:solidFill>
+          <a:ln>
+            <a:noFill/>
+          </a:ln>
+          <a:effectLst/>
+        </p:spPr>
+        <p:style>
+          <a:lnRef idx="1">
+            <a:schemeClr val="accent1"/>
+          </a:lnRef>
+          <a:fillRef idx="3">
+            <a:schemeClr val="accent1"/>
+          </a:fillRef>
+          <a:effectRef idx="2">
+            <a:schemeClr val="accent1"/>
+          </a:effectRef>
+          <a:fontRef idx="minor">
+            <a:schemeClr val="lt1"/>
+          </a:fontRef>
+        </p:style>
+        <p:txBody>
+          <a:bodyPr rtlCol="0" anchor="ctr"/>
+          <a:lstStyle/>
+          <a:p>
+            <a:pPr algn="ctr"/>
+          </a:p>
+        </p:txBody>
+      </p:sp>
+      <p:sp>
+        <p:nvSpPr>
+          <p:cNvPr id="57" name="Oval 56"/>
+          <p:cNvSpPr/>
+          <p:nvPr/>
+        </p:nvSpPr>
+        <p:spPr>
+          <a:xfrm>
+            <a:off x="9863328" y="2167128"/>
+            <a:ext cx="237744" cy="237744"/>
+          </a:xfrm>
+          <a:prstGeom prst="ellipse">
+            <a:avLst/>
+          </a:prstGeom>
+          <a:solidFill>
+            <a:srgbClr val="E8871E"/>
+          </a:solidFill>
+          <a:ln>
+            <a:noFill/>
+          </a:ln>
+          <a:effectLst/>
+        </p:spPr>
+        <p:style>
+          <a:lnRef idx="1">
+            <a:schemeClr val="accent1"/>
+          </a:lnRef>
+          <a:fillRef idx="3">
+            <a:schemeClr val="accent1"/>
+          </a:fillRef>
+          <a:effectRef idx="2">
+            <a:schemeClr val="accent1"/>
+          </a:effectRef>
+          <a:fontRef idx="minor">
+            <a:schemeClr val="lt1"/>
+          </a:fontRef>
+        </p:style>
+        <p:txBody>
+          <a:bodyPr rtlCol="0" anchor="ctr"/>
+          <a:lstStyle/>
+          <a:p>
+            <a:pPr algn="ctr"/>
+          </a:p>
+        </p:txBody>
+      </p:sp>
+      <p:sp>
+        <p:nvSpPr>
+          <p:cNvPr id="58" name="Oval 57"/>
+          <p:cNvSpPr/>
+          <p:nvPr/>
+        </p:nvSpPr>
+        <p:spPr>
+          <a:xfrm>
+            <a:off x="9863328" y="2441448"/>
+            <a:ext cx="237744" cy="237744"/>
+          </a:xfrm>
+          <a:prstGeom prst="ellipse">
+            <a:avLst/>
+          </a:prstGeom>
+          <a:solidFill>
+            <a:srgbClr val="2E9E5B"/>
+          </a:solidFill>
+          <a:ln>
+            <a:noFill/>
+          </a:ln>
+          <a:effectLst/>
+        </p:spPr>
+        <p:style>
+          <a:lnRef idx="1">
+            <a:schemeClr val="accent1"/>
+          </a:lnRef>
+          <a:fillRef idx="3">
+            <a:schemeClr val="accent1"/>
+          </a:fillRef>
+          <a:effectRef idx="2">
+            <a:schemeClr val="accent1"/>
+          </a:effectRef>
+          <a:fontRef idx="minor">
+            <a:schemeClr val="lt1"/>
+          </a:fontRef>
+        </p:style>
+        <p:txBody>
+          <a:bodyPr rtlCol="0" anchor="ctr"/>
+          <a:lstStyle/>
+          <a:p>
+            <a:pPr algn="ctr"/>
+          </a:p>
+        </p:txBody>
+      </p:sp>
+      <p:sp>
+        <p:nvSpPr>
+          <p:cNvPr id="59" name="Rounded Rectangle 58"/>
+          <p:cNvSpPr/>
+          <p:nvPr/>
+        </p:nvSpPr>
+        <p:spPr>
+          <a:xfrm>
+            <a:off x="10354056" y="1481328"/>
             <a:ext cx="597408" cy="1554480"/>
           </a:xfrm>
           <a:prstGeom prst="roundRect">
@@ -4969,13 +6373,13 @@
       </p:sp>
       <p:sp>
         <p:nvSpPr>
-          <p:cNvPr id="27" name="TextBox 26"/>
+          <p:cNvPr id="60" name="TextBox 59"/>
           <p:cNvSpPr txBox="1"/>
           <p:nvPr/>
         </p:nvSpPr>
         <p:spPr>
           <a:xfrm>
-            <a:off x="4953000" y="1572768"/>
+            <a:off x="10317480" y="1572768"/>
             <a:ext cx="670560" cy="228600"/>
           </a:xfrm>
           <a:prstGeom prst="rect">
@@ -4997,20 +6401,20 @@
                 </a:solidFill>
                 <a:latin typeface="Arial"/>
               </a:rPr>
-              <a:t>Mar</a:t>
-            </a:r>
-          </a:p>
-        </p:txBody>
-      </p:sp>
-      <p:sp>
-        <p:nvSpPr>
-          <p:cNvPr id="28" name="Rounded Rectangle 27"/>
+              <a:t>Nov</a:t>
+            </a:r>
+          </a:p>
+        </p:txBody>
+      </p:sp>
+      <p:sp>
+        <p:nvSpPr>
+          <p:cNvPr id="61" name="Rounded Rectangle 60"/>
           <p:cNvSpPr/>
           <p:nvPr/>
         </p:nvSpPr>
         <p:spPr>
           <a:xfrm>
-            <a:off x="5660136" y="1481328"/>
+            <a:off x="11024615" y="1481328"/>
             <a:ext cx="597408" cy="1554480"/>
           </a:xfrm>
           <a:prstGeom prst="roundRect">
@@ -5050,13 +6454,13 @@
       </p:sp>
       <p:sp>
         <p:nvSpPr>
-          <p:cNvPr id="29" name="TextBox 28"/>
+          <p:cNvPr id="62" name="TextBox 61"/>
           <p:cNvSpPr txBox="1"/>
           <p:nvPr/>
         </p:nvSpPr>
         <p:spPr>
           <a:xfrm>
-            <a:off x="5623560" y="1572768"/>
+            <a:off x="10988040" y="1572768"/>
             <a:ext cx="670560" cy="228600"/>
           </a:xfrm>
           <a:prstGeom prst="rect">
@@ -5078,102 +6482,21 @@
                 </a:solidFill>
                 <a:latin typeface="Arial"/>
               </a:rPr>
-              <a:t>Abr</a:t>
-            </a:r>
-          </a:p>
-        </p:txBody>
-      </p:sp>
-      <p:sp>
-        <p:nvSpPr>
-          <p:cNvPr id="30" name="Rounded Rectangle 29"/>
+              <a:t>Dic</a:t>
+            </a:r>
+          </a:p>
+        </p:txBody>
+      </p:sp>
+      <p:sp>
+        <p:nvSpPr>
+          <p:cNvPr id="63" name="Oval 62"/>
           <p:cNvSpPr/>
           <p:nvPr/>
         </p:nvSpPr>
         <p:spPr>
           <a:xfrm>
-            <a:off x="6330696" y="1481328"/>
-            <a:ext cx="597408" cy="1554480"/>
-          </a:xfrm>
-          <a:prstGeom prst="roundRect">
-            <a:avLst>
-              <a:gd name="adj" fmla="val 10000"/>
-            </a:avLst>
-          </a:prstGeom>
-          <a:solidFill>
-            <a:srgbClr val="EEF3F9"/>
-          </a:solidFill>
-          <a:ln>
-            <a:noFill/>
-          </a:ln>
-          <a:effectLst/>
-        </p:spPr>
-        <p:style>
-          <a:lnRef idx="1">
-            <a:schemeClr val="accent1"/>
-          </a:lnRef>
-          <a:fillRef idx="3">
-            <a:schemeClr val="accent1"/>
-          </a:fillRef>
-          <a:effectRef idx="2">
-            <a:schemeClr val="accent1"/>
-          </a:effectRef>
-          <a:fontRef idx="minor">
-            <a:schemeClr val="lt1"/>
-          </a:fontRef>
-        </p:style>
-        <p:txBody>
-          <a:bodyPr rtlCol="0" anchor="ctr"/>
-          <a:lstStyle/>
-          <a:p>
-            <a:pPr algn="ctr"/>
-          </a:p>
-        </p:txBody>
-      </p:sp>
-      <p:sp>
-        <p:nvSpPr>
-          <p:cNvPr id="31" name="TextBox 30"/>
-          <p:cNvSpPr txBox="1"/>
-          <p:nvPr/>
-        </p:nvSpPr>
-        <p:spPr>
-          <a:xfrm>
-            <a:off x="6294120" y="1572768"/>
-            <a:ext cx="670560" cy="228600"/>
-          </a:xfrm>
-          <a:prstGeom prst="rect">
-            <a:avLst/>
-          </a:prstGeom>
-          <a:noFill/>
-        </p:spPr>
-        <p:txBody>
-          <a:bodyPr wrap="square" lIns="0" rIns="0" tIns="0" bIns="0" anchor="t">
-            <a:spAutoFit/>
-          </a:bodyPr>
-          <a:lstStyle/>
-          <a:p>
-            <a:pPr algn="ctr"/>
-            <a:r>
-              <a:rPr sz="1000" b="1">
-                <a:solidFill>
-                  <a:srgbClr val="1F2A37"/>
-                </a:solidFill>
-                <a:latin typeface="Arial"/>
-              </a:rPr>
-              <a:t>May</a:t>
-            </a:r>
-          </a:p>
-        </p:txBody>
-      </p:sp>
-      <p:sp>
-        <p:nvSpPr>
-          <p:cNvPr id="32" name="Oval 31"/>
-          <p:cNvSpPr/>
-          <p:nvPr/>
-        </p:nvSpPr>
-        <p:spPr>
-          <a:xfrm>
-            <a:off x="6510528" y="1892808"/>
-            <a:ext cx="237744" cy="237744"/>
+            <a:off x="3611880" y="3172968"/>
+            <a:ext cx="164592" cy="164592"/>
           </a:xfrm>
           <a:prstGeom prst="ellipse">
             <a:avLst/>
@@ -5210,22 +6533,55 @@
       </p:sp>
       <p:sp>
         <p:nvSpPr>
-          <p:cNvPr id="33" name="Rounded Rectangle 32"/>
+          <p:cNvPr id="64" name="TextBox 63"/>
+          <p:cNvSpPr txBox="1"/>
+          <p:nvPr/>
+        </p:nvSpPr>
+        <p:spPr>
+          <a:xfrm>
+            <a:off x="3840480" y="3136392"/>
+            <a:ext cx="1463040" cy="237744"/>
+          </a:xfrm>
+          <a:prstGeom prst="rect">
+            <a:avLst/>
+          </a:prstGeom>
+          <a:noFill/>
+        </p:spPr>
+        <p:txBody>
+          <a:bodyPr wrap="square" lIns="0" rIns="0" tIns="0" bIns="0" anchor="ctr">
+            <a:spAutoFit/>
+          </a:bodyPr>
+          <a:lstStyle/>
+          <a:p>
+            <a:pPr algn="l"/>
+            <a:r>
+              <a:rPr sz="1000" b="0">
+                <a:solidFill>
+                  <a:srgbClr val="5B6B7B"/>
+                </a:solidFill>
+                <a:latin typeface="Arial"/>
+              </a:rPr>
+              <a:t>Auditoría Interna</a:t>
+            </a:r>
+          </a:p>
+        </p:txBody>
+      </p:sp>
+      <p:sp>
+        <p:nvSpPr>
+          <p:cNvPr id="65" name="Oval 64"/>
           <p:cNvSpPr/>
           <p:nvPr/>
         </p:nvSpPr>
         <p:spPr>
           <a:xfrm>
-            <a:off x="7001256" y="1481328"/>
-            <a:ext cx="597408" cy="1554480"/>
-          </a:xfrm>
-          <a:prstGeom prst="roundRect">
-            <a:avLst>
-              <a:gd name="adj" fmla="val 10000"/>
-            </a:avLst>
+            <a:off x="5212080" y="3172968"/>
+            <a:ext cx="164592" cy="164592"/>
+          </a:xfrm>
+          <a:prstGeom prst="ellipse">
+            <a:avLst/>
           </a:prstGeom>
           <a:solidFill>
-            <a:srgbClr val="F7F9FC"/>
+            <a:srgbClr val="E8871E"/>
           </a:solidFill>
           <a:ln>
             <a:noFill/>
@@ -5256,14 +6612,14 @@
       </p:sp>
       <p:sp>
         <p:nvSpPr>
-          <p:cNvPr id="34" name="TextBox 33"/>
+          <p:cNvPr id="66" name="TextBox 65"/>
           <p:cNvSpPr txBox="1"/>
           <p:nvPr/>
         </p:nvSpPr>
         <p:spPr>
           <a:xfrm>
-            <a:off x="6964680" y="1572768"/>
-            <a:ext cx="670560" cy="228600"/>
+            <a:off x="5440680" y="3136392"/>
+            <a:ext cx="1463040" cy="237744"/>
           </a:xfrm>
           <a:prstGeom prst="rect">
             <a:avLst/>
@@ -5271,115 +6627,34 @@
           <a:noFill/>
         </p:spPr>
         <p:txBody>
-          <a:bodyPr wrap="square" lIns="0" rIns="0" tIns="0" bIns="0" anchor="t">
+          <a:bodyPr wrap="square" lIns="0" rIns="0" tIns="0" bIns="0" anchor="ctr">
             <a:spAutoFit/>
           </a:bodyPr>
           <a:lstStyle/>
           <a:p>
-            <a:pPr algn="ctr"/>
-            <a:r>
-              <a:rPr sz="1000" b="1">
+            <a:pPr algn="l"/>
+            <a:r>
+              <a:rPr sz="1000" b="0">
                 <a:solidFill>
-                  <a:srgbClr val="A7B2BF"/>
+                  <a:srgbClr val="5B6B7B"/>
                 </a:solidFill>
                 <a:latin typeface="Arial"/>
               </a:rPr>
-              <a:t>Jun</a:t>
-            </a:r>
-          </a:p>
-        </p:txBody>
-      </p:sp>
-      <p:sp>
-        <p:nvSpPr>
-          <p:cNvPr id="35" name="Rounded Rectangle 34"/>
+              <a:t>Auditoría Externa</a:t>
+            </a:r>
+          </a:p>
+        </p:txBody>
+      </p:sp>
+      <p:sp>
+        <p:nvSpPr>
+          <p:cNvPr id="67" name="Oval 66"/>
           <p:cNvSpPr/>
           <p:nvPr/>
         </p:nvSpPr>
         <p:spPr>
           <a:xfrm>
-            <a:off x="7671816" y="1481328"/>
-            <a:ext cx="597408" cy="1554480"/>
-          </a:xfrm>
-          <a:prstGeom prst="roundRect">
-            <a:avLst>
-              <a:gd name="adj" fmla="val 10000"/>
-            </a:avLst>
-          </a:prstGeom>
-          <a:solidFill>
-            <a:srgbClr val="EEF3F9"/>
-          </a:solidFill>
-          <a:ln>
-            <a:noFill/>
-          </a:ln>
-          <a:effectLst/>
-        </p:spPr>
-        <p:style>
-          <a:lnRef idx="1">
-            <a:schemeClr val="accent1"/>
-          </a:lnRef>
-          <a:fillRef idx="3">
-            <a:schemeClr val="accent1"/>
-          </a:fillRef>
-          <a:effectRef idx="2">
-            <a:schemeClr val="accent1"/>
-          </a:effectRef>
-          <a:fontRef idx="minor">
-            <a:schemeClr val="lt1"/>
-          </a:fontRef>
-        </p:style>
-        <p:txBody>
-          <a:bodyPr rtlCol="0" anchor="ctr"/>
-          <a:lstStyle/>
-          <a:p>
-            <a:pPr algn="ctr"/>
-          </a:p>
-        </p:txBody>
-      </p:sp>
-      <p:sp>
-        <p:nvSpPr>
-          <p:cNvPr id="36" name="TextBox 35"/>
-          <p:cNvSpPr txBox="1"/>
-          <p:nvPr/>
-        </p:nvSpPr>
-        <p:spPr>
-          <a:xfrm>
-            <a:off x="7635240" y="1572768"/>
-            <a:ext cx="670560" cy="228600"/>
-          </a:xfrm>
-          <a:prstGeom prst="rect">
-            <a:avLst/>
-          </a:prstGeom>
-          <a:noFill/>
-        </p:spPr>
-        <p:txBody>
-          <a:bodyPr wrap="square" lIns="0" rIns="0" tIns="0" bIns="0" anchor="t">
-            <a:spAutoFit/>
-          </a:bodyPr>
-          <a:lstStyle/>
-          <a:p>
-            <a:pPr algn="ctr"/>
-            <a:r>
-              <a:rPr sz="1000" b="1">
-                <a:solidFill>
-                  <a:srgbClr val="1F2A37"/>
-                </a:solidFill>
-                <a:latin typeface="Arial"/>
-              </a:rPr>
-              <a:t>Jul</a:t>
-            </a:r>
-          </a:p>
-        </p:txBody>
-      </p:sp>
-      <p:sp>
-        <p:nvSpPr>
-          <p:cNvPr id="37" name="Oval 36"/>
-          <p:cNvSpPr/>
-          <p:nvPr/>
-        </p:nvSpPr>
-        <p:spPr>
-          <a:xfrm>
-            <a:off x="7851648" y="1892808"/>
-            <a:ext cx="237744" cy="237744"/>
+            <a:off x="6812280" y="3172968"/>
+            <a:ext cx="164592" cy="164592"/>
           </a:xfrm>
           <a:prstGeom prst="ellipse">
             <a:avLst/>
@@ -5416,22 +6691,127 @@
       </p:sp>
       <p:sp>
         <p:nvSpPr>
-          <p:cNvPr id="38" name="Rounded Rectangle 37"/>
+          <p:cNvPr id="68" name="TextBox 67"/>
+          <p:cNvSpPr txBox="1"/>
+          <p:nvPr/>
+        </p:nvSpPr>
+        <p:spPr>
+          <a:xfrm>
+            <a:off x="7040880" y="3136392"/>
+            <a:ext cx="1463040" cy="237744"/>
+          </a:xfrm>
+          <a:prstGeom prst="rect">
+            <a:avLst/>
+          </a:prstGeom>
+          <a:noFill/>
+        </p:spPr>
+        <p:txBody>
+          <a:bodyPr wrap="square" lIns="0" rIns="0" tIns="0" bIns="0" anchor="ctr">
+            <a:spAutoFit/>
+          </a:bodyPr>
+          <a:lstStyle/>
+          <a:p>
+            <a:pPr algn="l"/>
+            <a:r>
+              <a:rPr sz="1000" b="0">
+                <a:solidFill>
+                  <a:srgbClr val="5B6B7B"/>
+                </a:solidFill>
+                <a:latin typeface="Arial"/>
+              </a:rPr>
+              <a:t>SSF</a:t>
+            </a:r>
+          </a:p>
+        </p:txBody>
+      </p:sp>
+      <p:sp>
+        <p:nvSpPr>
+          <p:cNvPr id="69" name="TextBox 68"/>
+          <p:cNvSpPr txBox="1"/>
+          <p:nvPr/>
+        </p:nvSpPr>
+        <p:spPr>
+          <a:xfrm>
+            <a:off x="8595359" y="3136392"/>
+            <a:ext cx="3108960" cy="237744"/>
+          </a:xfrm>
+          <a:prstGeom prst="rect">
+            <a:avLst/>
+          </a:prstGeom>
+          <a:noFill/>
+        </p:spPr>
+        <p:txBody>
+          <a:bodyPr wrap="square" lIns="0" rIns="0" tIns="0" bIns="0" anchor="ctr">
+            <a:spAutoFit/>
+          </a:bodyPr>
+          <a:lstStyle/>
+          <a:p>
+            <a:pPr algn="l"/>
+            <a:r>
+              <a:rPr sz="1000" b="1">
+                <a:solidFill>
+                  <a:srgbClr val="C62828"/>
+                </a:solidFill>
+                <a:latin typeface="Arial"/>
+              </a:rPr>
+              <a:t>Octubre: las 3 entidades en el mismo mes</a:t>
+            </a:r>
+          </a:p>
+        </p:txBody>
+      </p:sp>
+      <p:sp>
+        <p:nvSpPr>
+          <p:cNvPr id="70" name="TextBox 69"/>
+          <p:cNvSpPr txBox="1"/>
+          <p:nvPr/>
+        </p:nvSpPr>
+        <p:spPr>
+          <a:xfrm>
+            <a:off x="3611880" y="3611880"/>
+            <a:ext cx="4937760" cy="365760"/>
+          </a:xfrm>
+          <a:prstGeom prst="rect">
+            <a:avLst/>
+          </a:prstGeom>
+          <a:noFill/>
+        </p:spPr>
+        <p:txBody>
+          <a:bodyPr wrap="square" lIns="0" rIns="0" tIns="0" bIns="0" anchor="t">
+            <a:spAutoFit/>
+          </a:bodyPr>
+          <a:lstStyle/>
+          <a:p>
+            <a:pPr algn="l"/>
+            <a:r>
+              <a:rPr sz="1700" b="1">
+                <a:solidFill>
+                  <a:srgbClr val="003D6F"/>
+                </a:solidFill>
+                <a:latin typeface="Century Gothic"/>
+              </a:rPr>
+              <a:t>Temas que se repiten</a:t>
+            </a:r>
+          </a:p>
+        </p:txBody>
+      </p:sp>
+      <p:sp>
+        <p:nvSpPr>
+          <p:cNvPr id="71" name="Rounded Rectangle 70"/>
           <p:cNvSpPr/>
           <p:nvPr/>
         </p:nvSpPr>
         <p:spPr>
           <a:xfrm>
-            <a:off x="8342376" y="1481328"/>
-            <a:ext cx="597408" cy="1554480"/>
+            <a:off x="3611880" y="4041648"/>
+            <a:ext cx="384048" cy="329184"/>
           </a:xfrm>
           <a:prstGeom prst="roundRect">
             <a:avLst>
-              <a:gd name="adj" fmla="val 10000"/>
+              <a:gd name="adj" fmla="val 20000"/>
             </a:avLst>
           </a:prstGeom>
           <a:solidFill>
-            <a:srgbClr val="EEF3F9"/>
+            <a:srgbClr val="C62828"/>
           </a:solidFill>
           <a:ln>
             <a:noFill/>
@@ -5462,14 +6842,14 @@
       </p:sp>
       <p:sp>
         <p:nvSpPr>
-          <p:cNvPr id="39" name="TextBox 38"/>
+          <p:cNvPr id="72" name="TextBox 71"/>
           <p:cNvSpPr txBox="1"/>
           <p:nvPr/>
         </p:nvSpPr>
         <p:spPr>
           <a:xfrm>
-            <a:off x="8305800" y="1572768"/>
-            <a:ext cx="670560" cy="228600"/>
+            <a:off x="3611880" y="4041648"/>
+            <a:ext cx="384048" cy="329184"/>
           </a:xfrm>
           <a:prstGeom prst="rect">
             <a:avLst/>
@@ -5477,37 +6857,86 @@
           <a:noFill/>
         </p:spPr>
         <p:txBody>
-          <a:bodyPr wrap="square" lIns="0" rIns="0" tIns="0" bIns="0" anchor="t">
+          <a:bodyPr wrap="square" lIns="0" rIns="0" tIns="0" bIns="0" anchor="ctr">
             <a:spAutoFit/>
           </a:bodyPr>
           <a:lstStyle/>
           <a:p>
             <a:pPr algn="ctr"/>
             <a:r>
-              <a:rPr sz="1000" b="1">
+              <a:rPr sz="1200" b="1">
+                <a:solidFill>
+                  <a:srgbClr val="FFFFFF"/>
+                </a:solidFill>
+                <a:latin typeface="Arial"/>
+              </a:rPr>
+              <a:t>4</a:t>
+            </a:r>
+          </a:p>
+        </p:txBody>
+      </p:sp>
+      <p:sp>
+        <p:nvSpPr>
+          <p:cNvPr id="73" name="TextBox 72"/>
+          <p:cNvSpPr txBox="1"/>
+          <p:nvPr/>
+        </p:nvSpPr>
+        <p:spPr>
+          <a:xfrm>
+            <a:off x="4114800" y="4041648"/>
+            <a:ext cx="3017520" cy="329184"/>
+          </a:xfrm>
+          <a:prstGeom prst="rect">
+            <a:avLst/>
+          </a:prstGeom>
+          <a:noFill/>
+        </p:spPr>
+        <p:txBody>
+          <a:bodyPr wrap="square" lIns="0" rIns="0" tIns="0" bIns="0" anchor="ctr">
+            <a:spAutoFit/>
+          </a:bodyPr>
+          <a:lstStyle/>
+          <a:p>
+            <a:pPr algn="l"/>
+            <a:r>
+              <a:rPr sz="1100" b="1">
                 <a:solidFill>
                   <a:srgbClr val="1F2A37"/>
                 </a:solidFill>
                 <a:latin typeface="Arial"/>
               </a:rPr>
-              <a:t>Ago</a:t>
-            </a:r>
-          </a:p>
-        </p:txBody>
-      </p:sp>
-      <p:sp>
-        <p:nvSpPr>
-          <p:cNvPr id="40" name="Oval 39"/>
+              <a:t>Actas Comité de Riesgos</a:t>
+            </a:r>
+          </a:p>
+          <a:p>
+            <a:pPr algn="l"/>
+            <a:r>
+              <a:rPr sz="900" b="0">
+                <a:solidFill>
+                  <a:srgbClr val="5B6B7B"/>
+                </a:solidFill>
+                <a:latin typeface="Arial"/>
+              </a:rPr>
+              <a:t>NRP-20</a:t>
+            </a:r>
+          </a:p>
+        </p:txBody>
+      </p:sp>
+      <p:sp>
+        <p:nvSpPr>
+          <p:cNvPr id="74" name="Rounded Rectangle 73"/>
           <p:cNvSpPr/>
           <p:nvPr/>
         </p:nvSpPr>
         <p:spPr>
           <a:xfrm>
-            <a:off x="8522208" y="1892808"/>
-            <a:ext cx="237744" cy="237744"/>
-          </a:xfrm>
-          <a:prstGeom prst="ellipse">
-            <a:avLst/>
+            <a:off x="7223760" y="4087368"/>
+            <a:ext cx="731520" cy="237744"/>
+          </a:xfrm>
+          <a:prstGeom prst="roundRect">
+            <a:avLst>
+              <a:gd name="adj" fmla="val 50000"/>
+            </a:avLst>
           </a:prstGeom>
           <a:solidFill>
             <a:srgbClr val="1565C0"/>
@@ -5532,6 +6961,116 @@
           </a:fontRef>
         </p:style>
         <p:txBody>
+          <a:bodyPr rtlCol="0" anchor="ctr" lIns="0" rIns="0" tIns="0" bIns="0"/>
+          <a:lstStyle/>
+          <a:p>
+            <a:pPr algn="ctr"/>
+            <a:r>
+              <a:rPr sz="900" b="1">
+                <a:solidFill>
+                  <a:srgbClr val="FFFFFF"/>
+                </a:solidFill>
+                <a:latin typeface="Arial"/>
+              </a:rPr>
+              <a:t>Interna ×3</a:t>
+            </a:r>
+          </a:p>
+        </p:txBody>
+      </p:sp>
+      <p:sp>
+        <p:nvSpPr>
+          <p:cNvPr id="75" name="Rounded Rectangle 74"/>
+          <p:cNvSpPr/>
+          <p:nvPr/>
+        </p:nvSpPr>
+        <p:spPr>
+          <a:xfrm>
+            <a:off x="8028432" y="4087368"/>
+            <a:ext cx="566928" cy="237744"/>
+          </a:xfrm>
+          <a:prstGeom prst="roundRect">
+            <a:avLst>
+              <a:gd name="adj" fmla="val 50000"/>
+            </a:avLst>
+          </a:prstGeom>
+          <a:solidFill>
+            <a:srgbClr val="E8871E"/>
+          </a:solidFill>
+          <a:ln>
+            <a:noFill/>
+          </a:ln>
+          <a:effectLst/>
+        </p:spPr>
+        <p:style>
+          <a:lnRef idx="1">
+            <a:schemeClr val="accent1"/>
+          </a:lnRef>
+          <a:fillRef idx="3">
+            <a:schemeClr val="accent1"/>
+          </a:fillRef>
+          <a:effectRef idx="2">
+            <a:schemeClr val="accent1"/>
+          </a:effectRef>
+          <a:fontRef idx="minor">
+            <a:schemeClr val="lt1"/>
+          </a:fontRef>
+        </p:style>
+        <p:txBody>
+          <a:bodyPr rtlCol="0" anchor="ctr" lIns="0" rIns="0" tIns="0" bIns="0"/>
+          <a:lstStyle/>
+          <a:p>
+            <a:pPr algn="ctr"/>
+            <a:r>
+              <a:rPr sz="900" b="1">
+                <a:solidFill>
+                  <a:srgbClr val="FFFFFF"/>
+                </a:solidFill>
+                <a:latin typeface="Arial"/>
+              </a:rPr>
+              <a:t>Externa</a:t>
+            </a:r>
+          </a:p>
+        </p:txBody>
+      </p:sp>
+      <p:sp>
+        <p:nvSpPr>
+          <p:cNvPr id="76" name="Rounded Rectangle 75"/>
+          <p:cNvSpPr/>
+          <p:nvPr/>
+        </p:nvSpPr>
+        <p:spPr>
+          <a:xfrm>
+            <a:off x="3611880" y="4443984"/>
+            <a:ext cx="384048" cy="329184"/>
+          </a:xfrm>
+          <a:prstGeom prst="roundRect">
+            <a:avLst>
+              <a:gd name="adj" fmla="val 20000"/>
+            </a:avLst>
+          </a:prstGeom>
+          <a:solidFill>
+            <a:srgbClr val="C62828"/>
+          </a:solidFill>
+          <a:ln>
+            <a:noFill/>
+          </a:ln>
+          <a:effectLst/>
+        </p:spPr>
+        <p:style>
+          <a:lnRef idx="1">
+            <a:schemeClr val="accent1"/>
+          </a:lnRef>
+          <a:fillRef idx="3">
+            <a:schemeClr val="accent1"/>
+          </a:fillRef>
+          <a:effectRef idx="2">
+            <a:schemeClr val="accent1"/>
+          </a:effectRef>
+          <a:fontRef idx="minor">
+            <a:schemeClr val="lt1"/>
+          </a:fontRef>
+        </p:style>
+        <p:txBody>
           <a:bodyPr rtlCol="0" anchor="ctr"/>
           <a:lstStyle/>
           <a:p>
@@ -5541,17 +7080,1108 @@
       </p:sp>
       <p:sp>
         <p:nvSpPr>
-          <p:cNvPr id="41" name="Oval 40"/>
+          <p:cNvPr id="77" name="TextBox 76"/>
+          <p:cNvSpPr txBox="1"/>
+          <p:nvPr/>
+        </p:nvSpPr>
+        <p:spPr>
+          <a:xfrm>
+            <a:off x="3611880" y="4443984"/>
+            <a:ext cx="384048" cy="329184"/>
+          </a:xfrm>
+          <a:prstGeom prst="rect">
+            <a:avLst/>
+          </a:prstGeom>
+          <a:noFill/>
+        </p:spPr>
+        <p:txBody>
+          <a:bodyPr wrap="square" lIns="0" rIns="0" tIns="0" bIns="0" anchor="ctr">
+            <a:spAutoFit/>
+          </a:bodyPr>
+          <a:lstStyle/>
+          <a:p>
+            <a:pPr algn="ctr"/>
+            <a:r>
+              <a:rPr sz="1200" b="1">
+                <a:solidFill>
+                  <a:srgbClr val="FFFFFF"/>
+                </a:solidFill>
+                <a:latin typeface="Arial"/>
+              </a:rPr>
+              <a:t>3</a:t>
+            </a:r>
+          </a:p>
+        </p:txBody>
+      </p:sp>
+      <p:sp>
+        <p:nvSpPr>
+          <p:cNvPr id="78" name="TextBox 77"/>
+          <p:cNvSpPr txBox="1"/>
+          <p:nvPr/>
+        </p:nvSpPr>
+        <p:spPr>
+          <a:xfrm>
+            <a:off x="4114800" y="4443984"/>
+            <a:ext cx="3017520" cy="329184"/>
+          </a:xfrm>
+          <a:prstGeom prst="rect">
+            <a:avLst/>
+          </a:prstGeom>
+          <a:noFill/>
+        </p:spPr>
+        <p:txBody>
+          <a:bodyPr wrap="square" lIns="0" rIns="0" tIns="0" bIns="0" anchor="ctr">
+            <a:spAutoFit/>
+          </a:bodyPr>
+          <a:lstStyle/>
+          <a:p>
+            <a:pPr algn="l"/>
+            <a:r>
+              <a:rPr sz="1100" b="1">
+                <a:solidFill>
+                  <a:srgbClr val="1F2A37"/>
+                </a:solidFill>
+                <a:latin typeface="Arial"/>
+              </a:rPr>
+              <a:t>Clasificación de cartera, mora y reservas</a:t>
+            </a:r>
+          </a:p>
+          <a:p>
+            <a:pPr algn="l"/>
+            <a:r>
+              <a:rPr sz="900" b="0">
+                <a:solidFill>
+                  <a:srgbClr val="5B6B7B"/>
+                </a:solidFill>
+                <a:latin typeface="Arial"/>
+              </a:rPr>
+              <a:t>NCB-022</a:t>
+            </a:r>
+          </a:p>
+        </p:txBody>
+      </p:sp>
+      <p:sp>
+        <p:nvSpPr>
+          <p:cNvPr id="79" name="Rounded Rectangle 78"/>
           <p:cNvSpPr/>
           <p:nvPr/>
         </p:nvSpPr>
         <p:spPr>
           <a:xfrm>
-            <a:off x="8522208" y="2167128"/>
-            <a:ext cx="237744" cy="237744"/>
-          </a:xfrm>
-          <a:prstGeom prst="ellipse">
+            <a:off x="7223760" y="4489704"/>
+            <a:ext cx="731520" cy="237744"/>
+          </a:xfrm>
+          <a:prstGeom prst="roundRect">
+            <a:avLst>
+              <a:gd name="adj" fmla="val 50000"/>
+            </a:avLst>
+          </a:prstGeom>
+          <a:solidFill>
+            <a:srgbClr val="1565C0"/>
+          </a:solidFill>
+          <a:ln>
+            <a:noFill/>
+          </a:ln>
+          <a:effectLst/>
+        </p:spPr>
+        <p:style>
+          <a:lnRef idx="1">
+            <a:schemeClr val="accent1"/>
+          </a:lnRef>
+          <a:fillRef idx="3">
+            <a:schemeClr val="accent1"/>
+          </a:fillRef>
+          <a:effectRef idx="2">
+            <a:schemeClr val="accent1"/>
+          </a:effectRef>
+          <a:fontRef idx="minor">
+            <a:schemeClr val="lt1"/>
+          </a:fontRef>
+        </p:style>
+        <p:txBody>
+          <a:bodyPr rtlCol="0" anchor="ctr" lIns="0" rIns="0" tIns="0" bIns="0"/>
+          <a:lstStyle/>
+          <a:p>
+            <a:pPr algn="ctr"/>
+            <a:r>
+              <a:rPr sz="900" b="1">
+                <a:solidFill>
+                  <a:srgbClr val="FFFFFF"/>
+                </a:solidFill>
+                <a:latin typeface="Arial"/>
+              </a:rPr>
+              <a:t>Interna ×2</a:t>
+            </a:r>
+          </a:p>
+        </p:txBody>
+      </p:sp>
+      <p:sp>
+        <p:nvSpPr>
+          <p:cNvPr id="80" name="Rounded Rectangle 79"/>
+          <p:cNvSpPr/>
+          <p:nvPr/>
+        </p:nvSpPr>
+        <p:spPr>
+          <a:xfrm>
+            <a:off x="8028432" y="4489704"/>
+            <a:ext cx="566928" cy="237744"/>
+          </a:xfrm>
+          <a:prstGeom prst="roundRect">
+            <a:avLst>
+              <a:gd name="adj" fmla="val 50000"/>
+            </a:avLst>
+          </a:prstGeom>
+          <a:solidFill>
+            <a:srgbClr val="E8871E"/>
+          </a:solidFill>
+          <a:ln>
+            <a:noFill/>
+          </a:ln>
+          <a:effectLst/>
+        </p:spPr>
+        <p:style>
+          <a:lnRef idx="1">
+            <a:schemeClr val="accent1"/>
+          </a:lnRef>
+          <a:fillRef idx="3">
+            <a:schemeClr val="accent1"/>
+          </a:fillRef>
+          <a:effectRef idx="2">
+            <a:schemeClr val="accent1"/>
+          </a:effectRef>
+          <a:fontRef idx="minor">
+            <a:schemeClr val="lt1"/>
+          </a:fontRef>
+        </p:style>
+        <p:txBody>
+          <a:bodyPr rtlCol="0" anchor="ctr" lIns="0" rIns="0" tIns="0" bIns="0"/>
+          <a:lstStyle/>
+          <a:p>
+            <a:pPr algn="ctr"/>
+            <a:r>
+              <a:rPr sz="900" b="1">
+                <a:solidFill>
+                  <a:srgbClr val="FFFFFF"/>
+                </a:solidFill>
+                <a:latin typeface="Arial"/>
+              </a:rPr>
+              <a:t>Externa</a:t>
+            </a:r>
+          </a:p>
+        </p:txBody>
+      </p:sp>
+      <p:sp>
+        <p:nvSpPr>
+          <p:cNvPr id="81" name="Rounded Rectangle 80"/>
+          <p:cNvSpPr/>
+          <p:nvPr/>
+        </p:nvSpPr>
+        <p:spPr>
+          <a:xfrm>
+            <a:off x="3611880" y="4846320"/>
+            <a:ext cx="384048" cy="329184"/>
+          </a:xfrm>
+          <a:prstGeom prst="roundRect">
+            <a:avLst>
+              <a:gd name="adj" fmla="val 20000"/>
+            </a:avLst>
+          </a:prstGeom>
+          <a:solidFill>
+            <a:srgbClr val="C62828"/>
+          </a:solidFill>
+          <a:ln>
+            <a:noFill/>
+          </a:ln>
+          <a:effectLst/>
+        </p:spPr>
+        <p:style>
+          <a:lnRef idx="1">
+            <a:schemeClr val="accent1"/>
+          </a:lnRef>
+          <a:fillRef idx="3">
+            <a:schemeClr val="accent1"/>
+          </a:fillRef>
+          <a:effectRef idx="2">
+            <a:schemeClr val="accent1"/>
+          </a:effectRef>
+          <a:fontRef idx="minor">
+            <a:schemeClr val="lt1"/>
+          </a:fontRef>
+        </p:style>
+        <p:txBody>
+          <a:bodyPr rtlCol="0" anchor="ctr"/>
+          <a:lstStyle/>
+          <a:p>
+            <a:pPr algn="ctr"/>
+          </a:p>
+        </p:txBody>
+      </p:sp>
+      <p:sp>
+        <p:nvSpPr>
+          <p:cNvPr id="82" name="TextBox 81"/>
+          <p:cNvSpPr txBox="1"/>
+          <p:nvPr/>
+        </p:nvSpPr>
+        <p:spPr>
+          <a:xfrm>
+            <a:off x="3611880" y="4846320"/>
+            <a:ext cx="384048" cy="329184"/>
+          </a:xfrm>
+          <a:prstGeom prst="rect">
             <a:avLst/>
+          </a:prstGeom>
+          <a:noFill/>
+        </p:spPr>
+        <p:txBody>
+          <a:bodyPr wrap="square" lIns="0" rIns="0" tIns="0" bIns="0" anchor="ctr">
+            <a:spAutoFit/>
+          </a:bodyPr>
+          <a:lstStyle/>
+          <a:p>
+            <a:pPr algn="ctr"/>
+            <a:r>
+              <a:rPr sz="1200" b="1">
+                <a:solidFill>
+                  <a:srgbClr val="FFFFFF"/>
+                </a:solidFill>
+                <a:latin typeface="Arial"/>
+              </a:rPr>
+              <a:t>3</a:t>
+            </a:r>
+          </a:p>
+        </p:txBody>
+      </p:sp>
+      <p:sp>
+        <p:nvSpPr>
+          <p:cNvPr id="83" name="TextBox 82"/>
+          <p:cNvSpPr txBox="1"/>
+          <p:nvPr/>
+        </p:nvSpPr>
+        <p:spPr>
+          <a:xfrm>
+            <a:off x="4114800" y="4846320"/>
+            <a:ext cx="3017520" cy="329184"/>
+          </a:xfrm>
+          <a:prstGeom prst="rect">
+            <a:avLst/>
+          </a:prstGeom>
+          <a:noFill/>
+        </p:spPr>
+        <p:txBody>
+          <a:bodyPr wrap="square" lIns="0" rIns="0" tIns="0" bIns="0" anchor="ctr">
+            <a:spAutoFit/>
+          </a:bodyPr>
+          <a:lstStyle/>
+          <a:p>
+            <a:pPr algn="l"/>
+            <a:r>
+              <a:rPr sz="1100" b="1">
+                <a:solidFill>
+                  <a:srgbClr val="1F2A37"/>
+                </a:solidFill>
+                <a:latin typeface="Arial"/>
+              </a:rPr>
+              <a:t>Plan de Continuidad (BCP/DRP)</a:t>
+            </a:r>
+          </a:p>
+          <a:p>
+            <a:pPr algn="l"/>
+            <a:r>
+              <a:rPr sz="900" b="0">
+                <a:solidFill>
+                  <a:srgbClr val="5B6B7B"/>
+                </a:solidFill>
+                <a:latin typeface="Arial"/>
+              </a:rPr>
+              <a:t>NRP-24</a:t>
+            </a:r>
+          </a:p>
+        </p:txBody>
+      </p:sp>
+      <p:sp>
+        <p:nvSpPr>
+          <p:cNvPr id="84" name="Rounded Rectangle 83"/>
+          <p:cNvSpPr/>
+          <p:nvPr/>
+        </p:nvSpPr>
+        <p:spPr>
+          <a:xfrm>
+            <a:off x="7223760" y="4892040"/>
+            <a:ext cx="731520" cy="237744"/>
+          </a:xfrm>
+          <a:prstGeom prst="roundRect">
+            <a:avLst>
+              <a:gd name="adj" fmla="val 50000"/>
+            </a:avLst>
+          </a:prstGeom>
+          <a:solidFill>
+            <a:srgbClr val="1565C0"/>
+          </a:solidFill>
+          <a:ln>
+            <a:noFill/>
+          </a:ln>
+          <a:effectLst/>
+        </p:spPr>
+        <p:style>
+          <a:lnRef idx="1">
+            <a:schemeClr val="accent1"/>
+          </a:lnRef>
+          <a:fillRef idx="3">
+            <a:schemeClr val="accent1"/>
+          </a:fillRef>
+          <a:effectRef idx="2">
+            <a:schemeClr val="accent1"/>
+          </a:effectRef>
+          <a:fontRef idx="minor">
+            <a:schemeClr val="lt1"/>
+          </a:fontRef>
+        </p:style>
+        <p:txBody>
+          <a:bodyPr rtlCol="0" anchor="ctr" lIns="0" rIns="0" tIns="0" bIns="0"/>
+          <a:lstStyle/>
+          <a:p>
+            <a:pPr algn="ctr"/>
+            <a:r>
+              <a:rPr sz="900" b="1">
+                <a:solidFill>
+                  <a:srgbClr val="FFFFFF"/>
+                </a:solidFill>
+                <a:latin typeface="Arial"/>
+              </a:rPr>
+              <a:t>Interna ×2</a:t>
+            </a:r>
+          </a:p>
+        </p:txBody>
+      </p:sp>
+      <p:sp>
+        <p:nvSpPr>
+          <p:cNvPr id="85" name="Rounded Rectangle 84"/>
+          <p:cNvSpPr/>
+          <p:nvPr/>
+        </p:nvSpPr>
+        <p:spPr>
+          <a:xfrm>
+            <a:off x="8028432" y="4892040"/>
+            <a:ext cx="566928" cy="237744"/>
+          </a:xfrm>
+          <a:prstGeom prst="roundRect">
+            <a:avLst>
+              <a:gd name="adj" fmla="val 50000"/>
+            </a:avLst>
+          </a:prstGeom>
+          <a:solidFill>
+            <a:srgbClr val="E8871E"/>
+          </a:solidFill>
+          <a:ln>
+            <a:noFill/>
+          </a:ln>
+          <a:effectLst/>
+        </p:spPr>
+        <p:style>
+          <a:lnRef idx="1">
+            <a:schemeClr val="accent1"/>
+          </a:lnRef>
+          <a:fillRef idx="3">
+            <a:schemeClr val="accent1"/>
+          </a:fillRef>
+          <a:effectRef idx="2">
+            <a:schemeClr val="accent1"/>
+          </a:effectRef>
+          <a:fontRef idx="minor">
+            <a:schemeClr val="lt1"/>
+          </a:fontRef>
+        </p:style>
+        <p:txBody>
+          <a:bodyPr rtlCol="0" anchor="ctr" lIns="0" rIns="0" tIns="0" bIns="0"/>
+          <a:lstStyle/>
+          <a:p>
+            <a:pPr algn="ctr"/>
+            <a:r>
+              <a:rPr sz="900" b="1">
+                <a:solidFill>
+                  <a:srgbClr val="FFFFFF"/>
+                </a:solidFill>
+                <a:latin typeface="Arial"/>
+              </a:rPr>
+              <a:t>Externa</a:t>
+            </a:r>
+          </a:p>
+        </p:txBody>
+      </p:sp>
+      <p:sp>
+        <p:nvSpPr>
+          <p:cNvPr id="86" name="Rounded Rectangle 85"/>
+          <p:cNvSpPr/>
+          <p:nvPr/>
+        </p:nvSpPr>
+        <p:spPr>
+          <a:xfrm>
+            <a:off x="3611880" y="5248656"/>
+            <a:ext cx="384048" cy="329184"/>
+          </a:xfrm>
+          <a:prstGeom prst="roundRect">
+            <a:avLst>
+              <a:gd name="adj" fmla="val 20000"/>
+            </a:avLst>
+          </a:prstGeom>
+          <a:solidFill>
+            <a:srgbClr val="003D6F"/>
+          </a:solidFill>
+          <a:ln>
+            <a:noFill/>
+          </a:ln>
+          <a:effectLst/>
+        </p:spPr>
+        <p:style>
+          <a:lnRef idx="1">
+            <a:schemeClr val="accent1"/>
+          </a:lnRef>
+          <a:fillRef idx="3">
+            <a:schemeClr val="accent1"/>
+          </a:fillRef>
+          <a:effectRef idx="2">
+            <a:schemeClr val="accent1"/>
+          </a:effectRef>
+          <a:fontRef idx="minor">
+            <a:schemeClr val="lt1"/>
+          </a:fontRef>
+        </p:style>
+        <p:txBody>
+          <a:bodyPr rtlCol="0" anchor="ctr"/>
+          <a:lstStyle/>
+          <a:p>
+            <a:pPr algn="ctr"/>
+          </a:p>
+        </p:txBody>
+      </p:sp>
+      <p:sp>
+        <p:nvSpPr>
+          <p:cNvPr id="87" name="TextBox 86"/>
+          <p:cNvSpPr txBox="1"/>
+          <p:nvPr/>
+        </p:nvSpPr>
+        <p:spPr>
+          <a:xfrm>
+            <a:off x="3611880" y="5248656"/>
+            <a:ext cx="384048" cy="329184"/>
+          </a:xfrm>
+          <a:prstGeom prst="rect">
+            <a:avLst/>
+          </a:prstGeom>
+          <a:noFill/>
+        </p:spPr>
+        <p:txBody>
+          <a:bodyPr wrap="square" lIns="0" rIns="0" tIns="0" bIns="0" anchor="ctr">
+            <a:spAutoFit/>
+          </a:bodyPr>
+          <a:lstStyle/>
+          <a:p>
+            <a:pPr algn="ctr"/>
+            <a:r>
+              <a:rPr sz="1200" b="1">
+                <a:solidFill>
+                  <a:srgbClr val="FFFFFF"/>
+                </a:solidFill>
+                <a:latin typeface="Arial"/>
+              </a:rPr>
+              <a:t>2</a:t>
+            </a:r>
+          </a:p>
+        </p:txBody>
+      </p:sp>
+      <p:sp>
+        <p:nvSpPr>
+          <p:cNvPr id="88" name="TextBox 87"/>
+          <p:cNvSpPr txBox="1"/>
+          <p:nvPr/>
+        </p:nvSpPr>
+        <p:spPr>
+          <a:xfrm>
+            <a:off x="4114800" y="5248656"/>
+            <a:ext cx="3017520" cy="329184"/>
+          </a:xfrm>
+          <a:prstGeom prst="rect">
+            <a:avLst/>
+          </a:prstGeom>
+          <a:noFill/>
+        </p:spPr>
+        <p:txBody>
+          <a:bodyPr wrap="square" lIns="0" rIns="0" tIns="0" bIns="0" anchor="ctr">
+            <a:spAutoFit/>
+          </a:bodyPr>
+          <a:lstStyle/>
+          <a:p>
+            <a:pPr algn="l"/>
+            <a:r>
+              <a:rPr sz="1100" b="1">
+                <a:solidFill>
+                  <a:srgbClr val="1F2A37"/>
+                </a:solidFill>
+                <a:latin typeface="Arial"/>
+              </a:rPr>
+              <a:t>Pérdida Esperada</a:t>
+            </a:r>
+          </a:p>
+          <a:p>
+            <a:pPr algn="l"/>
+            <a:r>
+              <a:rPr sz="900" b="0">
+                <a:solidFill>
+                  <a:srgbClr val="5B6B7B"/>
+                </a:solidFill>
+                <a:latin typeface="Arial"/>
+              </a:rPr>
+              <a:t>NCB-022</a:t>
+            </a:r>
+          </a:p>
+        </p:txBody>
+      </p:sp>
+      <p:sp>
+        <p:nvSpPr>
+          <p:cNvPr id="89" name="Rounded Rectangle 88"/>
+          <p:cNvSpPr/>
+          <p:nvPr/>
+        </p:nvSpPr>
+        <p:spPr>
+          <a:xfrm>
+            <a:off x="7223760" y="5294376"/>
+            <a:ext cx="566928" cy="237744"/>
+          </a:xfrm>
+          <a:prstGeom prst="roundRect">
+            <a:avLst>
+              <a:gd name="adj" fmla="val 50000"/>
+            </a:avLst>
+          </a:prstGeom>
+          <a:solidFill>
+            <a:srgbClr val="1565C0"/>
+          </a:solidFill>
+          <a:ln>
+            <a:noFill/>
+          </a:ln>
+          <a:effectLst/>
+        </p:spPr>
+        <p:style>
+          <a:lnRef idx="1">
+            <a:schemeClr val="accent1"/>
+          </a:lnRef>
+          <a:fillRef idx="3">
+            <a:schemeClr val="accent1"/>
+          </a:fillRef>
+          <a:effectRef idx="2">
+            <a:schemeClr val="accent1"/>
+          </a:effectRef>
+          <a:fontRef idx="minor">
+            <a:schemeClr val="lt1"/>
+          </a:fontRef>
+        </p:style>
+        <p:txBody>
+          <a:bodyPr rtlCol="0" anchor="ctr" lIns="0" rIns="0" tIns="0" bIns="0"/>
+          <a:lstStyle/>
+          <a:p>
+            <a:pPr algn="ctr"/>
+            <a:r>
+              <a:rPr sz="900" b="1">
+                <a:solidFill>
+                  <a:srgbClr val="FFFFFF"/>
+                </a:solidFill>
+                <a:latin typeface="Arial"/>
+              </a:rPr>
+              <a:t>Interna</a:t>
+            </a:r>
+          </a:p>
+        </p:txBody>
+      </p:sp>
+      <p:sp>
+        <p:nvSpPr>
+          <p:cNvPr id="90" name="Rounded Rectangle 89"/>
+          <p:cNvSpPr/>
+          <p:nvPr/>
+        </p:nvSpPr>
+        <p:spPr>
+          <a:xfrm>
+            <a:off x="7863840" y="5294376"/>
+            <a:ext cx="566928" cy="237744"/>
+          </a:xfrm>
+          <a:prstGeom prst="roundRect">
+            <a:avLst>
+              <a:gd name="adj" fmla="val 50000"/>
+            </a:avLst>
+          </a:prstGeom>
+          <a:solidFill>
+            <a:srgbClr val="E8871E"/>
+          </a:solidFill>
+          <a:ln>
+            <a:noFill/>
+          </a:ln>
+          <a:effectLst/>
+        </p:spPr>
+        <p:style>
+          <a:lnRef idx="1">
+            <a:schemeClr val="accent1"/>
+          </a:lnRef>
+          <a:fillRef idx="3">
+            <a:schemeClr val="accent1"/>
+          </a:fillRef>
+          <a:effectRef idx="2">
+            <a:schemeClr val="accent1"/>
+          </a:effectRef>
+          <a:fontRef idx="minor">
+            <a:schemeClr val="lt1"/>
+          </a:fontRef>
+        </p:style>
+        <p:txBody>
+          <a:bodyPr rtlCol="0" anchor="ctr" lIns="0" rIns="0" tIns="0" bIns="0"/>
+          <a:lstStyle/>
+          <a:p>
+            <a:pPr algn="ctr"/>
+            <a:r>
+              <a:rPr sz="900" b="1">
+                <a:solidFill>
+                  <a:srgbClr val="FFFFFF"/>
+                </a:solidFill>
+                <a:latin typeface="Arial"/>
+              </a:rPr>
+              <a:t>Externa</a:t>
+            </a:r>
+          </a:p>
+        </p:txBody>
+      </p:sp>
+      <p:sp>
+        <p:nvSpPr>
+          <p:cNvPr id="91" name="Rounded Rectangle 90"/>
+          <p:cNvSpPr/>
+          <p:nvPr/>
+        </p:nvSpPr>
+        <p:spPr>
+          <a:xfrm>
+            <a:off x="3611880" y="5650992"/>
+            <a:ext cx="384048" cy="329184"/>
+          </a:xfrm>
+          <a:prstGeom prst="roundRect">
+            <a:avLst>
+              <a:gd name="adj" fmla="val 20000"/>
+            </a:avLst>
+          </a:prstGeom>
+          <a:solidFill>
+            <a:srgbClr val="003D6F"/>
+          </a:solidFill>
+          <a:ln>
+            <a:noFill/>
+          </a:ln>
+          <a:effectLst/>
+        </p:spPr>
+        <p:style>
+          <a:lnRef idx="1">
+            <a:schemeClr val="accent1"/>
+          </a:lnRef>
+          <a:fillRef idx="3">
+            <a:schemeClr val="accent1"/>
+          </a:fillRef>
+          <a:effectRef idx="2">
+            <a:schemeClr val="accent1"/>
+          </a:effectRef>
+          <a:fontRef idx="minor">
+            <a:schemeClr val="lt1"/>
+          </a:fontRef>
+        </p:style>
+        <p:txBody>
+          <a:bodyPr rtlCol="0" anchor="ctr"/>
+          <a:lstStyle/>
+          <a:p>
+            <a:pPr algn="ctr"/>
+          </a:p>
+        </p:txBody>
+      </p:sp>
+      <p:sp>
+        <p:nvSpPr>
+          <p:cNvPr id="92" name="TextBox 91"/>
+          <p:cNvSpPr txBox="1"/>
+          <p:nvPr/>
+        </p:nvSpPr>
+        <p:spPr>
+          <a:xfrm>
+            <a:off x="3611880" y="5650992"/>
+            <a:ext cx="384048" cy="329184"/>
+          </a:xfrm>
+          <a:prstGeom prst="rect">
+            <a:avLst/>
+          </a:prstGeom>
+          <a:noFill/>
+        </p:spPr>
+        <p:txBody>
+          <a:bodyPr wrap="square" lIns="0" rIns="0" tIns="0" bIns="0" anchor="ctr">
+            <a:spAutoFit/>
+          </a:bodyPr>
+          <a:lstStyle/>
+          <a:p>
+            <a:pPr algn="ctr"/>
+            <a:r>
+              <a:rPr sz="1200" b="1">
+                <a:solidFill>
+                  <a:srgbClr val="FFFFFF"/>
+                </a:solidFill>
+                <a:latin typeface="Arial"/>
+              </a:rPr>
+              <a:t>2</a:t>
+            </a:r>
+          </a:p>
+        </p:txBody>
+      </p:sp>
+      <p:sp>
+        <p:nvSpPr>
+          <p:cNvPr id="93" name="TextBox 92"/>
+          <p:cNvSpPr txBox="1"/>
+          <p:nvPr/>
+        </p:nvSpPr>
+        <p:spPr>
+          <a:xfrm>
+            <a:off x="4114800" y="5650992"/>
+            <a:ext cx="3017520" cy="329184"/>
+          </a:xfrm>
+          <a:prstGeom prst="rect">
+            <a:avLst/>
+          </a:prstGeom>
+          <a:noFill/>
+        </p:spPr>
+        <p:txBody>
+          <a:bodyPr wrap="square" lIns="0" rIns="0" tIns="0" bIns="0" anchor="ctr">
+            <a:spAutoFit/>
+          </a:bodyPr>
+          <a:lstStyle/>
+          <a:p>
+            <a:pPr algn="l"/>
+            <a:r>
+              <a:rPr sz="1100" b="1">
+                <a:solidFill>
+                  <a:srgbClr val="1F2A37"/>
+                </a:solidFill>
+                <a:latin typeface="Arial"/>
+              </a:rPr>
+              <a:t>Remisiones a SSF / central de riesgos</a:t>
+            </a:r>
+          </a:p>
+          <a:p>
+            <a:pPr algn="l"/>
+            <a:r>
+              <a:rPr sz="900" b="0">
+                <a:solidFill>
+                  <a:srgbClr val="5B6B7B"/>
+                </a:solidFill>
+                <a:latin typeface="Arial"/>
+              </a:rPr>
+              <a:t>NCB-022</a:t>
+            </a:r>
+          </a:p>
+        </p:txBody>
+      </p:sp>
+      <p:sp>
+        <p:nvSpPr>
+          <p:cNvPr id="94" name="Rounded Rectangle 93"/>
+          <p:cNvSpPr/>
+          <p:nvPr/>
+        </p:nvSpPr>
+        <p:spPr>
+          <a:xfrm>
+            <a:off x="7223760" y="5696712"/>
+            <a:ext cx="566928" cy="237744"/>
+          </a:xfrm>
+          <a:prstGeom prst="roundRect">
+            <a:avLst>
+              <a:gd name="adj" fmla="val 50000"/>
+            </a:avLst>
+          </a:prstGeom>
+          <a:solidFill>
+            <a:srgbClr val="1565C0"/>
+          </a:solidFill>
+          <a:ln>
+            <a:noFill/>
+          </a:ln>
+          <a:effectLst/>
+        </p:spPr>
+        <p:style>
+          <a:lnRef idx="1">
+            <a:schemeClr val="accent1"/>
+          </a:lnRef>
+          <a:fillRef idx="3">
+            <a:schemeClr val="accent1"/>
+          </a:fillRef>
+          <a:effectRef idx="2">
+            <a:schemeClr val="accent1"/>
+          </a:effectRef>
+          <a:fontRef idx="minor">
+            <a:schemeClr val="lt1"/>
+          </a:fontRef>
+        </p:style>
+        <p:txBody>
+          <a:bodyPr rtlCol="0" anchor="ctr" lIns="0" rIns="0" tIns="0" bIns="0"/>
+          <a:lstStyle/>
+          <a:p>
+            <a:pPr algn="ctr"/>
+            <a:r>
+              <a:rPr sz="900" b="1">
+                <a:solidFill>
+                  <a:srgbClr val="FFFFFF"/>
+                </a:solidFill>
+                <a:latin typeface="Arial"/>
+              </a:rPr>
+              <a:t>Interna</a:t>
+            </a:r>
+          </a:p>
+        </p:txBody>
+      </p:sp>
+      <p:sp>
+        <p:nvSpPr>
+          <p:cNvPr id="95" name="Rounded Rectangle 94"/>
+          <p:cNvSpPr/>
+          <p:nvPr/>
+        </p:nvSpPr>
+        <p:spPr>
+          <a:xfrm>
+            <a:off x="7863840" y="5696712"/>
+            <a:ext cx="566928" cy="237744"/>
+          </a:xfrm>
+          <a:prstGeom prst="roundRect">
+            <a:avLst>
+              <a:gd name="adj" fmla="val 50000"/>
+            </a:avLst>
+          </a:prstGeom>
+          <a:solidFill>
+            <a:srgbClr val="E8871E"/>
+          </a:solidFill>
+          <a:ln>
+            <a:noFill/>
+          </a:ln>
+          <a:effectLst/>
+        </p:spPr>
+        <p:style>
+          <a:lnRef idx="1">
+            <a:schemeClr val="accent1"/>
+          </a:lnRef>
+          <a:fillRef idx="3">
+            <a:schemeClr val="accent1"/>
+          </a:fillRef>
+          <a:effectRef idx="2">
+            <a:schemeClr val="accent1"/>
+          </a:effectRef>
+          <a:fontRef idx="minor">
+            <a:schemeClr val="lt1"/>
+          </a:fontRef>
+        </p:style>
+        <p:txBody>
+          <a:bodyPr rtlCol="0" anchor="ctr" lIns="0" rIns="0" tIns="0" bIns="0"/>
+          <a:lstStyle/>
+          <a:p>
+            <a:pPr algn="ctr"/>
+            <a:r>
+              <a:rPr sz="900" b="1">
+                <a:solidFill>
+                  <a:srgbClr val="FFFFFF"/>
+                </a:solidFill>
+                <a:latin typeface="Arial"/>
+              </a:rPr>
+              <a:t>Externa</a:t>
+            </a:r>
+          </a:p>
+        </p:txBody>
+      </p:sp>
+      <p:sp>
+        <p:nvSpPr>
+          <p:cNvPr id="96" name="Rounded Rectangle 95"/>
+          <p:cNvSpPr/>
+          <p:nvPr/>
+        </p:nvSpPr>
+        <p:spPr>
+          <a:xfrm>
+            <a:off x="3611880" y="6053328"/>
+            <a:ext cx="384048" cy="329184"/>
+          </a:xfrm>
+          <a:prstGeom prst="roundRect">
+            <a:avLst>
+              <a:gd name="adj" fmla="val 20000"/>
+            </a:avLst>
+          </a:prstGeom>
+          <a:solidFill>
+            <a:srgbClr val="003D6F"/>
+          </a:solidFill>
+          <a:ln>
+            <a:noFill/>
+          </a:ln>
+          <a:effectLst/>
+        </p:spPr>
+        <p:style>
+          <a:lnRef idx="1">
+            <a:schemeClr val="accent1"/>
+          </a:lnRef>
+          <a:fillRef idx="3">
+            <a:schemeClr val="accent1"/>
+          </a:fillRef>
+          <a:effectRef idx="2">
+            <a:schemeClr val="accent1"/>
+          </a:effectRef>
+          <a:fontRef idx="minor">
+            <a:schemeClr val="lt1"/>
+          </a:fontRef>
+        </p:style>
+        <p:txBody>
+          <a:bodyPr rtlCol="0" anchor="ctr"/>
+          <a:lstStyle/>
+          <a:p>
+            <a:pPr algn="ctr"/>
+          </a:p>
+        </p:txBody>
+      </p:sp>
+      <p:sp>
+        <p:nvSpPr>
+          <p:cNvPr id="97" name="TextBox 96"/>
+          <p:cNvSpPr txBox="1"/>
+          <p:nvPr/>
+        </p:nvSpPr>
+        <p:spPr>
+          <a:xfrm>
+            <a:off x="3611880" y="6053328"/>
+            <a:ext cx="384048" cy="329184"/>
+          </a:xfrm>
+          <a:prstGeom prst="rect">
+            <a:avLst/>
+          </a:prstGeom>
+          <a:noFill/>
+        </p:spPr>
+        <p:txBody>
+          <a:bodyPr wrap="square" lIns="0" rIns="0" tIns="0" bIns="0" anchor="ctr">
+            <a:spAutoFit/>
+          </a:bodyPr>
+          <a:lstStyle/>
+          <a:p>
+            <a:pPr algn="ctr"/>
+            <a:r>
+              <a:rPr sz="1200" b="1">
+                <a:solidFill>
+                  <a:srgbClr val="FFFFFF"/>
+                </a:solidFill>
+                <a:latin typeface="Arial"/>
+              </a:rPr>
+              <a:t>2</a:t>
+            </a:r>
+          </a:p>
+        </p:txBody>
+      </p:sp>
+      <p:sp>
+        <p:nvSpPr>
+          <p:cNvPr id="98" name="TextBox 97"/>
+          <p:cNvSpPr txBox="1"/>
+          <p:nvPr/>
+        </p:nvSpPr>
+        <p:spPr>
+          <a:xfrm>
+            <a:off x="4114800" y="6053328"/>
+            <a:ext cx="3017520" cy="329184"/>
+          </a:xfrm>
+          <a:prstGeom prst="rect">
+            <a:avLst/>
+          </a:prstGeom>
+          <a:noFill/>
+        </p:spPr>
+        <p:txBody>
+          <a:bodyPr wrap="square" lIns="0" rIns="0" tIns="0" bIns="0" anchor="ctr">
+            <a:spAutoFit/>
+          </a:bodyPr>
+          <a:lstStyle/>
+          <a:p>
+            <a:pPr algn="l"/>
+            <a:r>
+              <a:rPr sz="1100" b="1">
+                <a:solidFill>
+                  <a:srgbClr val="1F2A37"/>
+                </a:solidFill>
+                <a:latin typeface="Arial"/>
+              </a:rPr>
+              <a:t>Gobierno Corporativo</a:t>
+            </a:r>
+          </a:p>
+          <a:p>
+            <a:pPr algn="l"/>
+            <a:r>
+              <a:rPr sz="900" b="0">
+                <a:solidFill>
+                  <a:srgbClr val="5B6B7B"/>
+                </a:solidFill>
+                <a:latin typeface="Arial"/>
+              </a:rPr>
+              <a:t>NRP-17</a:t>
+            </a:r>
+          </a:p>
+        </p:txBody>
+      </p:sp>
+      <p:sp>
+        <p:nvSpPr>
+          <p:cNvPr id="99" name="Rounded Rectangle 98"/>
+          <p:cNvSpPr/>
+          <p:nvPr/>
+        </p:nvSpPr>
+        <p:spPr>
+          <a:xfrm>
+            <a:off x="7223760" y="6099048"/>
+            <a:ext cx="566928" cy="237744"/>
+          </a:xfrm>
+          <a:prstGeom prst="roundRect">
+            <a:avLst>
+              <a:gd name="adj" fmla="val 50000"/>
+            </a:avLst>
+          </a:prstGeom>
+          <a:solidFill>
+            <a:srgbClr val="1565C0"/>
+          </a:solidFill>
+          <a:ln>
+            <a:noFill/>
+          </a:ln>
+          <a:effectLst/>
+        </p:spPr>
+        <p:style>
+          <a:lnRef idx="1">
+            <a:schemeClr val="accent1"/>
+          </a:lnRef>
+          <a:fillRef idx="3">
+            <a:schemeClr val="accent1"/>
+          </a:fillRef>
+          <a:effectRef idx="2">
+            <a:schemeClr val="accent1"/>
+          </a:effectRef>
+          <a:fontRef idx="minor">
+            <a:schemeClr val="lt1"/>
+          </a:fontRef>
+        </p:style>
+        <p:txBody>
+          <a:bodyPr rtlCol="0" anchor="ctr" lIns="0" rIns="0" tIns="0" bIns="0"/>
+          <a:lstStyle/>
+          <a:p>
+            <a:pPr algn="ctr"/>
+            <a:r>
+              <a:rPr sz="900" b="1">
+                <a:solidFill>
+                  <a:srgbClr val="FFFFFF"/>
+                </a:solidFill>
+                <a:latin typeface="Arial"/>
+              </a:rPr>
+              <a:t>Interna</a:t>
+            </a:r>
+          </a:p>
+        </p:txBody>
+      </p:sp>
+      <p:sp>
+        <p:nvSpPr>
+          <p:cNvPr id="100" name="Rounded Rectangle 99"/>
+          <p:cNvSpPr/>
+          <p:nvPr/>
+        </p:nvSpPr>
+        <p:spPr>
+          <a:xfrm>
+            <a:off x="7863840" y="6099048"/>
+            <a:ext cx="566928" cy="237744"/>
+          </a:xfrm>
+          <a:prstGeom prst="roundRect">
+            <a:avLst>
+              <a:gd name="adj" fmla="val 50000"/>
+            </a:avLst>
           </a:prstGeom>
           <a:solidFill>
             <a:srgbClr val="2E9E5B"/>
@@ -5576,2084 +8206,6 @@
           </a:fontRef>
         </p:style>
         <p:txBody>
-          <a:bodyPr rtlCol="0" anchor="ctr"/>
-          <a:lstStyle/>
-          <a:p>
-            <a:pPr algn="ctr"/>
-          </a:p>
-        </p:txBody>
-      </p:sp>
-      <p:sp>
-        <p:nvSpPr>
-          <p:cNvPr id="42" name="Oval 41"/>
-          <p:cNvSpPr/>
-          <p:nvPr/>
-        </p:nvSpPr>
-        <p:spPr>
-          <a:xfrm>
-            <a:off x="8522208" y="2441448"/>
-            <a:ext cx="237744" cy="237744"/>
-          </a:xfrm>
-          <a:prstGeom prst="ellipse">
-            <a:avLst/>
-          </a:prstGeom>
-          <a:solidFill>
-            <a:srgbClr val="2E9E5B"/>
-          </a:solidFill>
-          <a:ln>
-            <a:noFill/>
-          </a:ln>
-          <a:effectLst/>
-        </p:spPr>
-        <p:style>
-          <a:lnRef idx="1">
-            <a:schemeClr val="accent1"/>
-          </a:lnRef>
-          <a:fillRef idx="3">
-            <a:schemeClr val="accent1"/>
-          </a:fillRef>
-          <a:effectRef idx="2">
-            <a:schemeClr val="accent1"/>
-          </a:effectRef>
-          <a:fontRef idx="minor">
-            <a:schemeClr val="lt1"/>
-          </a:fontRef>
-        </p:style>
-        <p:txBody>
-          <a:bodyPr rtlCol="0" anchor="ctr"/>
-          <a:lstStyle/>
-          <a:p>
-            <a:pPr algn="ctr"/>
-          </a:p>
-        </p:txBody>
-      </p:sp>
-      <p:sp>
-        <p:nvSpPr>
-          <p:cNvPr id="43" name="Rounded Rectangle 42"/>
-          <p:cNvSpPr/>
-          <p:nvPr/>
-        </p:nvSpPr>
-        <p:spPr>
-          <a:xfrm>
-            <a:off x="9012935" y="1481328"/>
-            <a:ext cx="597408" cy="1554480"/>
-          </a:xfrm>
-          <a:prstGeom prst="roundRect">
-            <a:avLst>
-              <a:gd name="adj" fmla="val 10000"/>
-            </a:avLst>
-          </a:prstGeom>
-          <a:solidFill>
-            <a:srgbClr val="EEF3F9"/>
-          </a:solidFill>
-          <a:ln>
-            <a:noFill/>
-          </a:ln>
-          <a:effectLst/>
-        </p:spPr>
-        <p:style>
-          <a:lnRef idx="1">
-            <a:schemeClr val="accent1"/>
-          </a:lnRef>
-          <a:fillRef idx="3">
-            <a:schemeClr val="accent1"/>
-          </a:fillRef>
-          <a:effectRef idx="2">
-            <a:schemeClr val="accent1"/>
-          </a:effectRef>
-          <a:fontRef idx="minor">
-            <a:schemeClr val="lt1"/>
-          </a:fontRef>
-        </p:style>
-        <p:txBody>
-          <a:bodyPr rtlCol="0" anchor="ctr"/>
-          <a:lstStyle/>
-          <a:p>
-            <a:pPr algn="ctr"/>
-          </a:p>
-        </p:txBody>
-      </p:sp>
-      <p:sp>
-        <p:nvSpPr>
-          <p:cNvPr id="44" name="TextBox 43"/>
-          <p:cNvSpPr txBox="1"/>
-          <p:nvPr/>
-        </p:nvSpPr>
-        <p:spPr>
-          <a:xfrm>
-            <a:off x="8976360" y="1572768"/>
-            <a:ext cx="670560" cy="228600"/>
-          </a:xfrm>
-          <a:prstGeom prst="rect">
-            <a:avLst/>
-          </a:prstGeom>
-          <a:noFill/>
-        </p:spPr>
-        <p:txBody>
-          <a:bodyPr wrap="square" lIns="0" rIns="0" tIns="0" bIns="0" anchor="t">
-            <a:spAutoFit/>
-          </a:bodyPr>
-          <a:lstStyle/>
-          <a:p>
-            <a:pPr algn="ctr"/>
-            <a:r>
-              <a:rPr sz="1000" b="1">
-                <a:solidFill>
-                  <a:srgbClr val="1F2A37"/>
-                </a:solidFill>
-                <a:latin typeface="Arial"/>
-              </a:rPr>
-              <a:t>Sep</a:t>
-            </a:r>
-          </a:p>
-        </p:txBody>
-      </p:sp>
-      <p:sp>
-        <p:nvSpPr>
-          <p:cNvPr id="45" name="Oval 44"/>
-          <p:cNvSpPr/>
-          <p:nvPr/>
-        </p:nvSpPr>
-        <p:spPr>
-          <a:xfrm>
-            <a:off x="9192768" y="1892808"/>
-            <a:ext cx="237744" cy="237744"/>
-          </a:xfrm>
-          <a:prstGeom prst="ellipse">
-            <a:avLst/>
-          </a:prstGeom>
-          <a:solidFill>
-            <a:srgbClr val="2E9E5B"/>
-          </a:solidFill>
-          <a:ln>
-            <a:noFill/>
-          </a:ln>
-          <a:effectLst/>
-        </p:spPr>
-        <p:style>
-          <a:lnRef idx="1">
-            <a:schemeClr val="accent1"/>
-          </a:lnRef>
-          <a:fillRef idx="3">
-            <a:schemeClr val="accent1"/>
-          </a:fillRef>
-          <a:effectRef idx="2">
-            <a:schemeClr val="accent1"/>
-          </a:effectRef>
-          <a:fontRef idx="minor">
-            <a:schemeClr val="lt1"/>
-          </a:fontRef>
-        </p:style>
-        <p:txBody>
-          <a:bodyPr rtlCol="0" anchor="ctr"/>
-          <a:lstStyle/>
-          <a:p>
-            <a:pPr algn="ctr"/>
-          </a:p>
-        </p:txBody>
-      </p:sp>
-      <p:sp>
-        <p:nvSpPr>
-          <p:cNvPr id="46" name="Rounded Rectangle 45"/>
-          <p:cNvSpPr/>
-          <p:nvPr/>
-        </p:nvSpPr>
-        <p:spPr>
-          <a:xfrm>
-            <a:off x="9683496" y="1481328"/>
-            <a:ext cx="597408" cy="1554480"/>
-          </a:xfrm>
-          <a:prstGeom prst="roundRect">
-            <a:avLst>
-              <a:gd name="adj" fmla="val 10000"/>
-            </a:avLst>
-          </a:prstGeom>
-          <a:solidFill>
-            <a:srgbClr val="EEF3F9"/>
-          </a:solidFill>
-          <a:ln>
-            <a:noFill/>
-          </a:ln>
-          <a:effectLst/>
-        </p:spPr>
-        <p:style>
-          <a:lnRef idx="1">
-            <a:schemeClr val="accent1"/>
-          </a:lnRef>
-          <a:fillRef idx="3">
-            <a:schemeClr val="accent1"/>
-          </a:fillRef>
-          <a:effectRef idx="2">
-            <a:schemeClr val="accent1"/>
-          </a:effectRef>
-          <a:fontRef idx="minor">
-            <a:schemeClr val="lt1"/>
-          </a:fontRef>
-        </p:style>
-        <p:txBody>
-          <a:bodyPr rtlCol="0" anchor="ctr"/>
-          <a:lstStyle/>
-          <a:p>
-            <a:pPr algn="ctr"/>
-          </a:p>
-        </p:txBody>
-      </p:sp>
-      <p:sp>
-        <p:nvSpPr>
-          <p:cNvPr id="47" name="Rounded Rectangle 46"/>
-          <p:cNvSpPr/>
-          <p:nvPr/>
-        </p:nvSpPr>
-        <p:spPr>
-          <a:xfrm>
-            <a:off x="9683496" y="1481328"/>
-            <a:ext cx="597408" cy="1554480"/>
-          </a:xfrm>
-          <a:prstGeom prst="roundRect">
-            <a:avLst>
-              <a:gd name="adj" fmla="val 10000"/>
-            </a:avLst>
-          </a:prstGeom>
-          <a:noFill/>
-          <a:ln w="12700">
-            <a:solidFill>
-              <a:srgbClr val="C62828"/>
-            </a:solidFill>
-          </a:ln>
-          <a:effectLst/>
-        </p:spPr>
-        <p:style>
-          <a:lnRef idx="1">
-            <a:schemeClr val="accent1"/>
-          </a:lnRef>
-          <a:fillRef idx="3">
-            <a:schemeClr val="accent1"/>
-          </a:fillRef>
-          <a:effectRef idx="2">
-            <a:schemeClr val="accent1"/>
-          </a:effectRef>
-          <a:fontRef idx="minor">
-            <a:schemeClr val="lt1"/>
-          </a:fontRef>
-        </p:style>
-        <p:txBody>
-          <a:bodyPr rtlCol="0" anchor="ctr"/>
-          <a:lstStyle/>
-          <a:p>
-            <a:pPr algn="ctr"/>
-          </a:p>
-        </p:txBody>
-      </p:sp>
-      <p:sp>
-        <p:nvSpPr>
-          <p:cNvPr id="48" name="TextBox 47"/>
-          <p:cNvSpPr txBox="1"/>
-          <p:nvPr/>
-        </p:nvSpPr>
-        <p:spPr>
-          <a:xfrm>
-            <a:off x="9646920" y="1572768"/>
-            <a:ext cx="670560" cy="228600"/>
-          </a:xfrm>
-          <a:prstGeom prst="rect">
-            <a:avLst/>
-          </a:prstGeom>
-          <a:noFill/>
-        </p:spPr>
-        <p:txBody>
-          <a:bodyPr wrap="square" lIns="0" rIns="0" tIns="0" bIns="0" anchor="t">
-            <a:spAutoFit/>
-          </a:bodyPr>
-          <a:lstStyle/>
-          <a:p>
-            <a:pPr algn="ctr"/>
-            <a:r>
-              <a:rPr sz="1000" b="1">
-                <a:solidFill>
-                  <a:srgbClr val="C62828"/>
-                </a:solidFill>
-                <a:latin typeface="Arial"/>
-              </a:rPr>
-              <a:t>Oct</a:t>
-            </a:r>
-          </a:p>
-        </p:txBody>
-      </p:sp>
-      <p:sp>
-        <p:nvSpPr>
-          <p:cNvPr id="49" name="Oval 48"/>
-          <p:cNvSpPr/>
-          <p:nvPr/>
-        </p:nvSpPr>
-        <p:spPr>
-          <a:xfrm>
-            <a:off x="9863328" y="1892808"/>
-            <a:ext cx="237744" cy="237744"/>
-          </a:xfrm>
-          <a:prstGeom prst="ellipse">
-            <a:avLst/>
-          </a:prstGeom>
-          <a:solidFill>
-            <a:srgbClr val="1565C0"/>
-          </a:solidFill>
-          <a:ln>
-            <a:noFill/>
-          </a:ln>
-          <a:effectLst/>
-        </p:spPr>
-        <p:style>
-          <a:lnRef idx="1">
-            <a:schemeClr val="accent1"/>
-          </a:lnRef>
-          <a:fillRef idx="3">
-            <a:schemeClr val="accent1"/>
-          </a:fillRef>
-          <a:effectRef idx="2">
-            <a:schemeClr val="accent1"/>
-          </a:effectRef>
-          <a:fontRef idx="minor">
-            <a:schemeClr val="lt1"/>
-          </a:fontRef>
-        </p:style>
-        <p:txBody>
-          <a:bodyPr rtlCol="0" anchor="ctr"/>
-          <a:lstStyle/>
-          <a:p>
-            <a:pPr algn="ctr"/>
-          </a:p>
-        </p:txBody>
-      </p:sp>
-      <p:sp>
-        <p:nvSpPr>
-          <p:cNvPr id="50" name="Oval 49"/>
-          <p:cNvSpPr/>
-          <p:nvPr/>
-        </p:nvSpPr>
-        <p:spPr>
-          <a:xfrm>
-            <a:off x="9863328" y="2167128"/>
-            <a:ext cx="237744" cy="237744"/>
-          </a:xfrm>
-          <a:prstGeom prst="ellipse">
-            <a:avLst/>
-          </a:prstGeom>
-          <a:solidFill>
-            <a:srgbClr val="E8871E"/>
-          </a:solidFill>
-          <a:ln>
-            <a:noFill/>
-          </a:ln>
-          <a:effectLst/>
-        </p:spPr>
-        <p:style>
-          <a:lnRef idx="1">
-            <a:schemeClr val="accent1"/>
-          </a:lnRef>
-          <a:fillRef idx="3">
-            <a:schemeClr val="accent1"/>
-          </a:fillRef>
-          <a:effectRef idx="2">
-            <a:schemeClr val="accent1"/>
-          </a:effectRef>
-          <a:fontRef idx="minor">
-            <a:schemeClr val="lt1"/>
-          </a:fontRef>
-        </p:style>
-        <p:txBody>
-          <a:bodyPr rtlCol="0" anchor="ctr"/>
-          <a:lstStyle/>
-          <a:p>
-            <a:pPr algn="ctr"/>
-          </a:p>
-        </p:txBody>
-      </p:sp>
-      <p:sp>
-        <p:nvSpPr>
-          <p:cNvPr id="51" name="Oval 50"/>
-          <p:cNvSpPr/>
-          <p:nvPr/>
-        </p:nvSpPr>
-        <p:spPr>
-          <a:xfrm>
-            <a:off x="9863328" y="2441448"/>
-            <a:ext cx="237744" cy="237744"/>
-          </a:xfrm>
-          <a:prstGeom prst="ellipse">
-            <a:avLst/>
-          </a:prstGeom>
-          <a:solidFill>
-            <a:srgbClr val="2E9E5B"/>
-          </a:solidFill>
-          <a:ln>
-            <a:noFill/>
-          </a:ln>
-          <a:effectLst/>
-        </p:spPr>
-        <p:style>
-          <a:lnRef idx="1">
-            <a:schemeClr val="accent1"/>
-          </a:lnRef>
-          <a:fillRef idx="3">
-            <a:schemeClr val="accent1"/>
-          </a:fillRef>
-          <a:effectRef idx="2">
-            <a:schemeClr val="accent1"/>
-          </a:effectRef>
-          <a:fontRef idx="minor">
-            <a:schemeClr val="lt1"/>
-          </a:fontRef>
-        </p:style>
-        <p:txBody>
-          <a:bodyPr rtlCol="0" anchor="ctr"/>
-          <a:lstStyle/>
-          <a:p>
-            <a:pPr algn="ctr"/>
-          </a:p>
-        </p:txBody>
-      </p:sp>
-      <p:sp>
-        <p:nvSpPr>
-          <p:cNvPr id="52" name="Rounded Rectangle 51"/>
-          <p:cNvSpPr/>
-          <p:nvPr/>
-        </p:nvSpPr>
-        <p:spPr>
-          <a:xfrm>
-            <a:off x="10354056" y="1481328"/>
-            <a:ext cx="597408" cy="1554480"/>
-          </a:xfrm>
-          <a:prstGeom prst="roundRect">
-            <a:avLst>
-              <a:gd name="adj" fmla="val 10000"/>
-            </a:avLst>
-          </a:prstGeom>
-          <a:solidFill>
-            <a:srgbClr val="F7F9FC"/>
-          </a:solidFill>
-          <a:ln>
-            <a:noFill/>
-          </a:ln>
-          <a:effectLst/>
-        </p:spPr>
-        <p:style>
-          <a:lnRef idx="1">
-            <a:schemeClr val="accent1"/>
-          </a:lnRef>
-          <a:fillRef idx="3">
-            <a:schemeClr val="accent1"/>
-          </a:fillRef>
-          <a:effectRef idx="2">
-            <a:schemeClr val="accent1"/>
-          </a:effectRef>
-          <a:fontRef idx="minor">
-            <a:schemeClr val="lt1"/>
-          </a:fontRef>
-        </p:style>
-        <p:txBody>
-          <a:bodyPr rtlCol="0" anchor="ctr"/>
-          <a:lstStyle/>
-          <a:p>
-            <a:pPr algn="ctr"/>
-          </a:p>
-        </p:txBody>
-      </p:sp>
-      <p:sp>
-        <p:nvSpPr>
-          <p:cNvPr id="53" name="TextBox 52"/>
-          <p:cNvSpPr txBox="1"/>
-          <p:nvPr/>
-        </p:nvSpPr>
-        <p:spPr>
-          <a:xfrm>
-            <a:off x="10317480" y="1572768"/>
-            <a:ext cx="670560" cy="228600"/>
-          </a:xfrm>
-          <a:prstGeom prst="rect">
-            <a:avLst/>
-          </a:prstGeom>
-          <a:noFill/>
-        </p:spPr>
-        <p:txBody>
-          <a:bodyPr wrap="square" lIns="0" rIns="0" tIns="0" bIns="0" anchor="t">
-            <a:spAutoFit/>
-          </a:bodyPr>
-          <a:lstStyle/>
-          <a:p>
-            <a:pPr algn="ctr"/>
-            <a:r>
-              <a:rPr sz="1000" b="1">
-                <a:solidFill>
-                  <a:srgbClr val="A7B2BF"/>
-                </a:solidFill>
-                <a:latin typeface="Arial"/>
-              </a:rPr>
-              <a:t>Nov</a:t>
-            </a:r>
-          </a:p>
-        </p:txBody>
-      </p:sp>
-      <p:sp>
-        <p:nvSpPr>
-          <p:cNvPr id="54" name="Rounded Rectangle 53"/>
-          <p:cNvSpPr/>
-          <p:nvPr/>
-        </p:nvSpPr>
-        <p:spPr>
-          <a:xfrm>
-            <a:off x="11024615" y="1481328"/>
-            <a:ext cx="597408" cy="1554480"/>
-          </a:xfrm>
-          <a:prstGeom prst="roundRect">
-            <a:avLst>
-              <a:gd name="adj" fmla="val 10000"/>
-            </a:avLst>
-          </a:prstGeom>
-          <a:solidFill>
-            <a:srgbClr val="F7F9FC"/>
-          </a:solidFill>
-          <a:ln>
-            <a:noFill/>
-          </a:ln>
-          <a:effectLst/>
-        </p:spPr>
-        <p:style>
-          <a:lnRef idx="1">
-            <a:schemeClr val="accent1"/>
-          </a:lnRef>
-          <a:fillRef idx="3">
-            <a:schemeClr val="accent1"/>
-          </a:fillRef>
-          <a:effectRef idx="2">
-            <a:schemeClr val="accent1"/>
-          </a:effectRef>
-          <a:fontRef idx="minor">
-            <a:schemeClr val="lt1"/>
-          </a:fontRef>
-        </p:style>
-        <p:txBody>
-          <a:bodyPr rtlCol="0" anchor="ctr"/>
-          <a:lstStyle/>
-          <a:p>
-            <a:pPr algn="ctr"/>
-          </a:p>
-        </p:txBody>
-      </p:sp>
-      <p:sp>
-        <p:nvSpPr>
-          <p:cNvPr id="55" name="TextBox 54"/>
-          <p:cNvSpPr txBox="1"/>
-          <p:nvPr/>
-        </p:nvSpPr>
-        <p:spPr>
-          <a:xfrm>
-            <a:off x="10988040" y="1572768"/>
-            <a:ext cx="670560" cy="228600"/>
-          </a:xfrm>
-          <a:prstGeom prst="rect">
-            <a:avLst/>
-          </a:prstGeom>
-          <a:noFill/>
-        </p:spPr>
-        <p:txBody>
-          <a:bodyPr wrap="square" lIns="0" rIns="0" tIns="0" bIns="0" anchor="t">
-            <a:spAutoFit/>
-          </a:bodyPr>
-          <a:lstStyle/>
-          <a:p>
-            <a:pPr algn="ctr"/>
-            <a:r>
-              <a:rPr sz="1000" b="1">
-                <a:solidFill>
-                  <a:srgbClr val="A7B2BF"/>
-                </a:solidFill>
-                <a:latin typeface="Arial"/>
-              </a:rPr>
-              <a:t>Dic</a:t>
-            </a:r>
-          </a:p>
-        </p:txBody>
-      </p:sp>
-      <p:sp>
-        <p:nvSpPr>
-          <p:cNvPr id="56" name="Oval 55"/>
-          <p:cNvSpPr/>
-          <p:nvPr/>
-        </p:nvSpPr>
-        <p:spPr>
-          <a:xfrm>
-            <a:off x="3611880" y="3172968"/>
-            <a:ext cx="164592" cy="164592"/>
-          </a:xfrm>
-          <a:prstGeom prst="ellipse">
-            <a:avLst/>
-          </a:prstGeom>
-          <a:solidFill>
-            <a:srgbClr val="1565C0"/>
-          </a:solidFill>
-          <a:ln>
-            <a:noFill/>
-          </a:ln>
-          <a:effectLst/>
-        </p:spPr>
-        <p:style>
-          <a:lnRef idx="1">
-            <a:schemeClr val="accent1"/>
-          </a:lnRef>
-          <a:fillRef idx="3">
-            <a:schemeClr val="accent1"/>
-          </a:fillRef>
-          <a:effectRef idx="2">
-            <a:schemeClr val="accent1"/>
-          </a:effectRef>
-          <a:fontRef idx="minor">
-            <a:schemeClr val="lt1"/>
-          </a:fontRef>
-        </p:style>
-        <p:txBody>
-          <a:bodyPr rtlCol="0" anchor="ctr"/>
-          <a:lstStyle/>
-          <a:p>
-            <a:pPr algn="ctr"/>
-          </a:p>
-        </p:txBody>
-      </p:sp>
-      <p:sp>
-        <p:nvSpPr>
-          <p:cNvPr id="57" name="TextBox 56"/>
-          <p:cNvSpPr txBox="1"/>
-          <p:nvPr/>
-        </p:nvSpPr>
-        <p:spPr>
-          <a:xfrm>
-            <a:off x="3840480" y="3136392"/>
-            <a:ext cx="1463040" cy="237744"/>
-          </a:xfrm>
-          <a:prstGeom prst="rect">
-            <a:avLst/>
-          </a:prstGeom>
-          <a:noFill/>
-        </p:spPr>
-        <p:txBody>
-          <a:bodyPr wrap="square" lIns="0" rIns="0" tIns="0" bIns="0" anchor="ctr">
-            <a:spAutoFit/>
-          </a:bodyPr>
-          <a:lstStyle/>
-          <a:p>
-            <a:pPr algn="l"/>
-            <a:r>
-              <a:rPr sz="1000" b="0">
-                <a:solidFill>
-                  <a:srgbClr val="5B6B7B"/>
-                </a:solidFill>
-                <a:latin typeface="Arial"/>
-              </a:rPr>
-              <a:t>Auditoría Interna</a:t>
-            </a:r>
-          </a:p>
-        </p:txBody>
-      </p:sp>
-      <p:sp>
-        <p:nvSpPr>
-          <p:cNvPr id="58" name="Oval 57"/>
-          <p:cNvSpPr/>
-          <p:nvPr/>
-        </p:nvSpPr>
-        <p:spPr>
-          <a:xfrm>
-            <a:off x="5212080" y="3172968"/>
-            <a:ext cx="164592" cy="164592"/>
-          </a:xfrm>
-          <a:prstGeom prst="ellipse">
-            <a:avLst/>
-          </a:prstGeom>
-          <a:solidFill>
-            <a:srgbClr val="E8871E"/>
-          </a:solidFill>
-          <a:ln>
-            <a:noFill/>
-          </a:ln>
-          <a:effectLst/>
-        </p:spPr>
-        <p:style>
-          <a:lnRef idx="1">
-            <a:schemeClr val="accent1"/>
-          </a:lnRef>
-          <a:fillRef idx="3">
-            <a:schemeClr val="accent1"/>
-          </a:fillRef>
-          <a:effectRef idx="2">
-            <a:schemeClr val="accent1"/>
-          </a:effectRef>
-          <a:fontRef idx="minor">
-            <a:schemeClr val="lt1"/>
-          </a:fontRef>
-        </p:style>
-        <p:txBody>
-          <a:bodyPr rtlCol="0" anchor="ctr"/>
-          <a:lstStyle/>
-          <a:p>
-            <a:pPr algn="ctr"/>
-          </a:p>
-        </p:txBody>
-      </p:sp>
-      <p:sp>
-        <p:nvSpPr>
-          <p:cNvPr id="59" name="TextBox 58"/>
-          <p:cNvSpPr txBox="1"/>
-          <p:nvPr/>
-        </p:nvSpPr>
-        <p:spPr>
-          <a:xfrm>
-            <a:off x="5440680" y="3136392"/>
-            <a:ext cx="1463040" cy="237744"/>
-          </a:xfrm>
-          <a:prstGeom prst="rect">
-            <a:avLst/>
-          </a:prstGeom>
-          <a:noFill/>
-        </p:spPr>
-        <p:txBody>
-          <a:bodyPr wrap="square" lIns="0" rIns="0" tIns="0" bIns="0" anchor="ctr">
-            <a:spAutoFit/>
-          </a:bodyPr>
-          <a:lstStyle/>
-          <a:p>
-            <a:pPr algn="l"/>
-            <a:r>
-              <a:rPr sz="1000" b="0">
-                <a:solidFill>
-                  <a:srgbClr val="5B6B7B"/>
-                </a:solidFill>
-                <a:latin typeface="Arial"/>
-              </a:rPr>
-              <a:t>Auditoría Externa</a:t>
-            </a:r>
-          </a:p>
-        </p:txBody>
-      </p:sp>
-      <p:sp>
-        <p:nvSpPr>
-          <p:cNvPr id="60" name="Oval 59"/>
-          <p:cNvSpPr/>
-          <p:nvPr/>
-        </p:nvSpPr>
-        <p:spPr>
-          <a:xfrm>
-            <a:off x="6812280" y="3172968"/>
-            <a:ext cx="164592" cy="164592"/>
-          </a:xfrm>
-          <a:prstGeom prst="ellipse">
-            <a:avLst/>
-          </a:prstGeom>
-          <a:solidFill>
-            <a:srgbClr val="2E9E5B"/>
-          </a:solidFill>
-          <a:ln>
-            <a:noFill/>
-          </a:ln>
-          <a:effectLst/>
-        </p:spPr>
-        <p:style>
-          <a:lnRef idx="1">
-            <a:schemeClr val="accent1"/>
-          </a:lnRef>
-          <a:fillRef idx="3">
-            <a:schemeClr val="accent1"/>
-          </a:fillRef>
-          <a:effectRef idx="2">
-            <a:schemeClr val="accent1"/>
-          </a:effectRef>
-          <a:fontRef idx="minor">
-            <a:schemeClr val="lt1"/>
-          </a:fontRef>
-        </p:style>
-        <p:txBody>
-          <a:bodyPr rtlCol="0" anchor="ctr"/>
-          <a:lstStyle/>
-          <a:p>
-            <a:pPr algn="ctr"/>
-          </a:p>
-        </p:txBody>
-      </p:sp>
-      <p:sp>
-        <p:nvSpPr>
-          <p:cNvPr id="61" name="TextBox 60"/>
-          <p:cNvSpPr txBox="1"/>
-          <p:nvPr/>
-        </p:nvSpPr>
-        <p:spPr>
-          <a:xfrm>
-            <a:off x="7040880" y="3136392"/>
-            <a:ext cx="1463040" cy="237744"/>
-          </a:xfrm>
-          <a:prstGeom prst="rect">
-            <a:avLst/>
-          </a:prstGeom>
-          <a:noFill/>
-        </p:spPr>
-        <p:txBody>
-          <a:bodyPr wrap="square" lIns="0" rIns="0" tIns="0" bIns="0" anchor="ctr">
-            <a:spAutoFit/>
-          </a:bodyPr>
-          <a:lstStyle/>
-          <a:p>
-            <a:pPr algn="l"/>
-            <a:r>
-              <a:rPr sz="1000" b="0">
-                <a:solidFill>
-                  <a:srgbClr val="5B6B7B"/>
-                </a:solidFill>
-                <a:latin typeface="Arial"/>
-              </a:rPr>
-              <a:t>SSF</a:t>
-            </a:r>
-          </a:p>
-        </p:txBody>
-      </p:sp>
-      <p:sp>
-        <p:nvSpPr>
-          <p:cNvPr id="62" name="TextBox 61"/>
-          <p:cNvSpPr txBox="1"/>
-          <p:nvPr/>
-        </p:nvSpPr>
-        <p:spPr>
-          <a:xfrm>
-            <a:off x="8595359" y="3136392"/>
-            <a:ext cx="3108960" cy="237744"/>
-          </a:xfrm>
-          <a:prstGeom prst="rect">
-            <a:avLst/>
-          </a:prstGeom>
-          <a:noFill/>
-        </p:spPr>
-        <p:txBody>
-          <a:bodyPr wrap="square" lIns="0" rIns="0" tIns="0" bIns="0" anchor="ctr">
-            <a:spAutoFit/>
-          </a:bodyPr>
-          <a:lstStyle/>
-          <a:p>
-            <a:pPr algn="l"/>
-            <a:r>
-              <a:rPr sz="1000" b="1">
-                <a:solidFill>
-                  <a:srgbClr val="C62828"/>
-                </a:solidFill>
-                <a:latin typeface="Arial"/>
-              </a:rPr>
-              <a:t>Octubre: las 3 entidades en el mismo mes</a:t>
-            </a:r>
-          </a:p>
-        </p:txBody>
-      </p:sp>
-      <p:sp>
-        <p:nvSpPr>
-          <p:cNvPr id="63" name="TextBox 62"/>
-          <p:cNvSpPr txBox="1"/>
-          <p:nvPr/>
-        </p:nvSpPr>
-        <p:spPr>
-          <a:xfrm>
-            <a:off x="3611880" y="3611880"/>
-            <a:ext cx="4937760" cy="365760"/>
-          </a:xfrm>
-          <a:prstGeom prst="rect">
-            <a:avLst/>
-          </a:prstGeom>
-          <a:noFill/>
-        </p:spPr>
-        <p:txBody>
-          <a:bodyPr wrap="square" lIns="0" rIns="0" tIns="0" bIns="0" anchor="t">
-            <a:spAutoFit/>
-          </a:bodyPr>
-          <a:lstStyle/>
-          <a:p>
-            <a:pPr algn="l"/>
-            <a:r>
-              <a:rPr sz="1700" b="1">
-                <a:solidFill>
-                  <a:srgbClr val="003D6F"/>
-                </a:solidFill>
-                <a:latin typeface="Century Gothic"/>
-              </a:rPr>
-              <a:t>Temas que se repiten</a:t>
-            </a:r>
-          </a:p>
-        </p:txBody>
-      </p:sp>
-      <p:sp>
-        <p:nvSpPr>
-          <p:cNvPr id="64" name="Rounded Rectangle 63"/>
-          <p:cNvSpPr/>
-          <p:nvPr/>
-        </p:nvSpPr>
-        <p:spPr>
-          <a:xfrm>
-            <a:off x="3611880" y="4041648"/>
-            <a:ext cx="384048" cy="329184"/>
-          </a:xfrm>
-          <a:prstGeom prst="roundRect">
-            <a:avLst>
-              <a:gd name="adj" fmla="val 20000"/>
-            </a:avLst>
-          </a:prstGeom>
-          <a:solidFill>
-            <a:srgbClr val="C62828"/>
-          </a:solidFill>
-          <a:ln>
-            <a:noFill/>
-          </a:ln>
-          <a:effectLst/>
-        </p:spPr>
-        <p:style>
-          <a:lnRef idx="1">
-            <a:schemeClr val="accent1"/>
-          </a:lnRef>
-          <a:fillRef idx="3">
-            <a:schemeClr val="accent1"/>
-          </a:fillRef>
-          <a:effectRef idx="2">
-            <a:schemeClr val="accent1"/>
-          </a:effectRef>
-          <a:fontRef idx="minor">
-            <a:schemeClr val="lt1"/>
-          </a:fontRef>
-        </p:style>
-        <p:txBody>
-          <a:bodyPr rtlCol="0" anchor="ctr"/>
-          <a:lstStyle/>
-          <a:p>
-            <a:pPr algn="ctr"/>
-          </a:p>
-        </p:txBody>
-      </p:sp>
-      <p:sp>
-        <p:nvSpPr>
-          <p:cNvPr id="65" name="TextBox 64"/>
-          <p:cNvSpPr txBox="1"/>
-          <p:nvPr/>
-        </p:nvSpPr>
-        <p:spPr>
-          <a:xfrm>
-            <a:off x="3611880" y="4041648"/>
-            <a:ext cx="384048" cy="329184"/>
-          </a:xfrm>
-          <a:prstGeom prst="rect">
-            <a:avLst/>
-          </a:prstGeom>
-          <a:noFill/>
-        </p:spPr>
-        <p:txBody>
-          <a:bodyPr wrap="square" lIns="0" rIns="0" tIns="0" bIns="0" anchor="ctr">
-            <a:spAutoFit/>
-          </a:bodyPr>
-          <a:lstStyle/>
-          <a:p>
-            <a:pPr algn="ctr"/>
-            <a:r>
-              <a:rPr sz="1200" b="1">
-                <a:solidFill>
-                  <a:srgbClr val="FFFFFF"/>
-                </a:solidFill>
-                <a:latin typeface="Arial"/>
-              </a:rPr>
-              <a:t>4</a:t>
-            </a:r>
-          </a:p>
-        </p:txBody>
-      </p:sp>
-      <p:sp>
-        <p:nvSpPr>
-          <p:cNvPr id="66" name="TextBox 65"/>
-          <p:cNvSpPr txBox="1"/>
-          <p:nvPr/>
-        </p:nvSpPr>
-        <p:spPr>
-          <a:xfrm>
-            <a:off x="4114800" y="4041648"/>
-            <a:ext cx="3017520" cy="329184"/>
-          </a:xfrm>
-          <a:prstGeom prst="rect">
-            <a:avLst/>
-          </a:prstGeom>
-          <a:noFill/>
-        </p:spPr>
-        <p:txBody>
-          <a:bodyPr wrap="square" lIns="0" rIns="0" tIns="0" bIns="0" anchor="ctr">
-            <a:spAutoFit/>
-          </a:bodyPr>
-          <a:lstStyle/>
-          <a:p>
-            <a:pPr algn="l"/>
-            <a:r>
-              <a:rPr sz="1100" b="1">
-                <a:solidFill>
-                  <a:srgbClr val="1F2A37"/>
-                </a:solidFill>
-                <a:latin typeface="Arial"/>
-              </a:rPr>
-              <a:t>Actas Comité de Riesgos</a:t>
-            </a:r>
-          </a:p>
-          <a:p>
-            <a:pPr algn="l"/>
-            <a:r>
-              <a:rPr sz="900" b="0">
-                <a:solidFill>
-                  <a:srgbClr val="5B6B7B"/>
-                </a:solidFill>
-                <a:latin typeface="Arial"/>
-              </a:rPr>
-              <a:t>NRP-20</a:t>
-            </a:r>
-          </a:p>
-        </p:txBody>
-      </p:sp>
-      <p:sp>
-        <p:nvSpPr>
-          <p:cNvPr id="67" name="Rounded Rectangle 66"/>
-          <p:cNvSpPr/>
-          <p:nvPr/>
-        </p:nvSpPr>
-        <p:spPr>
-          <a:xfrm>
-            <a:off x="7223760" y="4087368"/>
-            <a:ext cx="731520" cy="237744"/>
-          </a:xfrm>
-          <a:prstGeom prst="roundRect">
-            <a:avLst>
-              <a:gd name="adj" fmla="val 50000"/>
-            </a:avLst>
-          </a:prstGeom>
-          <a:solidFill>
-            <a:srgbClr val="1565C0"/>
-          </a:solidFill>
-          <a:ln>
-            <a:noFill/>
-          </a:ln>
-          <a:effectLst/>
-        </p:spPr>
-        <p:style>
-          <a:lnRef idx="1">
-            <a:schemeClr val="accent1"/>
-          </a:lnRef>
-          <a:fillRef idx="3">
-            <a:schemeClr val="accent1"/>
-          </a:fillRef>
-          <a:effectRef idx="2">
-            <a:schemeClr val="accent1"/>
-          </a:effectRef>
-          <a:fontRef idx="minor">
-            <a:schemeClr val="lt1"/>
-          </a:fontRef>
-        </p:style>
-        <p:txBody>
-          <a:bodyPr rtlCol="0" anchor="ctr" lIns="0" rIns="0" tIns="0" bIns="0"/>
-          <a:lstStyle/>
-          <a:p>
-            <a:pPr algn="ctr"/>
-            <a:r>
-              <a:rPr sz="900" b="1">
-                <a:solidFill>
-                  <a:srgbClr val="FFFFFF"/>
-                </a:solidFill>
-                <a:latin typeface="Arial"/>
-              </a:rPr>
-              <a:t>Interna ×3</a:t>
-            </a:r>
-          </a:p>
-        </p:txBody>
-      </p:sp>
-      <p:sp>
-        <p:nvSpPr>
-          <p:cNvPr id="68" name="Rounded Rectangle 67"/>
-          <p:cNvSpPr/>
-          <p:nvPr/>
-        </p:nvSpPr>
-        <p:spPr>
-          <a:xfrm>
-            <a:off x="8028432" y="4087368"/>
-            <a:ext cx="566928" cy="237744"/>
-          </a:xfrm>
-          <a:prstGeom prst="roundRect">
-            <a:avLst>
-              <a:gd name="adj" fmla="val 50000"/>
-            </a:avLst>
-          </a:prstGeom>
-          <a:solidFill>
-            <a:srgbClr val="E8871E"/>
-          </a:solidFill>
-          <a:ln>
-            <a:noFill/>
-          </a:ln>
-          <a:effectLst/>
-        </p:spPr>
-        <p:style>
-          <a:lnRef idx="1">
-            <a:schemeClr val="accent1"/>
-          </a:lnRef>
-          <a:fillRef idx="3">
-            <a:schemeClr val="accent1"/>
-          </a:fillRef>
-          <a:effectRef idx="2">
-            <a:schemeClr val="accent1"/>
-          </a:effectRef>
-          <a:fontRef idx="minor">
-            <a:schemeClr val="lt1"/>
-          </a:fontRef>
-        </p:style>
-        <p:txBody>
-          <a:bodyPr rtlCol="0" anchor="ctr" lIns="0" rIns="0" tIns="0" bIns="0"/>
-          <a:lstStyle/>
-          <a:p>
-            <a:pPr algn="ctr"/>
-            <a:r>
-              <a:rPr sz="900" b="1">
-                <a:solidFill>
-                  <a:srgbClr val="FFFFFF"/>
-                </a:solidFill>
-                <a:latin typeface="Arial"/>
-              </a:rPr>
-              <a:t>Externa</a:t>
-            </a:r>
-          </a:p>
-        </p:txBody>
-      </p:sp>
-      <p:sp>
-        <p:nvSpPr>
-          <p:cNvPr id="69" name="Rounded Rectangle 68"/>
-          <p:cNvSpPr/>
-          <p:nvPr/>
-        </p:nvSpPr>
-        <p:spPr>
-          <a:xfrm>
-            <a:off x="3611880" y="4443984"/>
-            <a:ext cx="384048" cy="329184"/>
-          </a:xfrm>
-          <a:prstGeom prst="roundRect">
-            <a:avLst>
-              <a:gd name="adj" fmla="val 20000"/>
-            </a:avLst>
-          </a:prstGeom>
-          <a:solidFill>
-            <a:srgbClr val="003D6F"/>
-          </a:solidFill>
-          <a:ln>
-            <a:noFill/>
-          </a:ln>
-          <a:effectLst/>
-        </p:spPr>
-        <p:style>
-          <a:lnRef idx="1">
-            <a:schemeClr val="accent1"/>
-          </a:lnRef>
-          <a:fillRef idx="3">
-            <a:schemeClr val="accent1"/>
-          </a:fillRef>
-          <a:effectRef idx="2">
-            <a:schemeClr val="accent1"/>
-          </a:effectRef>
-          <a:fontRef idx="minor">
-            <a:schemeClr val="lt1"/>
-          </a:fontRef>
-        </p:style>
-        <p:txBody>
-          <a:bodyPr rtlCol="0" anchor="ctr"/>
-          <a:lstStyle/>
-          <a:p>
-            <a:pPr algn="ctr"/>
-          </a:p>
-        </p:txBody>
-      </p:sp>
-      <p:sp>
-        <p:nvSpPr>
-          <p:cNvPr id="70" name="TextBox 69"/>
-          <p:cNvSpPr txBox="1"/>
-          <p:nvPr/>
-        </p:nvSpPr>
-        <p:spPr>
-          <a:xfrm>
-            <a:off x="3611880" y="4443984"/>
-            <a:ext cx="384048" cy="329184"/>
-          </a:xfrm>
-          <a:prstGeom prst="rect">
-            <a:avLst/>
-          </a:prstGeom>
-          <a:noFill/>
-        </p:spPr>
-        <p:txBody>
-          <a:bodyPr wrap="square" lIns="0" rIns="0" tIns="0" bIns="0" anchor="ctr">
-            <a:spAutoFit/>
-          </a:bodyPr>
-          <a:lstStyle/>
-          <a:p>
-            <a:pPr algn="ctr"/>
-            <a:r>
-              <a:rPr sz="1200" b="1">
-                <a:solidFill>
-                  <a:srgbClr val="FFFFFF"/>
-                </a:solidFill>
-                <a:latin typeface="Arial"/>
-              </a:rPr>
-              <a:t>2</a:t>
-            </a:r>
-          </a:p>
-        </p:txBody>
-      </p:sp>
-      <p:sp>
-        <p:nvSpPr>
-          <p:cNvPr id="71" name="TextBox 70"/>
-          <p:cNvSpPr txBox="1"/>
-          <p:nvPr/>
-        </p:nvSpPr>
-        <p:spPr>
-          <a:xfrm>
-            <a:off x="4114800" y="4443984"/>
-            <a:ext cx="3017520" cy="329184"/>
-          </a:xfrm>
-          <a:prstGeom prst="rect">
-            <a:avLst/>
-          </a:prstGeom>
-          <a:noFill/>
-        </p:spPr>
-        <p:txBody>
-          <a:bodyPr wrap="square" lIns="0" rIns="0" tIns="0" bIns="0" anchor="ctr">
-            <a:spAutoFit/>
-          </a:bodyPr>
-          <a:lstStyle/>
-          <a:p>
-            <a:pPr algn="l"/>
-            <a:r>
-              <a:rPr sz="1100" b="1">
-                <a:solidFill>
-                  <a:srgbClr val="1F2A37"/>
-                </a:solidFill>
-                <a:latin typeface="Arial"/>
-              </a:rPr>
-              <a:t>Pérdida Esperada</a:t>
-            </a:r>
-          </a:p>
-          <a:p>
-            <a:pPr algn="l"/>
-            <a:r>
-              <a:rPr sz="900" b="0">
-                <a:solidFill>
-                  <a:srgbClr val="5B6B7B"/>
-                </a:solidFill>
-                <a:latin typeface="Arial"/>
-              </a:rPr>
-              <a:t>NCB-022</a:t>
-            </a:r>
-          </a:p>
-        </p:txBody>
-      </p:sp>
-      <p:sp>
-        <p:nvSpPr>
-          <p:cNvPr id="72" name="Rounded Rectangle 71"/>
-          <p:cNvSpPr/>
-          <p:nvPr/>
-        </p:nvSpPr>
-        <p:spPr>
-          <a:xfrm>
-            <a:off x="7223760" y="4489704"/>
-            <a:ext cx="566928" cy="237744"/>
-          </a:xfrm>
-          <a:prstGeom prst="roundRect">
-            <a:avLst>
-              <a:gd name="adj" fmla="val 50000"/>
-            </a:avLst>
-          </a:prstGeom>
-          <a:solidFill>
-            <a:srgbClr val="1565C0"/>
-          </a:solidFill>
-          <a:ln>
-            <a:noFill/>
-          </a:ln>
-          <a:effectLst/>
-        </p:spPr>
-        <p:style>
-          <a:lnRef idx="1">
-            <a:schemeClr val="accent1"/>
-          </a:lnRef>
-          <a:fillRef idx="3">
-            <a:schemeClr val="accent1"/>
-          </a:fillRef>
-          <a:effectRef idx="2">
-            <a:schemeClr val="accent1"/>
-          </a:effectRef>
-          <a:fontRef idx="minor">
-            <a:schemeClr val="lt1"/>
-          </a:fontRef>
-        </p:style>
-        <p:txBody>
-          <a:bodyPr rtlCol="0" anchor="ctr" lIns="0" rIns="0" tIns="0" bIns="0"/>
-          <a:lstStyle/>
-          <a:p>
-            <a:pPr algn="ctr"/>
-            <a:r>
-              <a:rPr sz="900" b="1">
-                <a:solidFill>
-                  <a:srgbClr val="FFFFFF"/>
-                </a:solidFill>
-                <a:latin typeface="Arial"/>
-              </a:rPr>
-              <a:t>Interna</a:t>
-            </a:r>
-          </a:p>
-        </p:txBody>
-      </p:sp>
-      <p:sp>
-        <p:nvSpPr>
-          <p:cNvPr id="73" name="Rounded Rectangle 72"/>
-          <p:cNvSpPr/>
-          <p:nvPr/>
-        </p:nvSpPr>
-        <p:spPr>
-          <a:xfrm>
-            <a:off x="7863840" y="4489704"/>
-            <a:ext cx="566928" cy="237744"/>
-          </a:xfrm>
-          <a:prstGeom prst="roundRect">
-            <a:avLst>
-              <a:gd name="adj" fmla="val 50000"/>
-            </a:avLst>
-          </a:prstGeom>
-          <a:solidFill>
-            <a:srgbClr val="E8871E"/>
-          </a:solidFill>
-          <a:ln>
-            <a:noFill/>
-          </a:ln>
-          <a:effectLst/>
-        </p:spPr>
-        <p:style>
-          <a:lnRef idx="1">
-            <a:schemeClr val="accent1"/>
-          </a:lnRef>
-          <a:fillRef idx="3">
-            <a:schemeClr val="accent1"/>
-          </a:fillRef>
-          <a:effectRef idx="2">
-            <a:schemeClr val="accent1"/>
-          </a:effectRef>
-          <a:fontRef idx="minor">
-            <a:schemeClr val="lt1"/>
-          </a:fontRef>
-        </p:style>
-        <p:txBody>
-          <a:bodyPr rtlCol="0" anchor="ctr" lIns="0" rIns="0" tIns="0" bIns="0"/>
-          <a:lstStyle/>
-          <a:p>
-            <a:pPr algn="ctr"/>
-            <a:r>
-              <a:rPr sz="900" b="1">
-                <a:solidFill>
-                  <a:srgbClr val="FFFFFF"/>
-                </a:solidFill>
-                <a:latin typeface="Arial"/>
-              </a:rPr>
-              <a:t>Externa</a:t>
-            </a:r>
-          </a:p>
-        </p:txBody>
-      </p:sp>
-      <p:sp>
-        <p:nvSpPr>
-          <p:cNvPr id="74" name="Rounded Rectangle 73"/>
-          <p:cNvSpPr/>
-          <p:nvPr/>
-        </p:nvSpPr>
-        <p:spPr>
-          <a:xfrm>
-            <a:off x="3611880" y="4846320"/>
-            <a:ext cx="384048" cy="329184"/>
-          </a:xfrm>
-          <a:prstGeom prst="roundRect">
-            <a:avLst>
-              <a:gd name="adj" fmla="val 20000"/>
-            </a:avLst>
-          </a:prstGeom>
-          <a:solidFill>
-            <a:srgbClr val="003D6F"/>
-          </a:solidFill>
-          <a:ln>
-            <a:noFill/>
-          </a:ln>
-          <a:effectLst/>
-        </p:spPr>
-        <p:style>
-          <a:lnRef idx="1">
-            <a:schemeClr val="accent1"/>
-          </a:lnRef>
-          <a:fillRef idx="3">
-            <a:schemeClr val="accent1"/>
-          </a:fillRef>
-          <a:effectRef idx="2">
-            <a:schemeClr val="accent1"/>
-          </a:effectRef>
-          <a:fontRef idx="minor">
-            <a:schemeClr val="lt1"/>
-          </a:fontRef>
-        </p:style>
-        <p:txBody>
-          <a:bodyPr rtlCol="0" anchor="ctr"/>
-          <a:lstStyle/>
-          <a:p>
-            <a:pPr algn="ctr"/>
-          </a:p>
-        </p:txBody>
-      </p:sp>
-      <p:sp>
-        <p:nvSpPr>
-          <p:cNvPr id="75" name="TextBox 74"/>
-          <p:cNvSpPr txBox="1"/>
-          <p:nvPr/>
-        </p:nvSpPr>
-        <p:spPr>
-          <a:xfrm>
-            <a:off x="3611880" y="4846320"/>
-            <a:ext cx="384048" cy="329184"/>
-          </a:xfrm>
-          <a:prstGeom prst="rect">
-            <a:avLst/>
-          </a:prstGeom>
-          <a:noFill/>
-        </p:spPr>
-        <p:txBody>
-          <a:bodyPr wrap="square" lIns="0" rIns="0" tIns="0" bIns="0" anchor="ctr">
-            <a:spAutoFit/>
-          </a:bodyPr>
-          <a:lstStyle/>
-          <a:p>
-            <a:pPr algn="ctr"/>
-            <a:r>
-              <a:rPr sz="1200" b="1">
-                <a:solidFill>
-                  <a:srgbClr val="FFFFFF"/>
-                </a:solidFill>
-                <a:latin typeface="Arial"/>
-              </a:rPr>
-              <a:t>2</a:t>
-            </a:r>
-          </a:p>
-        </p:txBody>
-      </p:sp>
-      <p:sp>
-        <p:nvSpPr>
-          <p:cNvPr id="76" name="TextBox 75"/>
-          <p:cNvSpPr txBox="1"/>
-          <p:nvPr/>
-        </p:nvSpPr>
-        <p:spPr>
-          <a:xfrm>
-            <a:off x="4114800" y="4846320"/>
-            <a:ext cx="3017520" cy="329184"/>
-          </a:xfrm>
-          <a:prstGeom prst="rect">
-            <a:avLst/>
-          </a:prstGeom>
-          <a:noFill/>
-        </p:spPr>
-        <p:txBody>
-          <a:bodyPr wrap="square" lIns="0" rIns="0" tIns="0" bIns="0" anchor="ctr">
-            <a:spAutoFit/>
-          </a:bodyPr>
-          <a:lstStyle/>
-          <a:p>
-            <a:pPr algn="l"/>
-            <a:r>
-              <a:rPr sz="1100" b="1">
-                <a:solidFill>
-                  <a:srgbClr val="1F2A37"/>
-                </a:solidFill>
-                <a:latin typeface="Arial"/>
-              </a:rPr>
-              <a:t>Clasificación de cartera, mora y reservas</a:t>
-            </a:r>
-          </a:p>
-          <a:p>
-            <a:pPr algn="l"/>
-            <a:r>
-              <a:rPr sz="900" b="0">
-                <a:solidFill>
-                  <a:srgbClr val="5B6B7B"/>
-                </a:solidFill>
-                <a:latin typeface="Arial"/>
-              </a:rPr>
-              <a:t>NCB-022</a:t>
-            </a:r>
-          </a:p>
-        </p:txBody>
-      </p:sp>
-      <p:sp>
-        <p:nvSpPr>
-          <p:cNvPr id="77" name="Rounded Rectangle 76"/>
-          <p:cNvSpPr/>
-          <p:nvPr/>
-        </p:nvSpPr>
-        <p:spPr>
-          <a:xfrm>
-            <a:off x="7223760" y="4892040"/>
-            <a:ext cx="566928" cy="237744"/>
-          </a:xfrm>
-          <a:prstGeom prst="roundRect">
-            <a:avLst>
-              <a:gd name="adj" fmla="val 50000"/>
-            </a:avLst>
-          </a:prstGeom>
-          <a:solidFill>
-            <a:srgbClr val="1565C0"/>
-          </a:solidFill>
-          <a:ln>
-            <a:noFill/>
-          </a:ln>
-          <a:effectLst/>
-        </p:spPr>
-        <p:style>
-          <a:lnRef idx="1">
-            <a:schemeClr val="accent1"/>
-          </a:lnRef>
-          <a:fillRef idx="3">
-            <a:schemeClr val="accent1"/>
-          </a:fillRef>
-          <a:effectRef idx="2">
-            <a:schemeClr val="accent1"/>
-          </a:effectRef>
-          <a:fontRef idx="minor">
-            <a:schemeClr val="lt1"/>
-          </a:fontRef>
-        </p:style>
-        <p:txBody>
-          <a:bodyPr rtlCol="0" anchor="ctr" lIns="0" rIns="0" tIns="0" bIns="0"/>
-          <a:lstStyle/>
-          <a:p>
-            <a:pPr algn="ctr"/>
-            <a:r>
-              <a:rPr sz="900" b="1">
-                <a:solidFill>
-                  <a:srgbClr val="FFFFFF"/>
-                </a:solidFill>
-                <a:latin typeface="Arial"/>
-              </a:rPr>
-              <a:t>Interna</a:t>
-            </a:r>
-          </a:p>
-        </p:txBody>
-      </p:sp>
-      <p:sp>
-        <p:nvSpPr>
-          <p:cNvPr id="78" name="Rounded Rectangle 77"/>
-          <p:cNvSpPr/>
-          <p:nvPr/>
-        </p:nvSpPr>
-        <p:spPr>
-          <a:xfrm>
-            <a:off x="7863840" y="4892040"/>
-            <a:ext cx="566928" cy="237744"/>
-          </a:xfrm>
-          <a:prstGeom prst="roundRect">
-            <a:avLst>
-              <a:gd name="adj" fmla="val 50000"/>
-            </a:avLst>
-          </a:prstGeom>
-          <a:solidFill>
-            <a:srgbClr val="E8871E"/>
-          </a:solidFill>
-          <a:ln>
-            <a:noFill/>
-          </a:ln>
-          <a:effectLst/>
-        </p:spPr>
-        <p:style>
-          <a:lnRef idx="1">
-            <a:schemeClr val="accent1"/>
-          </a:lnRef>
-          <a:fillRef idx="3">
-            <a:schemeClr val="accent1"/>
-          </a:fillRef>
-          <a:effectRef idx="2">
-            <a:schemeClr val="accent1"/>
-          </a:effectRef>
-          <a:fontRef idx="minor">
-            <a:schemeClr val="lt1"/>
-          </a:fontRef>
-        </p:style>
-        <p:txBody>
-          <a:bodyPr rtlCol="0" anchor="ctr" lIns="0" rIns="0" tIns="0" bIns="0"/>
-          <a:lstStyle/>
-          <a:p>
-            <a:pPr algn="ctr"/>
-            <a:r>
-              <a:rPr sz="900" b="1">
-                <a:solidFill>
-                  <a:srgbClr val="FFFFFF"/>
-                </a:solidFill>
-                <a:latin typeface="Arial"/>
-              </a:rPr>
-              <a:t>Externa</a:t>
-            </a:r>
-          </a:p>
-        </p:txBody>
-      </p:sp>
-      <p:sp>
-        <p:nvSpPr>
-          <p:cNvPr id="79" name="Rounded Rectangle 78"/>
-          <p:cNvSpPr/>
-          <p:nvPr/>
-        </p:nvSpPr>
-        <p:spPr>
-          <a:xfrm>
-            <a:off x="3611880" y="5248656"/>
-            <a:ext cx="384048" cy="329184"/>
-          </a:xfrm>
-          <a:prstGeom prst="roundRect">
-            <a:avLst>
-              <a:gd name="adj" fmla="val 20000"/>
-            </a:avLst>
-          </a:prstGeom>
-          <a:solidFill>
-            <a:srgbClr val="003D6F"/>
-          </a:solidFill>
-          <a:ln>
-            <a:noFill/>
-          </a:ln>
-          <a:effectLst/>
-        </p:spPr>
-        <p:style>
-          <a:lnRef idx="1">
-            <a:schemeClr val="accent1"/>
-          </a:lnRef>
-          <a:fillRef idx="3">
-            <a:schemeClr val="accent1"/>
-          </a:fillRef>
-          <a:effectRef idx="2">
-            <a:schemeClr val="accent1"/>
-          </a:effectRef>
-          <a:fontRef idx="minor">
-            <a:schemeClr val="lt1"/>
-          </a:fontRef>
-        </p:style>
-        <p:txBody>
-          <a:bodyPr rtlCol="0" anchor="ctr"/>
-          <a:lstStyle/>
-          <a:p>
-            <a:pPr algn="ctr"/>
-          </a:p>
-        </p:txBody>
-      </p:sp>
-      <p:sp>
-        <p:nvSpPr>
-          <p:cNvPr id="80" name="TextBox 79"/>
-          <p:cNvSpPr txBox="1"/>
-          <p:nvPr/>
-        </p:nvSpPr>
-        <p:spPr>
-          <a:xfrm>
-            <a:off x="3611880" y="5248656"/>
-            <a:ext cx="384048" cy="329184"/>
-          </a:xfrm>
-          <a:prstGeom prst="rect">
-            <a:avLst/>
-          </a:prstGeom>
-          <a:noFill/>
-        </p:spPr>
-        <p:txBody>
-          <a:bodyPr wrap="square" lIns="0" rIns="0" tIns="0" bIns="0" anchor="ctr">
-            <a:spAutoFit/>
-          </a:bodyPr>
-          <a:lstStyle/>
-          <a:p>
-            <a:pPr algn="ctr"/>
-            <a:r>
-              <a:rPr sz="1200" b="1">
-                <a:solidFill>
-                  <a:srgbClr val="FFFFFF"/>
-                </a:solidFill>
-                <a:latin typeface="Arial"/>
-              </a:rPr>
-              <a:t>2</a:t>
-            </a:r>
-          </a:p>
-        </p:txBody>
-      </p:sp>
-      <p:sp>
-        <p:nvSpPr>
-          <p:cNvPr id="81" name="TextBox 80"/>
-          <p:cNvSpPr txBox="1"/>
-          <p:nvPr/>
-        </p:nvSpPr>
-        <p:spPr>
-          <a:xfrm>
-            <a:off x="4114800" y="5248656"/>
-            <a:ext cx="3017520" cy="329184"/>
-          </a:xfrm>
-          <a:prstGeom prst="rect">
-            <a:avLst/>
-          </a:prstGeom>
-          <a:noFill/>
-        </p:spPr>
-        <p:txBody>
-          <a:bodyPr wrap="square" lIns="0" rIns="0" tIns="0" bIns="0" anchor="ctr">
-            <a:spAutoFit/>
-          </a:bodyPr>
-          <a:lstStyle/>
-          <a:p>
-            <a:pPr algn="l"/>
-            <a:r>
-              <a:rPr sz="1100" b="1">
-                <a:solidFill>
-                  <a:srgbClr val="1F2A37"/>
-                </a:solidFill>
-                <a:latin typeface="Arial"/>
-              </a:rPr>
-              <a:t>Remisiones a SSF / central de riesgos</a:t>
-            </a:r>
-          </a:p>
-          <a:p>
-            <a:pPr algn="l"/>
-            <a:r>
-              <a:rPr sz="900" b="0">
-                <a:solidFill>
-                  <a:srgbClr val="5B6B7B"/>
-                </a:solidFill>
-                <a:latin typeface="Arial"/>
-              </a:rPr>
-              <a:t>NCB-022</a:t>
-            </a:r>
-          </a:p>
-        </p:txBody>
-      </p:sp>
-      <p:sp>
-        <p:nvSpPr>
-          <p:cNvPr id="82" name="Rounded Rectangle 81"/>
-          <p:cNvSpPr/>
-          <p:nvPr/>
-        </p:nvSpPr>
-        <p:spPr>
-          <a:xfrm>
-            <a:off x="7223760" y="5294376"/>
-            <a:ext cx="566928" cy="237744"/>
-          </a:xfrm>
-          <a:prstGeom prst="roundRect">
-            <a:avLst>
-              <a:gd name="adj" fmla="val 50000"/>
-            </a:avLst>
-          </a:prstGeom>
-          <a:solidFill>
-            <a:srgbClr val="1565C0"/>
-          </a:solidFill>
-          <a:ln>
-            <a:noFill/>
-          </a:ln>
-          <a:effectLst/>
-        </p:spPr>
-        <p:style>
-          <a:lnRef idx="1">
-            <a:schemeClr val="accent1"/>
-          </a:lnRef>
-          <a:fillRef idx="3">
-            <a:schemeClr val="accent1"/>
-          </a:fillRef>
-          <a:effectRef idx="2">
-            <a:schemeClr val="accent1"/>
-          </a:effectRef>
-          <a:fontRef idx="minor">
-            <a:schemeClr val="lt1"/>
-          </a:fontRef>
-        </p:style>
-        <p:txBody>
-          <a:bodyPr rtlCol="0" anchor="ctr" lIns="0" rIns="0" tIns="0" bIns="0"/>
-          <a:lstStyle/>
-          <a:p>
-            <a:pPr algn="ctr"/>
-            <a:r>
-              <a:rPr sz="900" b="1">
-                <a:solidFill>
-                  <a:srgbClr val="FFFFFF"/>
-                </a:solidFill>
-                <a:latin typeface="Arial"/>
-              </a:rPr>
-              <a:t>Interna</a:t>
-            </a:r>
-          </a:p>
-        </p:txBody>
-      </p:sp>
-      <p:sp>
-        <p:nvSpPr>
-          <p:cNvPr id="83" name="Rounded Rectangle 82"/>
-          <p:cNvSpPr/>
-          <p:nvPr/>
-        </p:nvSpPr>
-        <p:spPr>
-          <a:xfrm>
-            <a:off x="7863840" y="5294376"/>
-            <a:ext cx="566928" cy="237744"/>
-          </a:xfrm>
-          <a:prstGeom prst="roundRect">
-            <a:avLst>
-              <a:gd name="adj" fmla="val 50000"/>
-            </a:avLst>
-          </a:prstGeom>
-          <a:solidFill>
-            <a:srgbClr val="E8871E"/>
-          </a:solidFill>
-          <a:ln>
-            <a:noFill/>
-          </a:ln>
-          <a:effectLst/>
-        </p:spPr>
-        <p:style>
-          <a:lnRef idx="1">
-            <a:schemeClr val="accent1"/>
-          </a:lnRef>
-          <a:fillRef idx="3">
-            <a:schemeClr val="accent1"/>
-          </a:fillRef>
-          <a:effectRef idx="2">
-            <a:schemeClr val="accent1"/>
-          </a:effectRef>
-          <a:fontRef idx="minor">
-            <a:schemeClr val="lt1"/>
-          </a:fontRef>
-        </p:style>
-        <p:txBody>
-          <a:bodyPr rtlCol="0" anchor="ctr" lIns="0" rIns="0" tIns="0" bIns="0"/>
-          <a:lstStyle/>
-          <a:p>
-            <a:pPr algn="ctr"/>
-            <a:r>
-              <a:rPr sz="900" b="1">
-                <a:solidFill>
-                  <a:srgbClr val="FFFFFF"/>
-                </a:solidFill>
-                <a:latin typeface="Arial"/>
-              </a:rPr>
-              <a:t>Externa</a:t>
-            </a:r>
-          </a:p>
-        </p:txBody>
-      </p:sp>
-      <p:sp>
-        <p:nvSpPr>
-          <p:cNvPr id="84" name="Rounded Rectangle 83"/>
-          <p:cNvSpPr/>
-          <p:nvPr/>
-        </p:nvSpPr>
-        <p:spPr>
-          <a:xfrm>
-            <a:off x="3611880" y="5650992"/>
-            <a:ext cx="384048" cy="329184"/>
-          </a:xfrm>
-          <a:prstGeom prst="roundRect">
-            <a:avLst>
-              <a:gd name="adj" fmla="val 20000"/>
-            </a:avLst>
-          </a:prstGeom>
-          <a:solidFill>
-            <a:srgbClr val="003D6F"/>
-          </a:solidFill>
-          <a:ln>
-            <a:noFill/>
-          </a:ln>
-          <a:effectLst/>
-        </p:spPr>
-        <p:style>
-          <a:lnRef idx="1">
-            <a:schemeClr val="accent1"/>
-          </a:lnRef>
-          <a:fillRef idx="3">
-            <a:schemeClr val="accent1"/>
-          </a:fillRef>
-          <a:effectRef idx="2">
-            <a:schemeClr val="accent1"/>
-          </a:effectRef>
-          <a:fontRef idx="minor">
-            <a:schemeClr val="lt1"/>
-          </a:fontRef>
-        </p:style>
-        <p:txBody>
-          <a:bodyPr rtlCol="0" anchor="ctr"/>
-          <a:lstStyle/>
-          <a:p>
-            <a:pPr algn="ctr"/>
-          </a:p>
-        </p:txBody>
-      </p:sp>
-      <p:sp>
-        <p:nvSpPr>
-          <p:cNvPr id="85" name="TextBox 84"/>
-          <p:cNvSpPr txBox="1"/>
-          <p:nvPr/>
-        </p:nvSpPr>
-        <p:spPr>
-          <a:xfrm>
-            <a:off x="3611880" y="5650992"/>
-            <a:ext cx="384048" cy="329184"/>
-          </a:xfrm>
-          <a:prstGeom prst="rect">
-            <a:avLst/>
-          </a:prstGeom>
-          <a:noFill/>
-        </p:spPr>
-        <p:txBody>
-          <a:bodyPr wrap="square" lIns="0" rIns="0" tIns="0" bIns="0" anchor="ctr">
-            <a:spAutoFit/>
-          </a:bodyPr>
-          <a:lstStyle/>
-          <a:p>
-            <a:pPr algn="ctr"/>
-            <a:r>
-              <a:rPr sz="1200" b="1">
-                <a:solidFill>
-                  <a:srgbClr val="FFFFFF"/>
-                </a:solidFill>
-                <a:latin typeface="Arial"/>
-              </a:rPr>
-              <a:t>2</a:t>
-            </a:r>
-          </a:p>
-        </p:txBody>
-      </p:sp>
-      <p:sp>
-        <p:nvSpPr>
-          <p:cNvPr id="86" name="TextBox 85"/>
-          <p:cNvSpPr txBox="1"/>
-          <p:nvPr/>
-        </p:nvSpPr>
-        <p:spPr>
-          <a:xfrm>
-            <a:off x="4114800" y="5650992"/>
-            <a:ext cx="3017520" cy="329184"/>
-          </a:xfrm>
-          <a:prstGeom prst="rect">
-            <a:avLst/>
-          </a:prstGeom>
-          <a:noFill/>
-        </p:spPr>
-        <p:txBody>
-          <a:bodyPr wrap="square" lIns="0" rIns="0" tIns="0" bIns="0" anchor="ctr">
-            <a:spAutoFit/>
-          </a:bodyPr>
-          <a:lstStyle/>
-          <a:p>
-            <a:pPr algn="l"/>
-            <a:r>
-              <a:rPr sz="1100" b="1">
-                <a:solidFill>
-                  <a:srgbClr val="1F2A37"/>
-                </a:solidFill>
-                <a:latin typeface="Arial"/>
-              </a:rPr>
-              <a:t>Gobierno Corporativo</a:t>
-            </a:r>
-          </a:p>
-          <a:p>
-            <a:pPr algn="l"/>
-            <a:r>
-              <a:rPr sz="900" b="0">
-                <a:solidFill>
-                  <a:srgbClr val="5B6B7B"/>
-                </a:solidFill>
-                <a:latin typeface="Arial"/>
-              </a:rPr>
-              <a:t>NRP-17</a:t>
-            </a:r>
-          </a:p>
-        </p:txBody>
-      </p:sp>
-      <p:sp>
-        <p:nvSpPr>
-          <p:cNvPr id="87" name="Rounded Rectangle 86"/>
-          <p:cNvSpPr/>
-          <p:nvPr/>
-        </p:nvSpPr>
-        <p:spPr>
-          <a:xfrm>
-            <a:off x="7223760" y="5696712"/>
-            <a:ext cx="566928" cy="237744"/>
-          </a:xfrm>
-          <a:prstGeom prst="roundRect">
-            <a:avLst>
-              <a:gd name="adj" fmla="val 50000"/>
-            </a:avLst>
-          </a:prstGeom>
-          <a:solidFill>
-            <a:srgbClr val="1565C0"/>
-          </a:solidFill>
-          <a:ln>
-            <a:noFill/>
-          </a:ln>
-          <a:effectLst/>
-        </p:spPr>
-        <p:style>
-          <a:lnRef idx="1">
-            <a:schemeClr val="accent1"/>
-          </a:lnRef>
-          <a:fillRef idx="3">
-            <a:schemeClr val="accent1"/>
-          </a:fillRef>
-          <a:effectRef idx="2">
-            <a:schemeClr val="accent1"/>
-          </a:effectRef>
-          <a:fontRef idx="minor">
-            <a:schemeClr val="lt1"/>
-          </a:fontRef>
-        </p:style>
-        <p:txBody>
-          <a:bodyPr rtlCol="0" anchor="ctr" lIns="0" rIns="0" tIns="0" bIns="0"/>
-          <a:lstStyle/>
-          <a:p>
-            <a:pPr algn="ctr"/>
-            <a:r>
-              <a:rPr sz="900" b="1">
-                <a:solidFill>
-                  <a:srgbClr val="FFFFFF"/>
-                </a:solidFill>
-                <a:latin typeface="Arial"/>
-              </a:rPr>
-              <a:t>Interna</a:t>
-            </a:r>
-          </a:p>
-        </p:txBody>
-      </p:sp>
-      <p:sp>
-        <p:nvSpPr>
-          <p:cNvPr id="88" name="Rounded Rectangle 87"/>
-          <p:cNvSpPr/>
-          <p:nvPr/>
-        </p:nvSpPr>
-        <p:spPr>
-          <a:xfrm>
-            <a:off x="7863840" y="5696712"/>
-            <a:ext cx="566928" cy="237744"/>
-          </a:xfrm>
-          <a:prstGeom prst="roundRect">
-            <a:avLst>
-              <a:gd name="adj" fmla="val 50000"/>
-            </a:avLst>
-          </a:prstGeom>
-          <a:solidFill>
-            <a:srgbClr val="2E9E5B"/>
-          </a:solidFill>
-          <a:ln>
-            <a:noFill/>
-          </a:ln>
-          <a:effectLst/>
-        </p:spPr>
-        <p:style>
-          <a:lnRef idx="1">
-            <a:schemeClr val="accent1"/>
-          </a:lnRef>
-          <a:fillRef idx="3">
-            <a:schemeClr val="accent1"/>
-          </a:fillRef>
-          <a:effectRef idx="2">
-            <a:schemeClr val="accent1"/>
-          </a:effectRef>
-          <a:fontRef idx="minor">
-            <a:schemeClr val="lt1"/>
-          </a:fontRef>
-        </p:style>
-        <p:txBody>
           <a:bodyPr rtlCol="0" anchor="ctr" lIns="0" rIns="0" tIns="0" bIns="0"/>
           <a:lstStyle/>
           <a:p>
@@ -7672,245 +8224,7 @@
       </p:sp>
       <p:sp>
         <p:nvSpPr>
-          <p:cNvPr id="89" name="Rounded Rectangle 88"/>
-          <p:cNvSpPr/>
-          <p:nvPr/>
-        </p:nvSpPr>
-        <p:spPr>
-          <a:xfrm>
-            <a:off x="3611880" y="6053328"/>
-            <a:ext cx="384048" cy="329184"/>
-          </a:xfrm>
-          <a:prstGeom prst="roundRect">
-            <a:avLst>
-              <a:gd name="adj" fmla="val 20000"/>
-            </a:avLst>
-          </a:prstGeom>
-          <a:solidFill>
-            <a:srgbClr val="003D6F"/>
-          </a:solidFill>
-          <a:ln>
-            <a:noFill/>
-          </a:ln>
-          <a:effectLst/>
-        </p:spPr>
-        <p:style>
-          <a:lnRef idx="1">
-            <a:schemeClr val="accent1"/>
-          </a:lnRef>
-          <a:fillRef idx="3">
-            <a:schemeClr val="accent1"/>
-          </a:fillRef>
-          <a:effectRef idx="2">
-            <a:schemeClr val="accent1"/>
-          </a:effectRef>
-          <a:fontRef idx="minor">
-            <a:schemeClr val="lt1"/>
-          </a:fontRef>
-        </p:style>
-        <p:txBody>
-          <a:bodyPr rtlCol="0" anchor="ctr"/>
-          <a:lstStyle/>
-          <a:p>
-            <a:pPr algn="ctr"/>
-          </a:p>
-        </p:txBody>
-      </p:sp>
-      <p:sp>
-        <p:nvSpPr>
-          <p:cNvPr id="90" name="TextBox 89"/>
-          <p:cNvSpPr txBox="1"/>
-          <p:nvPr/>
-        </p:nvSpPr>
-        <p:spPr>
-          <a:xfrm>
-            <a:off x="3611880" y="6053328"/>
-            <a:ext cx="384048" cy="329184"/>
-          </a:xfrm>
-          <a:prstGeom prst="rect">
-            <a:avLst/>
-          </a:prstGeom>
-          <a:noFill/>
-        </p:spPr>
-        <p:txBody>
-          <a:bodyPr wrap="square" lIns="0" rIns="0" tIns="0" bIns="0" anchor="ctr">
-            <a:spAutoFit/>
-          </a:bodyPr>
-          <a:lstStyle/>
-          <a:p>
-            <a:pPr algn="ctr"/>
-            <a:r>
-              <a:rPr sz="1200" b="1">
-                <a:solidFill>
-                  <a:srgbClr val="FFFFFF"/>
-                </a:solidFill>
-                <a:latin typeface="Arial"/>
-              </a:rPr>
-              <a:t>2</a:t>
-            </a:r>
-          </a:p>
-        </p:txBody>
-      </p:sp>
-      <p:sp>
-        <p:nvSpPr>
-          <p:cNvPr id="91" name="TextBox 90"/>
-          <p:cNvSpPr txBox="1"/>
-          <p:nvPr/>
-        </p:nvSpPr>
-        <p:spPr>
-          <a:xfrm>
-            <a:off x="4114800" y="6053328"/>
-            <a:ext cx="3017520" cy="329184"/>
-          </a:xfrm>
-          <a:prstGeom prst="rect">
-            <a:avLst/>
-          </a:prstGeom>
-          <a:noFill/>
-        </p:spPr>
-        <p:txBody>
-          <a:bodyPr wrap="square" lIns="0" rIns="0" tIns="0" bIns="0" anchor="ctr">
-            <a:spAutoFit/>
-          </a:bodyPr>
-          <a:lstStyle/>
-          <a:p>
-            <a:pPr algn="l"/>
-            <a:r>
-              <a:rPr sz="1100" b="1">
-                <a:solidFill>
-                  <a:srgbClr val="1F2A37"/>
-                </a:solidFill>
-                <a:latin typeface="Arial"/>
-              </a:rPr>
-              <a:t>Plan de Continuidad (BCP/DRP)</a:t>
-            </a:r>
-          </a:p>
-          <a:p>
-            <a:pPr algn="l"/>
-            <a:r>
-              <a:rPr sz="900" b="0">
-                <a:solidFill>
-                  <a:srgbClr val="5B6B7B"/>
-                </a:solidFill>
-                <a:latin typeface="Arial"/>
-              </a:rPr>
-              <a:t>NRP-24</a:t>
-            </a:r>
-          </a:p>
-        </p:txBody>
-      </p:sp>
-      <p:sp>
-        <p:nvSpPr>
-          <p:cNvPr id="92" name="Rounded Rectangle 91"/>
-          <p:cNvSpPr/>
-          <p:nvPr/>
-        </p:nvSpPr>
-        <p:spPr>
-          <a:xfrm>
-            <a:off x="7223760" y="6099048"/>
-            <a:ext cx="566928" cy="237744"/>
-          </a:xfrm>
-          <a:prstGeom prst="roundRect">
-            <a:avLst>
-              <a:gd name="adj" fmla="val 50000"/>
-            </a:avLst>
-          </a:prstGeom>
-          <a:solidFill>
-            <a:srgbClr val="1565C0"/>
-          </a:solidFill>
-          <a:ln>
-            <a:noFill/>
-          </a:ln>
-          <a:effectLst/>
-        </p:spPr>
-        <p:style>
-          <a:lnRef idx="1">
-            <a:schemeClr val="accent1"/>
-          </a:lnRef>
-          <a:fillRef idx="3">
-            <a:schemeClr val="accent1"/>
-          </a:fillRef>
-          <a:effectRef idx="2">
-            <a:schemeClr val="accent1"/>
-          </a:effectRef>
-          <a:fontRef idx="minor">
-            <a:schemeClr val="lt1"/>
-          </a:fontRef>
-        </p:style>
-        <p:txBody>
-          <a:bodyPr rtlCol="0" anchor="ctr" lIns="0" rIns="0" tIns="0" bIns="0"/>
-          <a:lstStyle/>
-          <a:p>
-            <a:pPr algn="ctr"/>
-            <a:r>
-              <a:rPr sz="900" b="1">
-                <a:solidFill>
-                  <a:srgbClr val="FFFFFF"/>
-                </a:solidFill>
-                <a:latin typeface="Arial"/>
-              </a:rPr>
-              <a:t>Interna</a:t>
-            </a:r>
-          </a:p>
-        </p:txBody>
-      </p:sp>
-      <p:sp>
-        <p:nvSpPr>
-          <p:cNvPr id="93" name="Rounded Rectangle 92"/>
-          <p:cNvSpPr/>
-          <p:nvPr/>
-        </p:nvSpPr>
-        <p:spPr>
-          <a:xfrm>
-            <a:off x="7863840" y="6099048"/>
-            <a:ext cx="566928" cy="237744"/>
-          </a:xfrm>
-          <a:prstGeom prst="roundRect">
-            <a:avLst>
-              <a:gd name="adj" fmla="val 50000"/>
-            </a:avLst>
-          </a:prstGeom>
-          <a:solidFill>
-            <a:srgbClr val="E8871E"/>
-          </a:solidFill>
-          <a:ln>
-            <a:noFill/>
-          </a:ln>
-          <a:effectLst/>
-        </p:spPr>
-        <p:style>
-          <a:lnRef idx="1">
-            <a:schemeClr val="accent1"/>
-          </a:lnRef>
-          <a:fillRef idx="3">
-            <a:schemeClr val="accent1"/>
-          </a:fillRef>
-          <a:effectRef idx="2">
-            <a:schemeClr val="accent1"/>
-          </a:effectRef>
-          <a:fontRef idx="minor">
-            <a:schemeClr val="lt1"/>
-          </a:fontRef>
-        </p:style>
-        <p:txBody>
-          <a:bodyPr rtlCol="0" anchor="ctr" lIns="0" rIns="0" tIns="0" bIns="0"/>
-          <a:lstStyle/>
-          <a:p>
-            <a:pPr algn="ctr"/>
-            <a:r>
-              <a:rPr sz="900" b="1">
-                <a:solidFill>
-                  <a:srgbClr val="FFFFFF"/>
-                </a:solidFill>
-                <a:latin typeface="Arial"/>
-              </a:rPr>
-              <a:t>Externa</a:t>
-            </a:r>
-          </a:p>
-        </p:txBody>
-      </p:sp>
-      <p:sp>
-        <p:nvSpPr>
-          <p:cNvPr id="94" name="TextBox 93"/>
+          <p:cNvPr id="101" name="TextBox 100"/>
           <p:cNvSpPr txBox="1"/>
           <p:nvPr/>
         </p:nvSpPr>
@@ -7945,7 +8259,7 @@
       </p:sp>
       <p:graphicFrame>
         <p:nvGraphicFramePr>
-          <p:cNvPr id="95" name="Gráfico normas"/>
+          <p:cNvPr id="102" name="Gráfico normas"/>
           <p:cNvGraphicFramePr>
             <a:graphicFrameLocks noGrp="1"/>
           </p:cNvGraphicFramePr>
@@ -7963,7 +8277,7 @@
       </p:graphicFrame>
       <p:sp>
         <p:nvSpPr>
-          <p:cNvPr id="96" name="Fuente"/>
+          <p:cNvPr id="103" name="Fuente"/>
           <p:cNvSpPr txBox="1"/>
           <p:nvPr/>
         </p:nvSpPr>

--- a/presentacion-lunes/Resumen_Riesgos_2026_Opcion_C.pptx
+++ b/presentacion-lunes/Resumen_Riesgos_2026_Opcion_C.pptx
@@ -780,7 +780,7 @@
           <a:lstStyle/>
           <a:p>
             <a:r>
-              <a:t>Resumen de lo que nos pidieron en 2026. Vinieron 19 veces: 7 auditorías internas, 4 externas y 8 visitas de la SSF. Seis temas los pidieron 2 o más entidades: hay que tenerlos siempre listos, sobre todo las Actas del Comité de Riesgos (NRP-20), pedidas 4 veces, y Clasificación de cartera y el Plan de Continuidad, pedidos 3 veces cada uno. NRP-20 es la norma más revisada (5 veces, 3 entidades). En octubre coincidieron Interna, Externa y SSF.</a:t>
+              <a:t>Resumen de lo que nos pidieron en 2026. Vinieron 19 veces: 7 auditorías internas, 4 externas y 8 visitas de la SSF. Cuatro temas los pidieron 2 o más entidades: hay que tenerlos siempre listos, sobre todo las Actas del Comité de Riesgos (NRP-20), pedidas 4 veces; NCB-022 (cartera, Pérdida Esperada y remisiones a SSF) y el Plan de Continuidad, 3 veces cada uno. NRP-20 es la norma más revisada (5 veces, 3 entidades). En octubre coincidieron Interna, Externa y SSF.</a:t>
             </a:r>
           </a:p>
         </p:txBody>
@@ -4418,7 +4418,7 @@
                 </a:solidFill>
                 <a:latin typeface="Century Gothic"/>
               </a:rPr>
-              <a:t>6</a:t>
+              <a:t>4</a:t>
             </a:r>
           </a:p>
         </p:txBody>
@@ -6802,8 +6802,8 @@
         </p:nvSpPr>
         <p:spPr>
           <a:xfrm>
-            <a:off x="3611880" y="4041648"/>
-            <a:ext cx="384048" cy="329184"/>
+            <a:off x="3611880" y="4123944"/>
+            <a:ext cx="438912" cy="438912"/>
           </a:xfrm>
           <a:prstGeom prst="roundRect">
             <a:avLst>
@@ -6848,8 +6848,8 @@
         </p:nvSpPr>
         <p:spPr>
           <a:xfrm>
-            <a:off x="3611880" y="4041648"/>
-            <a:ext cx="384048" cy="329184"/>
+            <a:off x="3611880" y="4123944"/>
+            <a:ext cx="438912" cy="438912"/>
           </a:xfrm>
           <a:prstGeom prst="rect">
             <a:avLst/>
@@ -6864,7 +6864,7 @@
           <a:p>
             <a:pPr algn="ctr"/>
             <a:r>
-              <a:rPr sz="1200" b="1">
+              <a:rPr sz="1400" b="1">
                 <a:solidFill>
                   <a:srgbClr val="FFFFFF"/>
                 </a:solidFill>
@@ -6883,8 +6883,8 @@
         </p:nvSpPr>
         <p:spPr>
           <a:xfrm>
-            <a:off x="4114800" y="4041648"/>
-            <a:ext cx="3017520" cy="329184"/>
+            <a:off x="4178808" y="4069080"/>
+            <a:ext cx="2971800" cy="548640"/>
           </a:xfrm>
           <a:prstGeom prst="rect">
             <a:avLst/>
@@ -6899,7 +6899,7 @@
           <a:p>
             <a:pPr algn="l"/>
             <a:r>
-              <a:rPr sz="1100" b="1">
+              <a:rPr sz="1200" b="1">
                 <a:solidFill>
                   <a:srgbClr val="1F2A37"/>
                 </a:solidFill>
@@ -6930,7 +6930,7 @@
         </p:nvSpPr>
         <p:spPr>
           <a:xfrm>
-            <a:off x="7223760" y="4087368"/>
+            <a:off x="7223760" y="4224528"/>
             <a:ext cx="731520" cy="237744"/>
           </a:xfrm>
           <a:prstGeom prst="roundRect">
@@ -6985,7 +6985,7 @@
         </p:nvSpPr>
         <p:spPr>
           <a:xfrm>
-            <a:off x="8028432" y="4087368"/>
+            <a:off x="8028432" y="4224528"/>
             <a:ext cx="566928" cy="237744"/>
           </a:xfrm>
           <a:prstGeom prst="roundRect">
@@ -7040,8 +7040,8 @@
         </p:nvSpPr>
         <p:spPr>
           <a:xfrm>
-            <a:off x="3611880" y="4443984"/>
-            <a:ext cx="384048" cy="329184"/>
+            <a:off x="3611880" y="4700016"/>
+            <a:ext cx="438912" cy="438912"/>
           </a:xfrm>
           <a:prstGeom prst="roundRect">
             <a:avLst>
@@ -7086,8 +7086,8 @@
         </p:nvSpPr>
         <p:spPr>
           <a:xfrm>
-            <a:off x="3611880" y="4443984"/>
-            <a:ext cx="384048" cy="329184"/>
+            <a:off x="3611880" y="4700016"/>
+            <a:ext cx="438912" cy="438912"/>
           </a:xfrm>
           <a:prstGeom prst="rect">
             <a:avLst/>
@@ -7102,7 +7102,7 @@
           <a:p>
             <a:pPr algn="ctr"/>
             <a:r>
-              <a:rPr sz="1200" b="1">
+              <a:rPr sz="1400" b="1">
                 <a:solidFill>
                   <a:srgbClr val="FFFFFF"/>
                 </a:solidFill>
@@ -7121,8 +7121,8 @@
         </p:nvSpPr>
         <p:spPr>
           <a:xfrm>
-            <a:off x="4114800" y="4443984"/>
-            <a:ext cx="3017520" cy="329184"/>
+            <a:off x="4178808" y="4645152"/>
+            <a:ext cx="2971800" cy="548640"/>
           </a:xfrm>
           <a:prstGeom prst="rect">
             <a:avLst/>
@@ -7137,13 +7137,13 @@
           <a:p>
             <a:pPr algn="l"/>
             <a:r>
-              <a:rPr sz="1100" b="1">
+              <a:rPr sz="1200" b="1">
                 <a:solidFill>
                   <a:srgbClr val="1F2A37"/>
                 </a:solidFill>
                 <a:latin typeface="Arial"/>
               </a:rPr>
-              <a:t>Clasificación de cartera, mora y reservas</a:t>
+              <a:t>Riesgo de crédito</a:t>
             </a:r>
           </a:p>
           <a:p>
@@ -7155,7 +7155,7 @@
                 </a:solidFill>
                 <a:latin typeface="Arial"/>
               </a:rPr>
-              <a:t>NCB-022</a:t>
+              <a:t>NCB-022 · Cartera, mora y reservas · Pérdida Esperada · Remisiones a SSF</a:t>
             </a:r>
           </a:p>
         </p:txBody>
@@ -7168,7 +7168,7 @@
         </p:nvSpPr>
         <p:spPr>
           <a:xfrm>
-            <a:off x="7223760" y="4489704"/>
+            <a:off x="7223760" y="4800600"/>
             <a:ext cx="731520" cy="237744"/>
           </a:xfrm>
           <a:prstGeom prst="roundRect">
@@ -7223,7 +7223,7 @@
         </p:nvSpPr>
         <p:spPr>
           <a:xfrm>
-            <a:off x="8028432" y="4489704"/>
+            <a:off x="8028432" y="4800600"/>
             <a:ext cx="566928" cy="237744"/>
           </a:xfrm>
           <a:prstGeom prst="roundRect">
@@ -7278,8 +7278,8 @@
         </p:nvSpPr>
         <p:spPr>
           <a:xfrm>
-            <a:off x="3611880" y="4846320"/>
-            <a:ext cx="384048" cy="329184"/>
+            <a:off x="3611880" y="5276088"/>
+            <a:ext cx="438912" cy="438912"/>
           </a:xfrm>
           <a:prstGeom prst="roundRect">
             <a:avLst>
@@ -7324,8 +7324,8 @@
         </p:nvSpPr>
         <p:spPr>
           <a:xfrm>
-            <a:off x="3611880" y="4846320"/>
-            <a:ext cx="384048" cy="329184"/>
+            <a:off x="3611880" y="5276088"/>
+            <a:ext cx="438912" cy="438912"/>
           </a:xfrm>
           <a:prstGeom prst="rect">
             <a:avLst/>
@@ -7340,7 +7340,7 @@
           <a:p>
             <a:pPr algn="ctr"/>
             <a:r>
-              <a:rPr sz="1200" b="1">
+              <a:rPr sz="1400" b="1">
                 <a:solidFill>
                   <a:srgbClr val="FFFFFF"/>
                 </a:solidFill>
@@ -7359,8 +7359,8 @@
         </p:nvSpPr>
         <p:spPr>
           <a:xfrm>
-            <a:off x="4114800" y="4846320"/>
-            <a:ext cx="3017520" cy="329184"/>
+            <a:off x="4178808" y="5221224"/>
+            <a:ext cx="2971800" cy="548640"/>
           </a:xfrm>
           <a:prstGeom prst="rect">
             <a:avLst/>
@@ -7375,7 +7375,7 @@
           <a:p>
             <a:pPr algn="l"/>
             <a:r>
-              <a:rPr sz="1100" b="1">
+              <a:rPr sz="1200" b="1">
                 <a:solidFill>
                   <a:srgbClr val="1F2A37"/>
                 </a:solidFill>
@@ -7406,7 +7406,7 @@
         </p:nvSpPr>
         <p:spPr>
           <a:xfrm>
-            <a:off x="7223760" y="4892040"/>
+            <a:off x="7223760" y="5376672"/>
             <a:ext cx="731520" cy="237744"/>
           </a:xfrm>
           <a:prstGeom prst="roundRect">
@@ -7461,7 +7461,7 @@
         </p:nvSpPr>
         <p:spPr>
           <a:xfrm>
-            <a:off x="8028432" y="4892040"/>
+            <a:off x="8028432" y="5376672"/>
             <a:ext cx="566928" cy="237744"/>
           </a:xfrm>
           <a:prstGeom prst="roundRect">
@@ -7516,8 +7516,8 @@
         </p:nvSpPr>
         <p:spPr>
           <a:xfrm>
-            <a:off x="3611880" y="5248656"/>
-            <a:ext cx="384048" cy="329184"/>
+            <a:off x="3611880" y="5852159"/>
+            <a:ext cx="438912" cy="438912"/>
           </a:xfrm>
           <a:prstGeom prst="roundRect">
             <a:avLst>
@@ -7562,8 +7562,8 @@
         </p:nvSpPr>
         <p:spPr>
           <a:xfrm>
-            <a:off x="3611880" y="5248656"/>
-            <a:ext cx="384048" cy="329184"/>
+            <a:off x="3611880" y="5852159"/>
+            <a:ext cx="438912" cy="438912"/>
           </a:xfrm>
           <a:prstGeom prst="rect">
             <a:avLst/>
@@ -7578,7 +7578,7 @@
           <a:p>
             <a:pPr algn="ctr"/>
             <a:r>
-              <a:rPr sz="1200" b="1">
+              <a:rPr sz="1400" b="1">
                 <a:solidFill>
                   <a:srgbClr val="FFFFFF"/>
                 </a:solidFill>
@@ -7597,8 +7597,8 @@
         </p:nvSpPr>
         <p:spPr>
           <a:xfrm>
-            <a:off x="4114800" y="5248656"/>
-            <a:ext cx="3017520" cy="329184"/>
+            <a:off x="4178808" y="5797296"/>
+            <a:ext cx="2971800" cy="548640"/>
           </a:xfrm>
           <a:prstGeom prst="rect">
             <a:avLst/>
@@ -7613,13 +7613,13 @@
           <a:p>
             <a:pPr algn="l"/>
             <a:r>
-              <a:rPr sz="1100" b="1">
+              <a:rPr sz="1200" b="1">
                 <a:solidFill>
                   <a:srgbClr val="1F2A37"/>
                 </a:solidFill>
                 <a:latin typeface="Arial"/>
               </a:rPr>
-              <a:t>Pérdida Esperada</a:t>
+              <a:t>Gobierno Corporativo</a:t>
             </a:r>
           </a:p>
           <a:p>
@@ -7631,7 +7631,7 @@
                 </a:solidFill>
                 <a:latin typeface="Arial"/>
               </a:rPr>
-              <a:t>NCB-022</a:t>
+              <a:t>NRP-17</a:t>
             </a:r>
           </a:p>
         </p:txBody>
@@ -7644,7 +7644,7 @@
         </p:nvSpPr>
         <p:spPr>
           <a:xfrm>
-            <a:off x="7223760" y="5294376"/>
+            <a:off x="7223760" y="5952744"/>
             <a:ext cx="566928" cy="237744"/>
           </a:xfrm>
           <a:prstGeom prst="roundRect">
@@ -7699,483 +7699,7 @@
         </p:nvSpPr>
         <p:spPr>
           <a:xfrm>
-            <a:off x="7863840" y="5294376"/>
-            <a:ext cx="566928" cy="237744"/>
-          </a:xfrm>
-          <a:prstGeom prst="roundRect">
-            <a:avLst>
-              <a:gd name="adj" fmla="val 50000"/>
-            </a:avLst>
-          </a:prstGeom>
-          <a:solidFill>
-            <a:srgbClr val="E8871E"/>
-          </a:solidFill>
-          <a:ln>
-            <a:noFill/>
-          </a:ln>
-          <a:effectLst/>
-        </p:spPr>
-        <p:style>
-          <a:lnRef idx="1">
-            <a:schemeClr val="accent1"/>
-          </a:lnRef>
-          <a:fillRef idx="3">
-            <a:schemeClr val="accent1"/>
-          </a:fillRef>
-          <a:effectRef idx="2">
-            <a:schemeClr val="accent1"/>
-          </a:effectRef>
-          <a:fontRef idx="minor">
-            <a:schemeClr val="lt1"/>
-          </a:fontRef>
-        </p:style>
-        <p:txBody>
-          <a:bodyPr rtlCol="0" anchor="ctr" lIns="0" rIns="0" tIns="0" bIns="0"/>
-          <a:lstStyle/>
-          <a:p>
-            <a:pPr algn="ctr"/>
-            <a:r>
-              <a:rPr sz="900" b="1">
-                <a:solidFill>
-                  <a:srgbClr val="FFFFFF"/>
-                </a:solidFill>
-                <a:latin typeface="Arial"/>
-              </a:rPr>
-              <a:t>Externa</a:t>
-            </a:r>
-          </a:p>
-        </p:txBody>
-      </p:sp>
-      <p:sp>
-        <p:nvSpPr>
-          <p:cNvPr id="91" name="Rounded Rectangle 90"/>
-          <p:cNvSpPr/>
-          <p:nvPr/>
-        </p:nvSpPr>
-        <p:spPr>
-          <a:xfrm>
-            <a:off x="3611880" y="5650992"/>
-            <a:ext cx="384048" cy="329184"/>
-          </a:xfrm>
-          <a:prstGeom prst="roundRect">
-            <a:avLst>
-              <a:gd name="adj" fmla="val 20000"/>
-            </a:avLst>
-          </a:prstGeom>
-          <a:solidFill>
-            <a:srgbClr val="003D6F"/>
-          </a:solidFill>
-          <a:ln>
-            <a:noFill/>
-          </a:ln>
-          <a:effectLst/>
-        </p:spPr>
-        <p:style>
-          <a:lnRef idx="1">
-            <a:schemeClr val="accent1"/>
-          </a:lnRef>
-          <a:fillRef idx="3">
-            <a:schemeClr val="accent1"/>
-          </a:fillRef>
-          <a:effectRef idx="2">
-            <a:schemeClr val="accent1"/>
-          </a:effectRef>
-          <a:fontRef idx="minor">
-            <a:schemeClr val="lt1"/>
-          </a:fontRef>
-        </p:style>
-        <p:txBody>
-          <a:bodyPr rtlCol="0" anchor="ctr"/>
-          <a:lstStyle/>
-          <a:p>
-            <a:pPr algn="ctr"/>
-          </a:p>
-        </p:txBody>
-      </p:sp>
-      <p:sp>
-        <p:nvSpPr>
-          <p:cNvPr id="92" name="TextBox 91"/>
-          <p:cNvSpPr txBox="1"/>
-          <p:nvPr/>
-        </p:nvSpPr>
-        <p:spPr>
-          <a:xfrm>
-            <a:off x="3611880" y="5650992"/>
-            <a:ext cx="384048" cy="329184"/>
-          </a:xfrm>
-          <a:prstGeom prst="rect">
-            <a:avLst/>
-          </a:prstGeom>
-          <a:noFill/>
-        </p:spPr>
-        <p:txBody>
-          <a:bodyPr wrap="square" lIns="0" rIns="0" tIns="0" bIns="0" anchor="ctr">
-            <a:spAutoFit/>
-          </a:bodyPr>
-          <a:lstStyle/>
-          <a:p>
-            <a:pPr algn="ctr"/>
-            <a:r>
-              <a:rPr sz="1200" b="1">
-                <a:solidFill>
-                  <a:srgbClr val="FFFFFF"/>
-                </a:solidFill>
-                <a:latin typeface="Arial"/>
-              </a:rPr>
-              <a:t>2</a:t>
-            </a:r>
-          </a:p>
-        </p:txBody>
-      </p:sp>
-      <p:sp>
-        <p:nvSpPr>
-          <p:cNvPr id="93" name="TextBox 92"/>
-          <p:cNvSpPr txBox="1"/>
-          <p:nvPr/>
-        </p:nvSpPr>
-        <p:spPr>
-          <a:xfrm>
-            <a:off x="4114800" y="5650992"/>
-            <a:ext cx="3017520" cy="329184"/>
-          </a:xfrm>
-          <a:prstGeom prst="rect">
-            <a:avLst/>
-          </a:prstGeom>
-          <a:noFill/>
-        </p:spPr>
-        <p:txBody>
-          <a:bodyPr wrap="square" lIns="0" rIns="0" tIns="0" bIns="0" anchor="ctr">
-            <a:spAutoFit/>
-          </a:bodyPr>
-          <a:lstStyle/>
-          <a:p>
-            <a:pPr algn="l"/>
-            <a:r>
-              <a:rPr sz="1100" b="1">
-                <a:solidFill>
-                  <a:srgbClr val="1F2A37"/>
-                </a:solidFill>
-                <a:latin typeface="Arial"/>
-              </a:rPr>
-              <a:t>Remisiones a SSF / central de riesgos</a:t>
-            </a:r>
-          </a:p>
-          <a:p>
-            <a:pPr algn="l"/>
-            <a:r>
-              <a:rPr sz="900" b="0">
-                <a:solidFill>
-                  <a:srgbClr val="5B6B7B"/>
-                </a:solidFill>
-                <a:latin typeface="Arial"/>
-              </a:rPr>
-              <a:t>NCB-022</a:t>
-            </a:r>
-          </a:p>
-        </p:txBody>
-      </p:sp>
-      <p:sp>
-        <p:nvSpPr>
-          <p:cNvPr id="94" name="Rounded Rectangle 93"/>
-          <p:cNvSpPr/>
-          <p:nvPr/>
-        </p:nvSpPr>
-        <p:spPr>
-          <a:xfrm>
-            <a:off x="7223760" y="5696712"/>
-            <a:ext cx="566928" cy="237744"/>
-          </a:xfrm>
-          <a:prstGeom prst="roundRect">
-            <a:avLst>
-              <a:gd name="adj" fmla="val 50000"/>
-            </a:avLst>
-          </a:prstGeom>
-          <a:solidFill>
-            <a:srgbClr val="1565C0"/>
-          </a:solidFill>
-          <a:ln>
-            <a:noFill/>
-          </a:ln>
-          <a:effectLst/>
-        </p:spPr>
-        <p:style>
-          <a:lnRef idx="1">
-            <a:schemeClr val="accent1"/>
-          </a:lnRef>
-          <a:fillRef idx="3">
-            <a:schemeClr val="accent1"/>
-          </a:fillRef>
-          <a:effectRef idx="2">
-            <a:schemeClr val="accent1"/>
-          </a:effectRef>
-          <a:fontRef idx="minor">
-            <a:schemeClr val="lt1"/>
-          </a:fontRef>
-        </p:style>
-        <p:txBody>
-          <a:bodyPr rtlCol="0" anchor="ctr" lIns="0" rIns="0" tIns="0" bIns="0"/>
-          <a:lstStyle/>
-          <a:p>
-            <a:pPr algn="ctr"/>
-            <a:r>
-              <a:rPr sz="900" b="1">
-                <a:solidFill>
-                  <a:srgbClr val="FFFFFF"/>
-                </a:solidFill>
-                <a:latin typeface="Arial"/>
-              </a:rPr>
-              <a:t>Interna</a:t>
-            </a:r>
-          </a:p>
-        </p:txBody>
-      </p:sp>
-      <p:sp>
-        <p:nvSpPr>
-          <p:cNvPr id="95" name="Rounded Rectangle 94"/>
-          <p:cNvSpPr/>
-          <p:nvPr/>
-        </p:nvSpPr>
-        <p:spPr>
-          <a:xfrm>
-            <a:off x="7863840" y="5696712"/>
-            <a:ext cx="566928" cy="237744"/>
-          </a:xfrm>
-          <a:prstGeom prst="roundRect">
-            <a:avLst>
-              <a:gd name="adj" fmla="val 50000"/>
-            </a:avLst>
-          </a:prstGeom>
-          <a:solidFill>
-            <a:srgbClr val="E8871E"/>
-          </a:solidFill>
-          <a:ln>
-            <a:noFill/>
-          </a:ln>
-          <a:effectLst/>
-        </p:spPr>
-        <p:style>
-          <a:lnRef idx="1">
-            <a:schemeClr val="accent1"/>
-          </a:lnRef>
-          <a:fillRef idx="3">
-            <a:schemeClr val="accent1"/>
-          </a:fillRef>
-          <a:effectRef idx="2">
-            <a:schemeClr val="accent1"/>
-          </a:effectRef>
-          <a:fontRef idx="minor">
-            <a:schemeClr val="lt1"/>
-          </a:fontRef>
-        </p:style>
-        <p:txBody>
-          <a:bodyPr rtlCol="0" anchor="ctr" lIns="0" rIns="0" tIns="0" bIns="0"/>
-          <a:lstStyle/>
-          <a:p>
-            <a:pPr algn="ctr"/>
-            <a:r>
-              <a:rPr sz="900" b="1">
-                <a:solidFill>
-                  <a:srgbClr val="FFFFFF"/>
-                </a:solidFill>
-                <a:latin typeface="Arial"/>
-              </a:rPr>
-              <a:t>Externa</a:t>
-            </a:r>
-          </a:p>
-        </p:txBody>
-      </p:sp>
-      <p:sp>
-        <p:nvSpPr>
-          <p:cNvPr id="96" name="Rounded Rectangle 95"/>
-          <p:cNvSpPr/>
-          <p:nvPr/>
-        </p:nvSpPr>
-        <p:spPr>
-          <a:xfrm>
-            <a:off x="3611880" y="6053328"/>
-            <a:ext cx="384048" cy="329184"/>
-          </a:xfrm>
-          <a:prstGeom prst="roundRect">
-            <a:avLst>
-              <a:gd name="adj" fmla="val 20000"/>
-            </a:avLst>
-          </a:prstGeom>
-          <a:solidFill>
-            <a:srgbClr val="003D6F"/>
-          </a:solidFill>
-          <a:ln>
-            <a:noFill/>
-          </a:ln>
-          <a:effectLst/>
-        </p:spPr>
-        <p:style>
-          <a:lnRef idx="1">
-            <a:schemeClr val="accent1"/>
-          </a:lnRef>
-          <a:fillRef idx="3">
-            <a:schemeClr val="accent1"/>
-          </a:fillRef>
-          <a:effectRef idx="2">
-            <a:schemeClr val="accent1"/>
-          </a:effectRef>
-          <a:fontRef idx="minor">
-            <a:schemeClr val="lt1"/>
-          </a:fontRef>
-        </p:style>
-        <p:txBody>
-          <a:bodyPr rtlCol="0" anchor="ctr"/>
-          <a:lstStyle/>
-          <a:p>
-            <a:pPr algn="ctr"/>
-          </a:p>
-        </p:txBody>
-      </p:sp>
-      <p:sp>
-        <p:nvSpPr>
-          <p:cNvPr id="97" name="TextBox 96"/>
-          <p:cNvSpPr txBox="1"/>
-          <p:nvPr/>
-        </p:nvSpPr>
-        <p:spPr>
-          <a:xfrm>
-            <a:off x="3611880" y="6053328"/>
-            <a:ext cx="384048" cy="329184"/>
-          </a:xfrm>
-          <a:prstGeom prst="rect">
-            <a:avLst/>
-          </a:prstGeom>
-          <a:noFill/>
-        </p:spPr>
-        <p:txBody>
-          <a:bodyPr wrap="square" lIns="0" rIns="0" tIns="0" bIns="0" anchor="ctr">
-            <a:spAutoFit/>
-          </a:bodyPr>
-          <a:lstStyle/>
-          <a:p>
-            <a:pPr algn="ctr"/>
-            <a:r>
-              <a:rPr sz="1200" b="1">
-                <a:solidFill>
-                  <a:srgbClr val="FFFFFF"/>
-                </a:solidFill>
-                <a:latin typeface="Arial"/>
-              </a:rPr>
-              <a:t>2</a:t>
-            </a:r>
-          </a:p>
-        </p:txBody>
-      </p:sp>
-      <p:sp>
-        <p:nvSpPr>
-          <p:cNvPr id="98" name="TextBox 97"/>
-          <p:cNvSpPr txBox="1"/>
-          <p:nvPr/>
-        </p:nvSpPr>
-        <p:spPr>
-          <a:xfrm>
-            <a:off x="4114800" y="6053328"/>
-            <a:ext cx="3017520" cy="329184"/>
-          </a:xfrm>
-          <a:prstGeom prst="rect">
-            <a:avLst/>
-          </a:prstGeom>
-          <a:noFill/>
-        </p:spPr>
-        <p:txBody>
-          <a:bodyPr wrap="square" lIns="0" rIns="0" tIns="0" bIns="0" anchor="ctr">
-            <a:spAutoFit/>
-          </a:bodyPr>
-          <a:lstStyle/>
-          <a:p>
-            <a:pPr algn="l"/>
-            <a:r>
-              <a:rPr sz="1100" b="1">
-                <a:solidFill>
-                  <a:srgbClr val="1F2A37"/>
-                </a:solidFill>
-                <a:latin typeface="Arial"/>
-              </a:rPr>
-              <a:t>Gobierno Corporativo</a:t>
-            </a:r>
-          </a:p>
-          <a:p>
-            <a:pPr algn="l"/>
-            <a:r>
-              <a:rPr sz="900" b="0">
-                <a:solidFill>
-                  <a:srgbClr val="5B6B7B"/>
-                </a:solidFill>
-                <a:latin typeface="Arial"/>
-              </a:rPr>
-              <a:t>NRP-17</a:t>
-            </a:r>
-          </a:p>
-        </p:txBody>
-      </p:sp>
-      <p:sp>
-        <p:nvSpPr>
-          <p:cNvPr id="99" name="Rounded Rectangle 98"/>
-          <p:cNvSpPr/>
-          <p:nvPr/>
-        </p:nvSpPr>
-        <p:spPr>
-          <a:xfrm>
-            <a:off x="7223760" y="6099048"/>
-            <a:ext cx="566928" cy="237744"/>
-          </a:xfrm>
-          <a:prstGeom prst="roundRect">
-            <a:avLst>
-              <a:gd name="adj" fmla="val 50000"/>
-            </a:avLst>
-          </a:prstGeom>
-          <a:solidFill>
-            <a:srgbClr val="1565C0"/>
-          </a:solidFill>
-          <a:ln>
-            <a:noFill/>
-          </a:ln>
-          <a:effectLst/>
-        </p:spPr>
-        <p:style>
-          <a:lnRef idx="1">
-            <a:schemeClr val="accent1"/>
-          </a:lnRef>
-          <a:fillRef idx="3">
-            <a:schemeClr val="accent1"/>
-          </a:fillRef>
-          <a:effectRef idx="2">
-            <a:schemeClr val="accent1"/>
-          </a:effectRef>
-          <a:fontRef idx="minor">
-            <a:schemeClr val="lt1"/>
-          </a:fontRef>
-        </p:style>
-        <p:txBody>
-          <a:bodyPr rtlCol="0" anchor="ctr" lIns="0" rIns="0" tIns="0" bIns="0"/>
-          <a:lstStyle/>
-          <a:p>
-            <a:pPr algn="ctr"/>
-            <a:r>
-              <a:rPr sz="900" b="1">
-                <a:solidFill>
-                  <a:srgbClr val="FFFFFF"/>
-                </a:solidFill>
-                <a:latin typeface="Arial"/>
-              </a:rPr>
-              <a:t>Interna</a:t>
-            </a:r>
-          </a:p>
-        </p:txBody>
-      </p:sp>
-      <p:sp>
-        <p:nvSpPr>
-          <p:cNvPr id="100" name="Rounded Rectangle 99"/>
-          <p:cNvSpPr/>
-          <p:nvPr/>
-        </p:nvSpPr>
-        <p:spPr>
-          <a:xfrm>
-            <a:off x="7863840" y="6099048"/>
+            <a:off x="7863840" y="5952744"/>
             <a:ext cx="566928" cy="237744"/>
           </a:xfrm>
           <a:prstGeom prst="roundRect">
@@ -8224,7 +7748,7 @@
       </p:sp>
       <p:sp>
         <p:nvSpPr>
-          <p:cNvPr id="101" name="TextBox 100"/>
+          <p:cNvPr id="91" name="TextBox 90"/>
           <p:cNvSpPr txBox="1"/>
           <p:nvPr/>
         </p:nvSpPr>
@@ -8259,7 +7783,7 @@
       </p:sp>
       <p:graphicFrame>
         <p:nvGraphicFramePr>
-          <p:cNvPr id="102" name="Gráfico normas"/>
+          <p:cNvPr id="92" name="Gráfico normas"/>
           <p:cNvGraphicFramePr>
             <a:graphicFrameLocks noGrp="1"/>
           </p:cNvGraphicFramePr>
@@ -8277,7 +7801,7 @@
       </p:graphicFrame>
       <p:sp>
         <p:nvSpPr>
-          <p:cNvPr id="103" name="Fuente"/>
+          <p:cNvPr id="93" name="Fuente"/>
           <p:cNvSpPr txBox="1"/>
           <p:nvPr/>
         </p:nvSpPr>

--- a/presentacion-lunes/Resumen_Riesgos_2026_Opcion_C.pptx
+++ b/presentacion-lunes/Resumen_Riesgos_2026_Opcion_C.pptx
@@ -780,7 +780,7 @@
           <a:lstStyle/>
           <a:p>
             <a:r>
-              <a:t>Resumen de lo que nos pidieron en 2026. Vinieron 19 veces: 7 auditorías internas, 4 externas y 8 visitas de la SSF. Cuatro temas los pidieron 2 o más entidades: hay que tenerlos siempre listos, sobre todo las Actas del Comité de Riesgos (NRP-20), pedidas 4 veces; NCB-022 (cartera, Pérdida Esperada y remisiones a SSF) y el Plan de Continuidad, 3 veces cada uno. NRP-20 es la norma más revisada (5 veces, 3 entidades). En octubre coincidieron Interna, Externa y SSF.</a:t>
+              <a:t>Resumen de lo que nos pidieron en 2026. Vinieron 19 veces: 7 auditorías internas, 4 externas y 8 visitas de la SSF, y en total pidieron 26 temas distintos. Cuatro temas los pidieron 2 o más entidades: hay que tenerlos siempre listos. Las Actas del Comité de Riesgos (NRP-20) se pidieron 4 veces; los temas de NCB-022 (cartera y reservas, Pérdida Esperada, remisiones a SSF y matriz de migración) y el Plan de Continuidad, 3 veces cada uno; Gobierno Corporativo, 2 veces. NRP-20 es la norma más revisada: 5 veces, por 3 entidades. En octubre coincidieron Interna, Externa y SSF.</a:t>
             </a:r>
           </a:p>
         </p:txBody>
@@ -4291,7 +4291,7 @@
         </p:nvSpPr>
         <p:spPr>
           <a:xfrm>
-            <a:off x="411480" y="2148840"/>
+            <a:off x="411480" y="2011680"/>
             <a:ext cx="2606039" cy="594360"/>
           </a:xfrm>
           <a:prstGeom prst="rect">
@@ -4326,7 +4326,7 @@
         </p:nvSpPr>
         <p:spPr>
           <a:xfrm>
-            <a:off x="411480" y="2770632"/>
+            <a:off x="411480" y="2633472"/>
             <a:ext cx="2606039" cy="256032"/>
           </a:xfrm>
           <a:prstGeom prst="rect">
@@ -4361,7 +4361,7 @@
         </p:nvSpPr>
         <p:spPr>
           <a:xfrm>
-            <a:off x="411480" y="3026664"/>
+            <a:off x="411480" y="2889504"/>
             <a:ext cx="2606039" cy="237744"/>
           </a:xfrm>
           <a:prstGeom prst="rect">
@@ -4396,7 +4396,112 @@
         </p:nvSpPr>
         <p:spPr>
           <a:xfrm>
-            <a:off x="411480" y="3520440"/>
+            <a:off x="411480" y="3127248"/>
+            <a:ext cx="2606039" cy="594360"/>
+          </a:xfrm>
+          <a:prstGeom prst="rect">
+            <a:avLst/>
+          </a:prstGeom>
+          <a:noFill/>
+        </p:spPr>
+        <p:txBody>
+          <a:bodyPr wrap="square" lIns="0" rIns="0" tIns="0" bIns="0" anchor="b">
+            <a:spAutoFit/>
+          </a:bodyPr>
+          <a:lstStyle/>
+          <a:p>
+            <a:pPr algn="l"/>
+            <a:r>
+              <a:rPr sz="3600" b="1">
+                <a:solidFill>
+                  <a:srgbClr val="FFFFFF"/>
+                </a:solidFill>
+                <a:latin typeface="Century Gothic"/>
+              </a:rPr>
+              <a:t>26</a:t>
+            </a:r>
+          </a:p>
+        </p:txBody>
+      </p:sp>
+      <p:sp>
+        <p:nvSpPr>
+          <p:cNvPr id="13" name="TextBox 12"/>
+          <p:cNvSpPr txBox="1"/>
+          <p:nvPr/>
+        </p:nvSpPr>
+        <p:spPr>
+          <a:xfrm>
+            <a:off x="411480" y="3749039"/>
+            <a:ext cx="2606039" cy="256032"/>
+          </a:xfrm>
+          <a:prstGeom prst="rect">
+            <a:avLst/>
+          </a:prstGeom>
+          <a:noFill/>
+        </p:spPr>
+        <p:txBody>
+          <a:bodyPr wrap="square" lIns="0" rIns="0" tIns="0" bIns="0" anchor="t">
+            <a:spAutoFit/>
+          </a:bodyPr>
+          <a:lstStyle/>
+          <a:p>
+            <a:pPr algn="l"/>
+            <a:r>
+              <a:rPr sz="1300" b="1">
+                <a:solidFill>
+                  <a:srgbClr val="FFFFFF"/>
+                </a:solidFill>
+                <a:latin typeface="Arial"/>
+              </a:rPr>
+              <a:t>temas distintos pedidos</a:t>
+            </a:r>
+          </a:p>
+        </p:txBody>
+      </p:sp>
+      <p:sp>
+        <p:nvSpPr>
+          <p:cNvPr id="14" name="TextBox 13"/>
+          <p:cNvSpPr txBox="1"/>
+          <p:nvPr/>
+        </p:nvSpPr>
+        <p:spPr>
+          <a:xfrm>
+            <a:off x="411480" y="4005072"/>
+            <a:ext cx="2606039" cy="237744"/>
+          </a:xfrm>
+          <a:prstGeom prst="rect">
+            <a:avLst/>
+          </a:prstGeom>
+          <a:noFill/>
+        </p:spPr>
+        <p:txBody>
+          <a:bodyPr wrap="square" lIns="0" rIns="0" tIns="0" bIns="0" anchor="t">
+            <a:spAutoFit/>
+          </a:bodyPr>
+          <a:lstStyle/>
+          <a:p>
+            <a:pPr algn="l"/>
+            <a:r>
+              <a:rPr sz="1000" b="0">
+                <a:solidFill>
+                  <a:srgbClr val="9CC3E8"/>
+                </a:solidFill>
+                <a:latin typeface="Arial"/>
+              </a:rPr>
+              <a:t>de 31 temas del catálogo</a:t>
+            </a:r>
+          </a:p>
+        </p:txBody>
+      </p:sp>
+      <p:sp>
+        <p:nvSpPr>
+          <p:cNvPr id="15" name="TextBox 14"/>
+          <p:cNvSpPr txBox="1"/>
+          <p:nvPr/>
+        </p:nvSpPr>
+        <p:spPr>
+          <a:xfrm>
+            <a:off x="411480" y="4242816"/>
             <a:ext cx="2606039" cy="594360"/>
           </a:xfrm>
           <a:prstGeom prst="rect">
@@ -4425,13 +4530,13 @@
       </p:sp>
       <p:sp>
         <p:nvSpPr>
-          <p:cNvPr id="13" name="TextBox 12"/>
+          <p:cNvPr id="16" name="TextBox 15"/>
           <p:cNvSpPr txBox="1"/>
           <p:nvPr/>
         </p:nvSpPr>
         <p:spPr>
           <a:xfrm>
-            <a:off x="411480" y="4142232"/>
+            <a:off x="411480" y="4864607"/>
             <a:ext cx="2606039" cy="256032"/>
           </a:xfrm>
           <a:prstGeom prst="rect">
@@ -4460,13 +4565,13 @@
       </p:sp>
       <p:sp>
         <p:nvSpPr>
-          <p:cNvPr id="14" name="TextBox 13"/>
+          <p:cNvPr id="17" name="TextBox 16"/>
           <p:cNvSpPr txBox="1"/>
           <p:nvPr/>
         </p:nvSpPr>
         <p:spPr>
           <a:xfrm>
-            <a:off x="411480" y="4398264"/>
+            <a:off x="411480" y="5120640"/>
             <a:ext cx="2606039" cy="237744"/>
           </a:xfrm>
           <a:prstGeom prst="rect">
@@ -4495,13 +4600,13 @@
       </p:sp>
       <p:sp>
         <p:nvSpPr>
-          <p:cNvPr id="15" name="TextBox 14"/>
+          <p:cNvPr id="18" name="TextBox 17"/>
           <p:cNvSpPr txBox="1"/>
           <p:nvPr/>
         </p:nvSpPr>
         <p:spPr>
           <a:xfrm>
-            <a:off x="411480" y="4892040"/>
+            <a:off x="411480" y="5358383"/>
             <a:ext cx="2606039" cy="594360"/>
           </a:xfrm>
           <a:prstGeom prst="rect">
@@ -4530,13 +4635,13 @@
       </p:sp>
       <p:sp>
         <p:nvSpPr>
-          <p:cNvPr id="16" name="TextBox 15"/>
+          <p:cNvPr id="19" name="TextBox 18"/>
           <p:cNvSpPr txBox="1"/>
           <p:nvPr/>
         </p:nvSpPr>
         <p:spPr>
           <a:xfrm>
-            <a:off x="411480" y="5513831"/>
+            <a:off x="411480" y="5980175"/>
             <a:ext cx="2606039" cy="256032"/>
           </a:xfrm>
           <a:prstGeom prst="rect">
@@ -4565,13 +4670,13 @@
       </p:sp>
       <p:sp>
         <p:nvSpPr>
-          <p:cNvPr id="17" name="TextBox 16"/>
+          <p:cNvPr id="20" name="TextBox 19"/>
           <p:cNvSpPr txBox="1"/>
           <p:nvPr/>
         </p:nvSpPr>
         <p:spPr>
           <a:xfrm>
-            <a:off x="411480" y="5769864"/>
+            <a:off x="411480" y="6236207"/>
             <a:ext cx="2606039" cy="237744"/>
           </a:xfrm>
           <a:prstGeom prst="rect">
@@ -4600,7 +4705,7 @@
       </p:sp>
       <p:sp>
         <p:nvSpPr>
-          <p:cNvPr id="18" name="TextBox 17"/>
+          <p:cNvPr id="21" name="TextBox 20"/>
           <p:cNvSpPr txBox="1"/>
           <p:nvPr/>
         </p:nvSpPr>
@@ -4635,7 +4740,7 @@
       </p:sp>
       <p:sp>
         <p:nvSpPr>
-          <p:cNvPr id="19" name="Rounded Rectangle 18"/>
+          <p:cNvPr id="22" name="Rounded Rectangle 21"/>
           <p:cNvSpPr/>
           <p:nvPr/>
         </p:nvSpPr>
@@ -4681,7 +4786,7 @@
       </p:sp>
       <p:sp>
         <p:nvSpPr>
-          <p:cNvPr id="20" name="TextBox 19"/>
+          <p:cNvPr id="23" name="TextBox 22"/>
           <p:cNvSpPr txBox="1"/>
           <p:nvPr/>
         </p:nvSpPr>
@@ -4716,7 +4821,7 @@
       </p:sp>
       <p:sp>
         <p:nvSpPr>
-          <p:cNvPr id="21" name="Oval 20"/>
+          <p:cNvPr id="24" name="Oval 23"/>
           <p:cNvSpPr/>
           <p:nvPr/>
         </p:nvSpPr>
@@ -4760,7 +4865,7 @@
       </p:sp>
       <p:sp>
         <p:nvSpPr>
-          <p:cNvPr id="22" name="Oval 21"/>
+          <p:cNvPr id="25" name="Oval 24"/>
           <p:cNvSpPr/>
           <p:nvPr/>
         </p:nvSpPr>
@@ -4804,7 +4909,7 @@
       </p:sp>
       <p:sp>
         <p:nvSpPr>
-          <p:cNvPr id="23" name="Rounded Rectangle 22"/>
+          <p:cNvPr id="26" name="Rounded Rectangle 25"/>
           <p:cNvSpPr/>
           <p:nvPr/>
         </p:nvSpPr>
@@ -4850,7 +4955,7 @@
       </p:sp>
       <p:sp>
         <p:nvSpPr>
-          <p:cNvPr id="24" name="TextBox 23"/>
+          <p:cNvPr id="27" name="TextBox 26"/>
           <p:cNvSpPr txBox="1"/>
           <p:nvPr/>
         </p:nvSpPr>
@@ -4885,7 +4990,7 @@
       </p:sp>
       <p:sp>
         <p:nvSpPr>
-          <p:cNvPr id="25" name="Oval 24"/>
+          <p:cNvPr id="28" name="Oval 27"/>
           <p:cNvSpPr/>
           <p:nvPr/>
         </p:nvSpPr>
@@ -4929,7 +5034,7 @@
       </p:sp>
       <p:sp>
         <p:nvSpPr>
-          <p:cNvPr id="26" name="Oval 25"/>
+          <p:cNvPr id="29" name="Oval 28"/>
           <p:cNvSpPr/>
           <p:nvPr/>
         </p:nvSpPr>
@@ -4973,7 +5078,7 @@
       </p:sp>
       <p:sp>
         <p:nvSpPr>
-          <p:cNvPr id="27" name="Rounded Rectangle 26"/>
+          <p:cNvPr id="30" name="Rounded Rectangle 29"/>
           <p:cNvSpPr/>
           <p:nvPr/>
         </p:nvSpPr>
@@ -5019,7 +5124,7 @@
       </p:sp>
       <p:sp>
         <p:nvSpPr>
-          <p:cNvPr id="28" name="TextBox 27"/>
+          <p:cNvPr id="31" name="TextBox 30"/>
           <p:cNvSpPr txBox="1"/>
           <p:nvPr/>
         </p:nvSpPr>
@@ -5054,7 +5159,7 @@
       </p:sp>
       <p:sp>
         <p:nvSpPr>
-          <p:cNvPr id="29" name="Oval 28"/>
+          <p:cNvPr id="32" name="Oval 31"/>
           <p:cNvSpPr/>
           <p:nvPr/>
         </p:nvSpPr>
@@ -5098,7 +5203,7 @@
       </p:sp>
       <p:sp>
         <p:nvSpPr>
-          <p:cNvPr id="30" name="Rounded Rectangle 29"/>
+          <p:cNvPr id="33" name="Rounded Rectangle 32"/>
           <p:cNvSpPr/>
           <p:nvPr/>
         </p:nvSpPr>
@@ -5144,7 +5249,7 @@
       </p:sp>
       <p:sp>
         <p:nvSpPr>
-          <p:cNvPr id="31" name="TextBox 30"/>
+          <p:cNvPr id="34" name="TextBox 33"/>
           <p:cNvSpPr txBox="1"/>
           <p:nvPr/>
         </p:nvSpPr>
@@ -5179,7 +5284,7 @@
       </p:sp>
       <p:sp>
         <p:nvSpPr>
-          <p:cNvPr id="32" name="Oval 31"/>
+          <p:cNvPr id="35" name="Oval 34"/>
           <p:cNvSpPr/>
           <p:nvPr/>
         </p:nvSpPr>
@@ -5223,7 +5328,7 @@
       </p:sp>
       <p:sp>
         <p:nvSpPr>
-          <p:cNvPr id="33" name="Rounded Rectangle 32"/>
+          <p:cNvPr id="36" name="Rounded Rectangle 35"/>
           <p:cNvSpPr/>
           <p:nvPr/>
         </p:nvSpPr>
@@ -5269,7 +5374,7 @@
       </p:sp>
       <p:sp>
         <p:nvSpPr>
-          <p:cNvPr id="34" name="TextBox 33"/>
+          <p:cNvPr id="37" name="TextBox 36"/>
           <p:cNvSpPr txBox="1"/>
           <p:nvPr/>
         </p:nvSpPr>
@@ -5304,7 +5409,7 @@
       </p:sp>
       <p:sp>
         <p:nvSpPr>
-          <p:cNvPr id="35" name="Oval 34"/>
+          <p:cNvPr id="38" name="Oval 37"/>
           <p:cNvSpPr/>
           <p:nvPr/>
         </p:nvSpPr>
@@ -5348,7 +5453,7 @@
       </p:sp>
       <p:sp>
         <p:nvSpPr>
-          <p:cNvPr id="36" name="Oval 35"/>
+          <p:cNvPr id="39" name="Oval 38"/>
           <p:cNvSpPr/>
           <p:nvPr/>
         </p:nvSpPr>
@@ -5392,7 +5497,7 @@
       </p:sp>
       <p:sp>
         <p:nvSpPr>
-          <p:cNvPr id="37" name="Rounded Rectangle 36"/>
+          <p:cNvPr id="40" name="Rounded Rectangle 39"/>
           <p:cNvSpPr/>
           <p:nvPr/>
         </p:nvSpPr>
@@ -5438,7 +5543,7 @@
       </p:sp>
       <p:sp>
         <p:nvSpPr>
-          <p:cNvPr id="38" name="TextBox 37"/>
+          <p:cNvPr id="41" name="TextBox 40"/>
           <p:cNvSpPr txBox="1"/>
           <p:nvPr/>
         </p:nvSpPr>
@@ -5473,7 +5578,7 @@
       </p:sp>
       <p:sp>
         <p:nvSpPr>
-          <p:cNvPr id="39" name="Oval 38"/>
+          <p:cNvPr id="42" name="Oval 41"/>
           <p:cNvSpPr/>
           <p:nvPr/>
         </p:nvSpPr>
@@ -5517,7 +5622,7 @@
       </p:sp>
       <p:sp>
         <p:nvSpPr>
-          <p:cNvPr id="40" name="Oval 39"/>
+          <p:cNvPr id="43" name="Oval 42"/>
           <p:cNvSpPr/>
           <p:nvPr/>
         </p:nvSpPr>
@@ -5561,7 +5666,7 @@
       </p:sp>
       <p:sp>
         <p:nvSpPr>
-          <p:cNvPr id="41" name="Rounded Rectangle 40"/>
+          <p:cNvPr id="44" name="Rounded Rectangle 43"/>
           <p:cNvSpPr/>
           <p:nvPr/>
         </p:nvSpPr>
@@ -5607,7 +5712,7 @@
       </p:sp>
       <p:sp>
         <p:nvSpPr>
-          <p:cNvPr id="42" name="TextBox 41"/>
+          <p:cNvPr id="45" name="TextBox 44"/>
           <p:cNvSpPr txBox="1"/>
           <p:nvPr/>
         </p:nvSpPr>
@@ -5642,7 +5747,7 @@
       </p:sp>
       <p:sp>
         <p:nvSpPr>
-          <p:cNvPr id="43" name="Oval 42"/>
+          <p:cNvPr id="46" name="Oval 45"/>
           <p:cNvSpPr/>
           <p:nvPr/>
         </p:nvSpPr>
@@ -5686,7 +5791,7 @@
       </p:sp>
       <p:sp>
         <p:nvSpPr>
-          <p:cNvPr id="44" name="Oval 43"/>
+          <p:cNvPr id="47" name="Oval 46"/>
           <p:cNvSpPr/>
           <p:nvPr/>
         </p:nvSpPr>
@@ -5730,7 +5835,7 @@
       </p:sp>
       <p:sp>
         <p:nvSpPr>
-          <p:cNvPr id="45" name="Rounded Rectangle 44"/>
+          <p:cNvPr id="48" name="Rounded Rectangle 47"/>
           <p:cNvSpPr/>
           <p:nvPr/>
         </p:nvSpPr>
@@ -5776,7 +5881,7 @@
       </p:sp>
       <p:sp>
         <p:nvSpPr>
-          <p:cNvPr id="46" name="TextBox 45"/>
+          <p:cNvPr id="49" name="TextBox 48"/>
           <p:cNvSpPr txBox="1"/>
           <p:nvPr/>
         </p:nvSpPr>
@@ -5811,7 +5916,7 @@
       </p:sp>
       <p:sp>
         <p:nvSpPr>
-          <p:cNvPr id="47" name="Oval 46"/>
+          <p:cNvPr id="50" name="Oval 49"/>
           <p:cNvSpPr/>
           <p:nvPr/>
         </p:nvSpPr>
@@ -5855,7 +5960,7 @@
       </p:sp>
       <p:sp>
         <p:nvSpPr>
-          <p:cNvPr id="48" name="Oval 47"/>
+          <p:cNvPr id="51" name="Oval 50"/>
           <p:cNvSpPr/>
           <p:nvPr/>
         </p:nvSpPr>
@@ -5899,7 +6004,7 @@
       </p:sp>
       <p:sp>
         <p:nvSpPr>
-          <p:cNvPr id="49" name="Oval 48"/>
+          <p:cNvPr id="52" name="Oval 51"/>
           <p:cNvSpPr/>
           <p:nvPr/>
         </p:nvSpPr>
@@ -5943,7 +6048,7 @@
       </p:sp>
       <p:sp>
         <p:nvSpPr>
-          <p:cNvPr id="50" name="Rounded Rectangle 49"/>
+          <p:cNvPr id="53" name="Rounded Rectangle 52"/>
           <p:cNvSpPr/>
           <p:nvPr/>
         </p:nvSpPr>
@@ -5989,7 +6094,7 @@
       </p:sp>
       <p:sp>
         <p:nvSpPr>
-          <p:cNvPr id="51" name="TextBox 50"/>
+          <p:cNvPr id="54" name="TextBox 53"/>
           <p:cNvSpPr txBox="1"/>
           <p:nvPr/>
         </p:nvSpPr>
@@ -6024,7 +6129,7 @@
       </p:sp>
       <p:sp>
         <p:nvSpPr>
-          <p:cNvPr id="52" name="Oval 51"/>
+          <p:cNvPr id="55" name="Oval 54"/>
           <p:cNvSpPr/>
           <p:nvPr/>
         </p:nvSpPr>
@@ -6068,7 +6173,7 @@
       </p:sp>
       <p:sp>
         <p:nvSpPr>
-          <p:cNvPr id="53" name="Rounded Rectangle 52"/>
+          <p:cNvPr id="56" name="Rounded Rectangle 55"/>
           <p:cNvSpPr/>
           <p:nvPr/>
         </p:nvSpPr>
@@ -6114,7 +6219,7 @@
       </p:sp>
       <p:sp>
         <p:nvSpPr>
-          <p:cNvPr id="54" name="Rounded Rectangle 53"/>
+          <p:cNvPr id="57" name="Rounded Rectangle 56"/>
           <p:cNvSpPr/>
           <p:nvPr/>
         </p:nvSpPr>
@@ -6160,7 +6265,7 @@
       </p:sp>
       <p:sp>
         <p:nvSpPr>
-          <p:cNvPr id="55" name="TextBox 54"/>
+          <p:cNvPr id="58" name="TextBox 57"/>
           <p:cNvSpPr txBox="1"/>
           <p:nvPr/>
         </p:nvSpPr>
@@ -6195,7 +6300,7 @@
       </p:sp>
       <p:sp>
         <p:nvSpPr>
-          <p:cNvPr id="56" name="Oval 55"/>
+          <p:cNvPr id="59" name="Oval 58"/>
           <p:cNvSpPr/>
           <p:nvPr/>
         </p:nvSpPr>
@@ -6239,7 +6344,7 @@
       </p:sp>
       <p:sp>
         <p:nvSpPr>
-          <p:cNvPr id="57" name="Oval 56"/>
+          <p:cNvPr id="60" name="Oval 59"/>
           <p:cNvSpPr/>
           <p:nvPr/>
         </p:nvSpPr>
@@ -6283,7 +6388,7 @@
       </p:sp>
       <p:sp>
         <p:nvSpPr>
-          <p:cNvPr id="58" name="Oval 57"/>
+          <p:cNvPr id="61" name="Oval 60"/>
           <p:cNvSpPr/>
           <p:nvPr/>
         </p:nvSpPr>
@@ -6327,7 +6432,7 @@
       </p:sp>
       <p:sp>
         <p:nvSpPr>
-          <p:cNvPr id="59" name="Rounded Rectangle 58"/>
+          <p:cNvPr id="62" name="Rounded Rectangle 61"/>
           <p:cNvSpPr/>
           <p:nvPr/>
         </p:nvSpPr>
@@ -6373,7 +6478,7 @@
       </p:sp>
       <p:sp>
         <p:nvSpPr>
-          <p:cNvPr id="60" name="TextBox 59"/>
+          <p:cNvPr id="63" name="TextBox 62"/>
           <p:cNvSpPr txBox="1"/>
           <p:nvPr/>
         </p:nvSpPr>
@@ -6408,7 +6513,7 @@
       </p:sp>
       <p:sp>
         <p:nvSpPr>
-          <p:cNvPr id="61" name="Rounded Rectangle 60"/>
+          <p:cNvPr id="64" name="Rounded Rectangle 63"/>
           <p:cNvSpPr/>
           <p:nvPr/>
         </p:nvSpPr>
@@ -6454,7 +6559,7 @@
       </p:sp>
       <p:sp>
         <p:nvSpPr>
-          <p:cNvPr id="62" name="TextBox 61"/>
+          <p:cNvPr id="65" name="TextBox 64"/>
           <p:cNvSpPr txBox="1"/>
           <p:nvPr/>
         </p:nvSpPr>
@@ -6489,7 +6594,7 @@
       </p:sp>
       <p:sp>
         <p:nvSpPr>
-          <p:cNvPr id="63" name="Oval 62"/>
+          <p:cNvPr id="66" name="Oval 65"/>
           <p:cNvSpPr/>
           <p:nvPr/>
         </p:nvSpPr>
@@ -6533,7 +6638,7 @@
       </p:sp>
       <p:sp>
         <p:nvSpPr>
-          <p:cNvPr id="64" name="TextBox 63"/>
+          <p:cNvPr id="67" name="TextBox 66"/>
           <p:cNvSpPr txBox="1"/>
           <p:nvPr/>
         </p:nvSpPr>
@@ -6568,7 +6673,7 @@
       </p:sp>
       <p:sp>
         <p:nvSpPr>
-          <p:cNvPr id="65" name="Oval 64"/>
+          <p:cNvPr id="68" name="Oval 67"/>
           <p:cNvSpPr/>
           <p:nvPr/>
         </p:nvSpPr>
@@ -6612,7 +6717,7 @@
       </p:sp>
       <p:sp>
         <p:nvSpPr>
-          <p:cNvPr id="66" name="TextBox 65"/>
+          <p:cNvPr id="69" name="TextBox 68"/>
           <p:cNvSpPr txBox="1"/>
           <p:nvPr/>
         </p:nvSpPr>
@@ -6647,7 +6752,7 @@
       </p:sp>
       <p:sp>
         <p:nvSpPr>
-          <p:cNvPr id="67" name="Oval 66"/>
+          <p:cNvPr id="70" name="Oval 69"/>
           <p:cNvSpPr/>
           <p:nvPr/>
         </p:nvSpPr>
@@ -6691,7 +6796,7 @@
       </p:sp>
       <p:sp>
         <p:nvSpPr>
-          <p:cNvPr id="68" name="TextBox 67"/>
+          <p:cNvPr id="71" name="TextBox 70"/>
           <p:cNvSpPr txBox="1"/>
           <p:nvPr/>
         </p:nvSpPr>
@@ -6726,7 +6831,7 @@
       </p:sp>
       <p:sp>
         <p:nvSpPr>
-          <p:cNvPr id="69" name="TextBox 68"/>
+          <p:cNvPr id="72" name="TextBox 71"/>
           <p:cNvSpPr txBox="1"/>
           <p:nvPr/>
         </p:nvSpPr>
@@ -6761,7 +6866,7 @@
       </p:sp>
       <p:sp>
         <p:nvSpPr>
-          <p:cNvPr id="70" name="TextBox 69"/>
+          <p:cNvPr id="73" name="TextBox 72"/>
           <p:cNvSpPr txBox="1"/>
           <p:nvPr/>
         </p:nvSpPr>
@@ -6796,7 +6901,7 @@
       </p:sp>
       <p:sp>
         <p:nvSpPr>
-          <p:cNvPr id="71" name="Rounded Rectangle 70"/>
+          <p:cNvPr id="74" name="Rounded Rectangle 73"/>
           <p:cNvSpPr/>
           <p:nvPr/>
         </p:nvSpPr>
@@ -6842,7 +6947,7 @@
       </p:sp>
       <p:sp>
         <p:nvSpPr>
-          <p:cNvPr id="72" name="TextBox 71"/>
+          <p:cNvPr id="75" name="TextBox 74"/>
           <p:cNvSpPr txBox="1"/>
           <p:nvPr/>
         </p:nvSpPr>
@@ -6877,7 +6982,7 @@
       </p:sp>
       <p:sp>
         <p:nvSpPr>
-          <p:cNvPr id="73" name="TextBox 72"/>
+          <p:cNvPr id="76" name="TextBox 75"/>
           <p:cNvSpPr txBox="1"/>
           <p:nvPr/>
         </p:nvSpPr>
@@ -6924,7 +7029,7 @@
       </p:sp>
       <p:sp>
         <p:nvSpPr>
-          <p:cNvPr id="74" name="Rounded Rectangle 73"/>
+          <p:cNvPr id="77" name="Rounded Rectangle 76"/>
           <p:cNvSpPr/>
           <p:nvPr/>
         </p:nvSpPr>
@@ -6979,7 +7084,7 @@
       </p:sp>
       <p:sp>
         <p:nvSpPr>
-          <p:cNvPr id="75" name="Rounded Rectangle 74"/>
+          <p:cNvPr id="78" name="Rounded Rectangle 77"/>
           <p:cNvSpPr/>
           <p:nvPr/>
         </p:nvSpPr>
@@ -7034,7 +7139,7 @@
       </p:sp>
       <p:sp>
         <p:nvSpPr>
-          <p:cNvPr id="76" name="Rounded Rectangle 75"/>
+          <p:cNvPr id="79" name="Rounded Rectangle 78"/>
           <p:cNvSpPr/>
           <p:nvPr/>
         </p:nvSpPr>
@@ -7080,7 +7185,7 @@
       </p:sp>
       <p:sp>
         <p:nvSpPr>
-          <p:cNvPr id="77" name="TextBox 76"/>
+          <p:cNvPr id="80" name="TextBox 79"/>
           <p:cNvSpPr txBox="1"/>
           <p:nvPr/>
         </p:nvSpPr>
@@ -7115,7 +7220,7 @@
       </p:sp>
       <p:sp>
         <p:nvSpPr>
-          <p:cNvPr id="78" name="TextBox 77"/>
+          <p:cNvPr id="81" name="TextBox 80"/>
           <p:cNvSpPr txBox="1"/>
           <p:nvPr/>
         </p:nvSpPr>
@@ -7155,14 +7260,14 @@
                 </a:solidFill>
                 <a:latin typeface="Arial"/>
               </a:rPr>
-              <a:t>NCB-022 · Cartera, mora y reservas · Pérdida Esperada · Remisiones a SSF</a:t>
-            </a:r>
-          </a:p>
-        </p:txBody>
-      </p:sp>
-      <p:sp>
-        <p:nvSpPr>
-          <p:cNvPr id="79" name="Rounded Rectangle 78"/>
+              <a:t>NCB-022 · Cartera y reservas · Pérdida Esperada · Remisiones a SSF · Matriz de migración</a:t>
+            </a:r>
+          </a:p>
+        </p:txBody>
+      </p:sp>
+      <p:sp>
+        <p:nvSpPr>
+          <p:cNvPr id="82" name="Rounded Rectangle 81"/>
           <p:cNvSpPr/>
           <p:nvPr/>
         </p:nvSpPr>
@@ -7217,7 +7322,7 @@
       </p:sp>
       <p:sp>
         <p:nvSpPr>
-          <p:cNvPr id="80" name="Rounded Rectangle 79"/>
+          <p:cNvPr id="83" name="Rounded Rectangle 82"/>
           <p:cNvSpPr/>
           <p:nvPr/>
         </p:nvSpPr>
@@ -7272,7 +7377,7 @@
       </p:sp>
       <p:sp>
         <p:nvSpPr>
-          <p:cNvPr id="81" name="Rounded Rectangle 80"/>
+          <p:cNvPr id="84" name="Rounded Rectangle 83"/>
           <p:cNvSpPr/>
           <p:nvPr/>
         </p:nvSpPr>
@@ -7318,7 +7423,7 @@
       </p:sp>
       <p:sp>
         <p:nvSpPr>
-          <p:cNvPr id="82" name="TextBox 81"/>
+          <p:cNvPr id="85" name="TextBox 84"/>
           <p:cNvSpPr txBox="1"/>
           <p:nvPr/>
         </p:nvSpPr>
@@ -7353,7 +7458,7 @@
       </p:sp>
       <p:sp>
         <p:nvSpPr>
-          <p:cNvPr id="83" name="TextBox 82"/>
+          <p:cNvPr id="86" name="TextBox 85"/>
           <p:cNvSpPr txBox="1"/>
           <p:nvPr/>
         </p:nvSpPr>
@@ -7400,7 +7505,7 @@
       </p:sp>
       <p:sp>
         <p:nvSpPr>
-          <p:cNvPr id="84" name="Rounded Rectangle 83"/>
+          <p:cNvPr id="87" name="Rounded Rectangle 86"/>
           <p:cNvSpPr/>
           <p:nvPr/>
         </p:nvSpPr>
@@ -7455,7 +7560,7 @@
       </p:sp>
       <p:sp>
         <p:nvSpPr>
-          <p:cNvPr id="85" name="Rounded Rectangle 84"/>
+          <p:cNvPr id="88" name="Rounded Rectangle 87"/>
           <p:cNvSpPr/>
           <p:nvPr/>
         </p:nvSpPr>
@@ -7510,7 +7615,7 @@
       </p:sp>
       <p:sp>
         <p:nvSpPr>
-          <p:cNvPr id="86" name="Rounded Rectangle 85"/>
+          <p:cNvPr id="89" name="Rounded Rectangle 88"/>
           <p:cNvSpPr/>
           <p:nvPr/>
         </p:nvSpPr>
@@ -7556,7 +7661,7 @@
       </p:sp>
       <p:sp>
         <p:nvSpPr>
-          <p:cNvPr id="87" name="TextBox 86"/>
+          <p:cNvPr id="90" name="TextBox 89"/>
           <p:cNvSpPr txBox="1"/>
           <p:nvPr/>
         </p:nvSpPr>
@@ -7591,7 +7696,7 @@
       </p:sp>
       <p:sp>
         <p:nvSpPr>
-          <p:cNvPr id="88" name="TextBox 87"/>
+          <p:cNvPr id="91" name="TextBox 90"/>
           <p:cNvSpPr txBox="1"/>
           <p:nvPr/>
         </p:nvSpPr>
@@ -7638,7 +7743,7 @@
       </p:sp>
       <p:sp>
         <p:nvSpPr>
-          <p:cNvPr id="89" name="Rounded Rectangle 88"/>
+          <p:cNvPr id="92" name="Rounded Rectangle 91"/>
           <p:cNvSpPr/>
           <p:nvPr/>
         </p:nvSpPr>
@@ -7693,7 +7798,7 @@
       </p:sp>
       <p:sp>
         <p:nvSpPr>
-          <p:cNvPr id="90" name="Rounded Rectangle 89"/>
+          <p:cNvPr id="93" name="Rounded Rectangle 92"/>
           <p:cNvSpPr/>
           <p:nvPr/>
         </p:nvSpPr>
@@ -7748,7 +7853,7 @@
       </p:sp>
       <p:sp>
         <p:nvSpPr>
-          <p:cNvPr id="91" name="TextBox 90"/>
+          <p:cNvPr id="94" name="TextBox 93"/>
           <p:cNvSpPr txBox="1"/>
           <p:nvPr/>
         </p:nvSpPr>
@@ -7783,7 +7888,7 @@
       </p:sp>
       <p:graphicFrame>
         <p:nvGraphicFramePr>
-          <p:cNvPr id="92" name="Gráfico normas"/>
+          <p:cNvPr id="95" name="Gráfico normas"/>
           <p:cNvGraphicFramePr>
             <a:graphicFrameLocks noGrp="1"/>
           </p:cNvGraphicFramePr>
@@ -7801,7 +7906,7 @@
       </p:graphicFrame>
       <p:sp>
         <p:nvSpPr>
-          <p:cNvPr id="93" name="Fuente"/>
+          <p:cNvPr id="96" name="Fuente"/>
           <p:cNvSpPr txBox="1"/>
           <p:nvPr/>
         </p:nvSpPr>
@@ -7829,7 +7934,7 @@
                 </a:solidFill>
                 <a:latin typeface="Arial"/>
               </a:rPr>
-              <a:t>Fuente: Matriz de Requerimientos de Riesgos 2026, hoja «Resumen Riesgos» · corte octubre 2026</a:t>
+              <a:t>Fuente: Matriz de Requerimientos de Riesgos 2026, hojas «Resumen Riesgos» y «Consolidado» · corte octubre 2026</a:t>
             </a:r>
           </a:p>
         </p:txBody>

--- a/presentacion-lunes/Resumen_Riesgos_2026_Opcion_C.pptx
+++ b/presentacion-lunes/Resumen_Riesgos_2026_Opcion_C.pptx
@@ -166,207 +166,6 @@
 </pc:chgInfo>
 </file>
 
-<file path=ppt/charts/chart1.xml><?xml version="1.0" encoding="utf-8"?>
-<c:chartSpace xmlns:c="http://schemas.openxmlformats.org/drawingml/2006/chart" xmlns:a="http://schemas.openxmlformats.org/drawingml/2006/main" xmlns:r="http://schemas.openxmlformats.org/officeDocument/2006/relationships">
-  <c:date1904 val="0"/>
-  <c:chart>
-    <c:autoTitleDeleted val="1"/>
-    <c:plotArea>
-      <c:barChart>
-        <c:barDir val="bar"/>
-        <c:grouping val="clustered"/>
-        <c:ser>
-          <c:idx val="0"/>
-          <c:order val="0"/>
-          <c:tx>
-            <c:strRef>
-              <c:f>Sheet1!$B$1</c:f>
-              <c:strCache>
-                <c:ptCount val="1"/>
-                <c:pt idx="0">
-                  <c:v>Veces auditada</c:v>
-                </c:pt>
-              </c:strCache>
-            </c:strRef>
-          </c:tx>
-          <c:spPr>
-            <a:solidFill>
-              <a:srgbClr val="9BB8D9"/>
-            </a:solidFill>
-          </c:spPr>
-          <c:dPt>
-            <c:idx val="7"/>
-            <c:spPr>
-              <a:solidFill>
-                <a:srgbClr val="003D6F"/>
-              </a:solidFill>
-            </c:spPr>
-          </c:dPt>
-          <c:cat>
-            <c:strRef>
-              <c:f>Sheet1!$A$2:$A$9</c:f>
-              <c:strCache>
-                <c:ptCount val="8"/>
-                <c:pt idx="0">
-                  <c:v>NRSF-03</c:v>
-                </c:pt>
-                <c:pt idx="1">
-                  <c:v>NRSF-01</c:v>
-                </c:pt>
-                <c:pt idx="2">
-                  <c:v>NRP-17</c:v>
-                </c:pt>
-                <c:pt idx="3">
-                  <c:v>NRP-25</c:v>
-                </c:pt>
-                <c:pt idx="4">
-                  <c:v>NPB4-49</c:v>
-                </c:pt>
-                <c:pt idx="5">
-                  <c:v>NRP-24</c:v>
-                </c:pt>
-                <c:pt idx="6">
-                  <c:v>NCB-022</c:v>
-                </c:pt>
-                <c:pt idx="7">
-                  <c:v>NRP-20</c:v>
-                </c:pt>
-              </c:strCache>
-            </c:strRef>
-          </c:cat>
-          <c:val>
-            <c:numRef>
-              <c:f>Sheet1!$B$2:$B$9</c:f>
-              <c:numCache>
-                <c:formatCode>General</c:formatCode>
-                <c:ptCount val="8"/>
-                <c:pt idx="0">
-                  <c:v>2</c:v>
-                </c:pt>
-                <c:pt idx="1">
-                  <c:v>2</c:v>
-                </c:pt>
-                <c:pt idx="2">
-                  <c:v>2</c:v>
-                </c:pt>
-                <c:pt idx="3">
-                  <c:v>2</c:v>
-                </c:pt>
-                <c:pt idx="4">
-                  <c:v>2</c:v>
-                </c:pt>
-                <c:pt idx="5">
-                  <c:v>3</c:v>
-                </c:pt>
-                <c:pt idx="6">
-                  <c:v>3</c:v>
-                </c:pt>
-                <c:pt idx="7">
-                  <c:v>5</c:v>
-                </c:pt>
-              </c:numCache>
-            </c:numRef>
-          </c:val>
-        </c:ser>
-        <c:dLbls>
-          <c:txPr>
-            <a:bodyPr/>
-            <a:lstStyle/>
-            <a:p>
-              <a:pPr>
-                <a:defRPr sz="1000" b="1">
-                  <a:solidFill>
-                    <a:srgbClr val="1F2A37"/>
-                  </a:solidFill>
-                  <a:latin typeface="Arial"/>
-                </a:defRPr>
-              </a:pPr>
-            </a:p>
-          </c:txPr>
-          <c:dLblPos val="outEnd"/>
-          <c:showLegendKey val="0"/>
-          <c:showVal val="1"/>
-          <c:showCatName val="0"/>
-          <c:showSerName val="0"/>
-          <c:showPercent val="0"/>
-          <c:showBubbleSize val="0"/>
-          <c:showLeaderLines val="1"/>
-        </c:dLbls>
-        <c:gapWidth val="45"/>
-        <c:axId val="-2068027336"/>
-        <c:axId val="-2113994440"/>
-      </c:barChart>
-      <c:catAx>
-        <c:axId val="-2068027336"/>
-        <c:scaling>
-          <c:orientation val="minMax"/>
-        </c:scaling>
-        <c:delete val="0"/>
-        <c:axPos val="l"/>
-        <c:majorTickMark val="out"/>
-        <c:minorTickMark val="none"/>
-        <c:tickLblPos val="nextTo"/>
-        <c:spPr>
-          <a:ln>
-            <a:solidFill>
-              <a:srgbClr val="C9D2DC"/>
-            </a:solidFill>
-          </a:ln>
-        </c:spPr>
-        <c:txPr>
-          <a:bodyPr/>
-          <a:lstStyle/>
-          <a:p>
-            <a:pPr>
-              <a:defRPr sz="1000">
-                <a:solidFill>
-                  <a:srgbClr val="1F2A37"/>
-                </a:solidFill>
-                <a:latin typeface="Arial"/>
-              </a:defRPr>
-            </a:pPr>
-          </a:p>
-        </c:txPr>
-        <c:crossAx val="-2113994440"/>
-        <c:crosses val="autoZero"/>
-        <c:auto val="1"/>
-        <c:lblAlgn val="ctr"/>
-        <c:lblOffset val="100"/>
-        <c:noMultiLvlLbl val="0"/>
-      </c:catAx>
-      <c:valAx>
-        <c:axId val="-2113994440"/>
-        <c:scaling>
-          <c:max val="6.0"/>
-          <c:min val="0.0"/>
-        </c:scaling>
-        <c:delete/>
-        <c:axPos val="b"/>
-        <c:majorTickMark val="out"/>
-        <c:minorTickMark val="none"/>
-        <c:tickLblPos val="nextTo"/>
-        <c:crossAx val="-2068027336"/>
-        <c:crosses val="autoZero"/>
-      </c:valAx>
-    </c:plotArea>
-    <c:dispBlanksAs val="gap"/>
-  </c:chart>
-  <c:txPr>
-    <a:bodyPr/>
-    <a:lstStyle/>
-    <a:p>
-      <a:pPr>
-        <a:defRPr sz="1800"/>
-      </a:pPr>
-      <a:endParaRPr lang="en-US"/>
-    </a:p>
-  </c:txPr>
-  <c:externalData r:id="rId1">
-    <c:autoUpdate val="0"/>
-  </c:externalData>
-</c:chartSpace>
-</file>
-
 <file path=ppt/notesMasters/notesMaster1.xml><?xml version="1.0" encoding="utf-8"?>
 <p:notesMaster xmlns:a="http://schemas.openxmlformats.org/drawingml/2006/main" xmlns:r="http://schemas.openxmlformats.org/officeDocument/2006/relationships" xmlns:p="http://schemas.openxmlformats.org/presentationml/2006/main">
   <p:cSld>
@@ -780,7 +579,7 @@
           <a:lstStyle/>
           <a:p>
             <a:r>
-              <a:t>Resumen de lo que nos pidieron en 2026. Vinieron 19 veces: 7 auditorías internas, 4 externas y 8 visitas de la SSF, y en total pidieron 26 temas distintos. Cuatro temas los pidieron 2 o más entidades: hay que tenerlos siempre listos. Las Actas del Comité de Riesgos (NRP-20) se pidieron 4 veces; los temas de NCB-022 (cartera y reservas, Pérdida Esperada, remisiones a SSF y matriz de migración) y el Plan de Continuidad, 3 veces cada uno; Gobierno Corporativo, 2 veces. NRP-20 es la norma más revisada: 5 veces, por 3 entidades. En octubre coincidieron Interna, Externa y SSF.</a:t>
+              <a:t>Resumen de lo que nos pidieron en 2026. Vinieron 19 veces: 7 auditorías internas, 4 externas y 8 visitas de la SSF, y pidieron 26 temas distintos. Contamos por norma: cada visita cuenta una vez por norma. Cinco normas las revisaron 2 o más entidades y hay que tenerlas siempre listas: NRP-20, 5 veces (Interna 2, Externa 1, SSF 2); NCB-022, 3 veces; NRP-24, 3 veces; NPB4-49, 2 veces; NRP-17, 2 veces. NRP-20 es la norma más revisada. En octubre coincidieron Interna, Externa y SSF.</a:t>
             </a:r>
           </a:p>
         </p:txBody>
@@ -4523,7 +4322,7 @@
                 </a:solidFill>
                 <a:latin typeface="Century Gothic"/>
               </a:rPr>
-              <a:t>4</a:t>
+              <a:t>5</a:t>
             </a:r>
           </a:p>
         </p:txBody>
@@ -4558,7 +4357,7 @@
                 </a:solidFill>
                 <a:latin typeface="Arial"/>
               </a:rPr>
-              <a:t>temas que se repiten</a:t>
+              <a:t>normas que se repiten</a:t>
             </a:r>
           </a:p>
         </p:txBody>
@@ -4593,7 +4392,7 @@
                 </a:solidFill>
                 <a:latin typeface="Arial"/>
               </a:rPr>
-              <a:t>pedidos por 2+ entidades</a:t>
+              <a:t>revisadas por 2+ entidades</a:t>
             </a:r>
           </a:p>
         </p:txBody>
@@ -6873,7 +6672,7 @@
         <p:spPr>
           <a:xfrm>
             <a:off x="3611880" y="3611880"/>
-            <a:ext cx="4937760" cy="365760"/>
+            <a:ext cx="8046720" cy="365760"/>
           </a:xfrm>
           <a:prstGeom prst="rect">
             <a:avLst/>
@@ -6894,7 +6693,16 @@
                 </a:solidFill>
                 <a:latin typeface="Century Gothic"/>
               </a:rPr>
-              <a:t>Temas que se repiten</a:t>
+              <a:t>Normas que se repiten</a:t>
+            </a:r>
+            <a:r>
+              <a:rPr sz="1200" b="0">
+                <a:solidFill>
+                  <a:srgbClr val="5B6B7B"/>
+                </a:solidFill>
+                <a:latin typeface="Arial"/>
+              </a:rPr>
+              <a:t>   pedidas por 2 o más entidades: tenerlas siempre listas</a:t>
             </a:r>
           </a:p>
         </p:txBody>
@@ -6907,8 +6715,8 @@
         </p:nvSpPr>
         <p:spPr>
           <a:xfrm>
-            <a:off x="3611880" y="4123944"/>
-            <a:ext cx="438912" cy="438912"/>
+            <a:off x="3611880" y="4096512"/>
+            <a:ext cx="384048" cy="384048"/>
           </a:xfrm>
           <a:prstGeom prst="roundRect">
             <a:avLst>
@@ -6953,8 +6761,8 @@
         </p:nvSpPr>
         <p:spPr>
           <a:xfrm>
-            <a:off x="3611880" y="4123944"/>
-            <a:ext cx="438912" cy="438912"/>
+            <a:off x="3611880" y="4096512"/>
+            <a:ext cx="384048" cy="384048"/>
           </a:xfrm>
           <a:prstGeom prst="rect">
             <a:avLst/>
@@ -6969,13 +6777,13 @@
           <a:p>
             <a:pPr algn="ctr"/>
             <a:r>
-              <a:rPr sz="1400" b="1">
+              <a:rPr sz="1300" b="1">
                 <a:solidFill>
                   <a:srgbClr val="FFFFFF"/>
                 </a:solidFill>
                 <a:latin typeface="Arial"/>
               </a:rPr>
-              <a:t>4</a:t>
+              <a:t>5</a:t>
             </a:r>
           </a:p>
         </p:txBody>
@@ -6988,8 +6796,8 @@
         </p:nvSpPr>
         <p:spPr>
           <a:xfrm>
-            <a:off x="4178808" y="4069080"/>
-            <a:ext cx="2971800" cy="548640"/>
+            <a:off x="4114800" y="4069080"/>
+            <a:ext cx="5120640" cy="438912"/>
           </a:xfrm>
           <a:prstGeom prst="rect">
             <a:avLst/>
@@ -7010,7 +6818,16 @@
                 </a:solidFill>
                 <a:latin typeface="Arial"/>
               </a:rPr>
-              <a:t>Actas Comité de Riesgos</a:t>
+              <a:t>NRP-20</a:t>
+            </a:r>
+            <a:r>
+              <a:rPr sz="1000" b="1">
+                <a:solidFill>
+                  <a:srgbClr val="C62828"/>
+                </a:solidFill>
+                <a:latin typeface="Arial"/>
+              </a:rPr>
+              <a:t>   5 veces</a:t>
             </a:r>
           </a:p>
           <a:p>
@@ -7022,7 +6839,7 @@
                 </a:solidFill>
                 <a:latin typeface="Arial"/>
               </a:rPr>
-              <a:t>NRP-20</a:t>
+              <a:t>Actas · Informes GIR · Plan de trabajo · Visita integral SSF</a:t>
             </a:r>
           </a:p>
         </p:txBody>
@@ -7035,8 +6852,8 @@
         </p:nvSpPr>
         <p:spPr>
           <a:xfrm>
-            <a:off x="7223760" y="4224528"/>
-            <a:ext cx="731520" cy="237744"/>
+            <a:off x="9372600" y="4169664"/>
+            <a:ext cx="685800" cy="237744"/>
           </a:xfrm>
           <a:prstGeom prst="roundRect">
             <a:avLst>
@@ -7077,7 +6894,7 @@
                 </a:solidFill>
                 <a:latin typeface="Arial"/>
               </a:rPr>
-              <a:t>Interna ×3</a:t>
+              <a:t>Interna ×2</a:t>
             </a:r>
           </a:p>
         </p:txBody>
@@ -7090,8 +6907,8 @@
         </p:nvSpPr>
         <p:spPr>
           <a:xfrm>
-            <a:off x="8028432" y="4224528"/>
-            <a:ext cx="566928" cy="237744"/>
+            <a:off x="10131552" y="4169664"/>
+            <a:ext cx="530352" cy="237744"/>
           </a:xfrm>
           <a:prstGeom prst="roundRect">
             <a:avLst>
@@ -7145,8 +6962,63 @@
         </p:nvSpPr>
         <p:spPr>
           <a:xfrm>
-            <a:off x="3611880" y="4700016"/>
-            <a:ext cx="438912" cy="438912"/>
+            <a:off x="10735056" y="4169664"/>
+            <a:ext cx="685800" cy="237744"/>
+          </a:xfrm>
+          <a:prstGeom prst="roundRect">
+            <a:avLst>
+              <a:gd name="adj" fmla="val 50000"/>
+            </a:avLst>
+          </a:prstGeom>
+          <a:solidFill>
+            <a:srgbClr val="2E9E5B"/>
+          </a:solidFill>
+          <a:ln>
+            <a:noFill/>
+          </a:ln>
+          <a:effectLst/>
+        </p:spPr>
+        <p:style>
+          <a:lnRef idx="1">
+            <a:schemeClr val="accent1"/>
+          </a:lnRef>
+          <a:fillRef idx="3">
+            <a:schemeClr val="accent1"/>
+          </a:fillRef>
+          <a:effectRef idx="2">
+            <a:schemeClr val="accent1"/>
+          </a:effectRef>
+          <a:fontRef idx="minor">
+            <a:schemeClr val="lt1"/>
+          </a:fontRef>
+        </p:style>
+        <p:txBody>
+          <a:bodyPr rtlCol="0" anchor="ctr" lIns="0" rIns="0" tIns="0" bIns="0"/>
+          <a:lstStyle/>
+          <a:p>
+            <a:pPr algn="ctr"/>
+            <a:r>
+              <a:rPr sz="900" b="1">
+                <a:solidFill>
+                  <a:srgbClr val="FFFFFF"/>
+                </a:solidFill>
+                <a:latin typeface="Arial"/>
+              </a:rPr>
+              <a:t>SSF ×2</a:t>
+            </a:r>
+          </a:p>
+        </p:txBody>
+      </p:sp>
+      <p:sp>
+        <p:nvSpPr>
+          <p:cNvPr id="80" name="Rounded Rectangle 79"/>
+          <p:cNvSpPr/>
+          <p:nvPr/>
+        </p:nvSpPr>
+        <p:spPr>
+          <a:xfrm>
+            <a:off x="3611880" y="4572000"/>
+            <a:ext cx="384048" cy="384048"/>
           </a:xfrm>
           <a:prstGeom prst="roundRect">
             <a:avLst>
@@ -7185,14 +7057,14 @@
       </p:sp>
       <p:sp>
         <p:nvSpPr>
-          <p:cNvPr id="80" name="TextBox 79"/>
+          <p:cNvPr id="81" name="TextBox 80"/>
           <p:cNvSpPr txBox="1"/>
           <p:nvPr/>
         </p:nvSpPr>
         <p:spPr>
           <a:xfrm>
-            <a:off x="3611880" y="4700016"/>
-            <a:ext cx="438912" cy="438912"/>
+            <a:off x="3611880" y="4572000"/>
+            <a:ext cx="384048" cy="384048"/>
           </a:xfrm>
           <a:prstGeom prst="rect">
             <a:avLst/>
@@ -7207,7 +7079,7 @@
           <a:p>
             <a:pPr algn="ctr"/>
             <a:r>
-              <a:rPr sz="1400" b="1">
+              <a:rPr sz="1300" b="1">
                 <a:solidFill>
                   <a:srgbClr val="FFFFFF"/>
                 </a:solidFill>
@@ -7220,14 +7092,14 @@
       </p:sp>
       <p:sp>
         <p:nvSpPr>
-          <p:cNvPr id="81" name="TextBox 80"/>
+          <p:cNvPr id="82" name="TextBox 81"/>
           <p:cNvSpPr txBox="1"/>
           <p:nvPr/>
         </p:nvSpPr>
         <p:spPr>
           <a:xfrm>
-            <a:off x="4178808" y="4645152"/>
-            <a:ext cx="2971800" cy="548640"/>
+            <a:off x="4114800" y="4544568"/>
+            <a:ext cx="5120640" cy="438912"/>
           </a:xfrm>
           <a:prstGeom prst="rect">
             <a:avLst/>
@@ -7248,7 +7120,16 @@
                 </a:solidFill>
                 <a:latin typeface="Arial"/>
               </a:rPr>
-              <a:t>Riesgo de crédito</a:t>
+              <a:t>NCB-022</a:t>
+            </a:r>
+            <a:r>
+              <a:rPr sz="1000" b="1">
+                <a:solidFill>
+                  <a:srgbClr val="C62828"/>
+                </a:solidFill>
+                <a:latin typeface="Arial"/>
+              </a:rPr>
+              <a:t>   3 veces</a:t>
             </a:r>
           </a:p>
           <a:p>
@@ -7260,21 +7141,21 @@
                 </a:solidFill>
                 <a:latin typeface="Arial"/>
               </a:rPr>
-              <a:t>NCB-022 · Cartera y reservas · Pérdida Esperada · Remisiones a SSF · Matriz de migración</a:t>
-            </a:r>
-          </a:p>
-        </p:txBody>
-      </p:sp>
-      <p:sp>
-        <p:nvSpPr>
-          <p:cNvPr id="82" name="Rounded Rectangle 81"/>
+              <a:t>Cartera · Pérdida Esperada · Remisiones SSF · Migración</a:t>
+            </a:r>
+          </a:p>
+        </p:txBody>
+      </p:sp>
+      <p:sp>
+        <p:nvSpPr>
+          <p:cNvPr id="83" name="Rounded Rectangle 82"/>
           <p:cNvSpPr/>
           <p:nvPr/>
         </p:nvSpPr>
         <p:spPr>
           <a:xfrm>
-            <a:off x="7223760" y="4800600"/>
-            <a:ext cx="731520" cy="237744"/>
+            <a:off x="9372600" y="4645152"/>
+            <a:ext cx="685800" cy="237744"/>
           </a:xfrm>
           <a:prstGeom prst="roundRect">
             <a:avLst>
@@ -7322,14 +7203,14 @@
       </p:sp>
       <p:sp>
         <p:nvSpPr>
-          <p:cNvPr id="83" name="Rounded Rectangle 82"/>
+          <p:cNvPr id="84" name="Rounded Rectangle 83"/>
           <p:cNvSpPr/>
           <p:nvPr/>
         </p:nvSpPr>
         <p:spPr>
           <a:xfrm>
-            <a:off x="8028432" y="4800600"/>
-            <a:ext cx="566928" cy="237744"/>
+            <a:off x="10131552" y="4645152"/>
+            <a:ext cx="530352" cy="237744"/>
           </a:xfrm>
           <a:prstGeom prst="roundRect">
             <a:avLst>
@@ -7377,14 +7258,14 @@
       </p:sp>
       <p:sp>
         <p:nvSpPr>
-          <p:cNvPr id="84" name="Rounded Rectangle 83"/>
+          <p:cNvPr id="85" name="Rounded Rectangle 84"/>
           <p:cNvSpPr/>
           <p:nvPr/>
         </p:nvSpPr>
         <p:spPr>
           <a:xfrm>
-            <a:off x="3611880" y="5276088"/>
-            <a:ext cx="438912" cy="438912"/>
+            <a:off x="3611880" y="5047488"/>
+            <a:ext cx="384048" cy="384048"/>
           </a:xfrm>
           <a:prstGeom prst="roundRect">
             <a:avLst>
@@ -7423,14 +7304,14 @@
       </p:sp>
       <p:sp>
         <p:nvSpPr>
-          <p:cNvPr id="85" name="TextBox 84"/>
+          <p:cNvPr id="86" name="TextBox 85"/>
           <p:cNvSpPr txBox="1"/>
           <p:nvPr/>
         </p:nvSpPr>
         <p:spPr>
           <a:xfrm>
-            <a:off x="3611880" y="5276088"/>
-            <a:ext cx="438912" cy="438912"/>
+            <a:off x="3611880" y="5047488"/>
+            <a:ext cx="384048" cy="384048"/>
           </a:xfrm>
           <a:prstGeom prst="rect">
             <a:avLst/>
@@ -7445,7 +7326,7 @@
           <a:p>
             <a:pPr algn="ctr"/>
             <a:r>
-              <a:rPr sz="1400" b="1">
+              <a:rPr sz="1300" b="1">
                 <a:solidFill>
                   <a:srgbClr val="FFFFFF"/>
                 </a:solidFill>
@@ -7458,14 +7339,14 @@
       </p:sp>
       <p:sp>
         <p:nvSpPr>
-          <p:cNvPr id="86" name="TextBox 85"/>
+          <p:cNvPr id="87" name="TextBox 86"/>
           <p:cNvSpPr txBox="1"/>
           <p:nvPr/>
         </p:nvSpPr>
         <p:spPr>
           <a:xfrm>
-            <a:off x="4178808" y="5221224"/>
-            <a:ext cx="2971800" cy="548640"/>
+            <a:off x="4114800" y="5020056"/>
+            <a:ext cx="5120640" cy="438912"/>
           </a:xfrm>
           <a:prstGeom prst="rect">
             <a:avLst/>
@@ -7486,7 +7367,16 @@
                 </a:solidFill>
                 <a:latin typeface="Arial"/>
               </a:rPr>
-              <a:t>Plan de Continuidad (BCP/DRP)</a:t>
+              <a:t>NRP-24</a:t>
+            </a:r>
+            <a:r>
+              <a:rPr sz="1000" b="1">
+                <a:solidFill>
+                  <a:srgbClr val="C62828"/>
+                </a:solidFill>
+                <a:latin typeface="Arial"/>
+              </a:rPr>
+              <a:t>   3 veces</a:t>
             </a:r>
           </a:p>
           <a:p>
@@ -7498,21 +7388,21 @@
                 </a:solidFill>
                 <a:latin typeface="Arial"/>
               </a:rPr>
-              <a:t>NRP-24</a:t>
-            </a:r>
-          </a:p>
-        </p:txBody>
-      </p:sp>
-      <p:sp>
-        <p:nvSpPr>
-          <p:cNvPr id="87" name="Rounded Rectangle 86"/>
+              <a:t>Plan de Continuidad (BCP/DRP) · Actas del 16 de octubre</a:t>
+            </a:r>
+          </a:p>
+        </p:txBody>
+      </p:sp>
+      <p:sp>
+        <p:nvSpPr>
+          <p:cNvPr id="88" name="Rounded Rectangle 87"/>
           <p:cNvSpPr/>
           <p:nvPr/>
         </p:nvSpPr>
         <p:spPr>
           <a:xfrm>
-            <a:off x="7223760" y="5376672"/>
-            <a:ext cx="731520" cy="237744"/>
+            <a:off x="9372600" y="5120640"/>
+            <a:ext cx="685800" cy="237744"/>
           </a:xfrm>
           <a:prstGeom prst="roundRect">
             <a:avLst>
@@ -7560,14 +7450,14 @@
       </p:sp>
       <p:sp>
         <p:nvSpPr>
-          <p:cNvPr id="88" name="Rounded Rectangle 87"/>
+          <p:cNvPr id="89" name="Rounded Rectangle 88"/>
           <p:cNvSpPr/>
           <p:nvPr/>
         </p:nvSpPr>
         <p:spPr>
           <a:xfrm>
-            <a:off x="8028432" y="5376672"/>
-            <a:ext cx="566928" cy="237744"/>
+            <a:off x="10131552" y="5120640"/>
+            <a:ext cx="530352" cy="237744"/>
           </a:xfrm>
           <a:prstGeom prst="roundRect">
             <a:avLst>
@@ -7615,14 +7505,14 @@
       </p:sp>
       <p:sp>
         <p:nvSpPr>
-          <p:cNvPr id="89" name="Rounded Rectangle 88"/>
+          <p:cNvPr id="90" name="Rounded Rectangle 89"/>
           <p:cNvSpPr/>
           <p:nvPr/>
         </p:nvSpPr>
         <p:spPr>
           <a:xfrm>
-            <a:off x="3611880" y="5852159"/>
-            <a:ext cx="438912" cy="438912"/>
+            <a:off x="3611880" y="5522976"/>
+            <a:ext cx="384048" cy="384048"/>
           </a:xfrm>
           <a:prstGeom prst="roundRect">
             <a:avLst>
@@ -7661,14 +7551,14 @@
       </p:sp>
       <p:sp>
         <p:nvSpPr>
-          <p:cNvPr id="90" name="TextBox 89"/>
+          <p:cNvPr id="91" name="TextBox 90"/>
           <p:cNvSpPr txBox="1"/>
           <p:nvPr/>
         </p:nvSpPr>
         <p:spPr>
           <a:xfrm>
-            <a:off x="3611880" y="5852159"/>
-            <a:ext cx="438912" cy="438912"/>
+            <a:off x="3611880" y="5522976"/>
+            <a:ext cx="384048" cy="384048"/>
           </a:xfrm>
           <a:prstGeom prst="rect">
             <a:avLst/>
@@ -7683,7 +7573,7 @@
           <a:p>
             <a:pPr algn="ctr"/>
             <a:r>
-              <a:rPr sz="1400" b="1">
+              <a:rPr sz="1300" b="1">
                 <a:solidFill>
                   <a:srgbClr val="FFFFFF"/>
                 </a:solidFill>
@@ -7696,14 +7586,14 @@
       </p:sp>
       <p:sp>
         <p:nvSpPr>
-          <p:cNvPr id="91" name="TextBox 90"/>
+          <p:cNvPr id="92" name="TextBox 91"/>
           <p:cNvSpPr txBox="1"/>
           <p:nvPr/>
         </p:nvSpPr>
         <p:spPr>
           <a:xfrm>
-            <a:off x="4178808" y="5797296"/>
-            <a:ext cx="2971800" cy="548640"/>
+            <a:off x="4114800" y="5495544"/>
+            <a:ext cx="5120640" cy="438912"/>
           </a:xfrm>
           <a:prstGeom prst="rect">
             <a:avLst/>
@@ -7724,7 +7614,16 @@
                 </a:solidFill>
                 <a:latin typeface="Arial"/>
               </a:rPr>
-              <a:t>Gobierno Corporativo</a:t>
+              <a:t>NPB4-49</a:t>
+            </a:r>
+            <a:r>
+              <a:rPr sz="1000" b="1">
+                <a:solidFill>
+                  <a:srgbClr val="5B6B7B"/>
+                </a:solidFill>
+                <a:latin typeface="Arial"/>
+              </a:rPr>
+              <a:t>   2 veces</a:t>
             </a:r>
           </a:p>
           <a:p>
@@ -7736,21 +7635,21 @@
                 </a:solidFill>
                 <a:latin typeface="Arial"/>
               </a:rPr>
-              <a:t>NRP-17</a:t>
-            </a:r>
-          </a:p>
-        </p:txBody>
-      </p:sp>
-      <p:sp>
-        <p:nvSpPr>
-          <p:cNvPr id="92" name="Rounded Rectangle 91"/>
+              <a:t>Escenarios de estrés · Concentración crediticia</a:t>
+            </a:r>
+          </a:p>
+        </p:txBody>
+      </p:sp>
+      <p:sp>
+        <p:nvSpPr>
+          <p:cNvPr id="93" name="Rounded Rectangle 92"/>
           <p:cNvSpPr/>
           <p:nvPr/>
         </p:nvSpPr>
         <p:spPr>
           <a:xfrm>
-            <a:off x="7223760" y="5952744"/>
-            <a:ext cx="566928" cy="237744"/>
+            <a:off x="9372600" y="5596128"/>
+            <a:ext cx="530352" cy="237744"/>
           </a:xfrm>
           <a:prstGeom prst="roundRect">
             <a:avLst>
@@ -7798,14 +7697,261 @@
       </p:sp>
       <p:sp>
         <p:nvSpPr>
-          <p:cNvPr id="93" name="Rounded Rectangle 92"/>
+          <p:cNvPr id="94" name="Rounded Rectangle 93"/>
           <p:cNvSpPr/>
           <p:nvPr/>
         </p:nvSpPr>
         <p:spPr>
           <a:xfrm>
-            <a:off x="7863840" y="5952744"/>
-            <a:ext cx="566928" cy="237744"/>
+            <a:off x="9976104" y="5596128"/>
+            <a:ext cx="530352" cy="237744"/>
+          </a:xfrm>
+          <a:prstGeom prst="roundRect">
+            <a:avLst>
+              <a:gd name="adj" fmla="val 50000"/>
+            </a:avLst>
+          </a:prstGeom>
+          <a:solidFill>
+            <a:srgbClr val="E8871E"/>
+          </a:solidFill>
+          <a:ln>
+            <a:noFill/>
+          </a:ln>
+          <a:effectLst/>
+        </p:spPr>
+        <p:style>
+          <a:lnRef idx="1">
+            <a:schemeClr val="accent1"/>
+          </a:lnRef>
+          <a:fillRef idx="3">
+            <a:schemeClr val="accent1"/>
+          </a:fillRef>
+          <a:effectRef idx="2">
+            <a:schemeClr val="accent1"/>
+          </a:effectRef>
+          <a:fontRef idx="minor">
+            <a:schemeClr val="lt1"/>
+          </a:fontRef>
+        </p:style>
+        <p:txBody>
+          <a:bodyPr rtlCol="0" anchor="ctr" lIns="0" rIns="0" tIns="0" bIns="0"/>
+          <a:lstStyle/>
+          <a:p>
+            <a:pPr algn="ctr"/>
+            <a:r>
+              <a:rPr sz="900" b="1">
+                <a:solidFill>
+                  <a:srgbClr val="FFFFFF"/>
+                </a:solidFill>
+                <a:latin typeface="Arial"/>
+              </a:rPr>
+              <a:t>Externa</a:t>
+            </a:r>
+          </a:p>
+        </p:txBody>
+      </p:sp>
+      <p:sp>
+        <p:nvSpPr>
+          <p:cNvPr id="95" name="Rounded Rectangle 94"/>
+          <p:cNvSpPr/>
+          <p:nvPr/>
+        </p:nvSpPr>
+        <p:spPr>
+          <a:xfrm>
+            <a:off x="3611880" y="5998464"/>
+            <a:ext cx="384048" cy="384048"/>
+          </a:xfrm>
+          <a:prstGeom prst="roundRect">
+            <a:avLst>
+              <a:gd name="adj" fmla="val 20000"/>
+            </a:avLst>
+          </a:prstGeom>
+          <a:solidFill>
+            <a:srgbClr val="003D6F"/>
+          </a:solidFill>
+          <a:ln>
+            <a:noFill/>
+          </a:ln>
+          <a:effectLst/>
+        </p:spPr>
+        <p:style>
+          <a:lnRef idx="1">
+            <a:schemeClr val="accent1"/>
+          </a:lnRef>
+          <a:fillRef idx="3">
+            <a:schemeClr val="accent1"/>
+          </a:fillRef>
+          <a:effectRef idx="2">
+            <a:schemeClr val="accent1"/>
+          </a:effectRef>
+          <a:fontRef idx="minor">
+            <a:schemeClr val="lt1"/>
+          </a:fontRef>
+        </p:style>
+        <p:txBody>
+          <a:bodyPr rtlCol="0" anchor="ctr"/>
+          <a:lstStyle/>
+          <a:p>
+            <a:pPr algn="ctr"/>
+          </a:p>
+        </p:txBody>
+      </p:sp>
+      <p:sp>
+        <p:nvSpPr>
+          <p:cNvPr id="96" name="TextBox 95"/>
+          <p:cNvSpPr txBox="1"/>
+          <p:nvPr/>
+        </p:nvSpPr>
+        <p:spPr>
+          <a:xfrm>
+            <a:off x="3611880" y="5998464"/>
+            <a:ext cx="384048" cy="384048"/>
+          </a:xfrm>
+          <a:prstGeom prst="rect">
+            <a:avLst/>
+          </a:prstGeom>
+          <a:noFill/>
+        </p:spPr>
+        <p:txBody>
+          <a:bodyPr wrap="square" lIns="0" rIns="0" tIns="0" bIns="0" anchor="ctr">
+            <a:spAutoFit/>
+          </a:bodyPr>
+          <a:lstStyle/>
+          <a:p>
+            <a:pPr algn="ctr"/>
+            <a:r>
+              <a:rPr sz="1300" b="1">
+                <a:solidFill>
+                  <a:srgbClr val="FFFFFF"/>
+                </a:solidFill>
+                <a:latin typeface="Arial"/>
+              </a:rPr>
+              <a:t>2</a:t>
+            </a:r>
+          </a:p>
+        </p:txBody>
+      </p:sp>
+      <p:sp>
+        <p:nvSpPr>
+          <p:cNvPr id="97" name="TextBox 96"/>
+          <p:cNvSpPr txBox="1"/>
+          <p:nvPr/>
+        </p:nvSpPr>
+        <p:spPr>
+          <a:xfrm>
+            <a:off x="4114800" y="5971031"/>
+            <a:ext cx="5120640" cy="438912"/>
+          </a:xfrm>
+          <a:prstGeom prst="rect">
+            <a:avLst/>
+          </a:prstGeom>
+          <a:noFill/>
+        </p:spPr>
+        <p:txBody>
+          <a:bodyPr wrap="square" lIns="0" rIns="0" tIns="0" bIns="0" anchor="ctr">
+            <a:spAutoFit/>
+          </a:bodyPr>
+          <a:lstStyle/>
+          <a:p>
+            <a:pPr algn="l"/>
+            <a:r>
+              <a:rPr sz="1200" b="1">
+                <a:solidFill>
+                  <a:srgbClr val="1F2A37"/>
+                </a:solidFill>
+                <a:latin typeface="Arial"/>
+              </a:rPr>
+              <a:t>NRP-17</a:t>
+            </a:r>
+            <a:r>
+              <a:rPr sz="1000" b="1">
+                <a:solidFill>
+                  <a:srgbClr val="5B6B7B"/>
+                </a:solidFill>
+                <a:latin typeface="Arial"/>
+              </a:rPr>
+              <a:t>   2 veces</a:t>
+            </a:r>
+          </a:p>
+          <a:p>
+            <a:pPr algn="l"/>
+            <a:r>
+              <a:rPr sz="900" b="0">
+                <a:solidFill>
+                  <a:srgbClr val="5B6B7B"/>
+                </a:solidFill>
+                <a:latin typeface="Arial"/>
+              </a:rPr>
+              <a:t>Gobierno Corporativo</a:t>
+            </a:r>
+          </a:p>
+        </p:txBody>
+      </p:sp>
+      <p:sp>
+        <p:nvSpPr>
+          <p:cNvPr id="98" name="Rounded Rectangle 97"/>
+          <p:cNvSpPr/>
+          <p:nvPr/>
+        </p:nvSpPr>
+        <p:spPr>
+          <a:xfrm>
+            <a:off x="9372600" y="6071616"/>
+            <a:ext cx="530352" cy="237744"/>
+          </a:xfrm>
+          <a:prstGeom prst="roundRect">
+            <a:avLst>
+              <a:gd name="adj" fmla="val 50000"/>
+            </a:avLst>
+          </a:prstGeom>
+          <a:solidFill>
+            <a:srgbClr val="1565C0"/>
+          </a:solidFill>
+          <a:ln>
+            <a:noFill/>
+          </a:ln>
+          <a:effectLst/>
+        </p:spPr>
+        <p:style>
+          <a:lnRef idx="1">
+            <a:schemeClr val="accent1"/>
+          </a:lnRef>
+          <a:fillRef idx="3">
+            <a:schemeClr val="accent1"/>
+          </a:fillRef>
+          <a:effectRef idx="2">
+            <a:schemeClr val="accent1"/>
+          </a:effectRef>
+          <a:fontRef idx="minor">
+            <a:schemeClr val="lt1"/>
+          </a:fontRef>
+        </p:style>
+        <p:txBody>
+          <a:bodyPr rtlCol="0" anchor="ctr" lIns="0" rIns="0" tIns="0" bIns="0"/>
+          <a:lstStyle/>
+          <a:p>
+            <a:pPr algn="ctr"/>
+            <a:r>
+              <a:rPr sz="900" b="1">
+                <a:solidFill>
+                  <a:srgbClr val="FFFFFF"/>
+                </a:solidFill>
+                <a:latin typeface="Arial"/>
+              </a:rPr>
+              <a:t>Interna</a:t>
+            </a:r>
+          </a:p>
+        </p:txBody>
+      </p:sp>
+      <p:sp>
+        <p:nvSpPr>
+          <p:cNvPr id="99" name="Rounded Rectangle 98"/>
+          <p:cNvSpPr/>
+          <p:nvPr/>
+        </p:nvSpPr>
+        <p:spPr>
+          <a:xfrm>
+            <a:off x="9976104" y="6071616"/>
+            <a:ext cx="530352" cy="237744"/>
           </a:xfrm>
           <a:prstGeom prst="roundRect">
             <a:avLst>
@@ -7853,60 +7999,7 @@
       </p:sp>
       <p:sp>
         <p:nvSpPr>
-          <p:cNvPr id="94" name="TextBox 93"/>
-          <p:cNvSpPr txBox="1"/>
-          <p:nvPr/>
-        </p:nvSpPr>
-        <p:spPr>
-          <a:xfrm>
-            <a:off x="9006840" y="3611880"/>
-            <a:ext cx="2651760" cy="365760"/>
-          </a:xfrm>
-          <a:prstGeom prst="rect">
-            <a:avLst/>
-          </a:prstGeom>
-          <a:noFill/>
-        </p:spPr>
-        <p:txBody>
-          <a:bodyPr wrap="square" lIns="0" rIns="0" tIns="0" bIns="0" anchor="t">
-            <a:spAutoFit/>
-          </a:bodyPr>
-          <a:lstStyle/>
-          <a:p>
-            <a:pPr algn="l"/>
-            <a:r>
-              <a:rPr sz="1700" b="1">
-                <a:solidFill>
-                  <a:srgbClr val="003D6F"/>
-                </a:solidFill>
-                <a:latin typeface="Century Gothic"/>
-              </a:rPr>
-              <a:t>Normas más auditadas</a:t>
-            </a:r>
-          </a:p>
-        </p:txBody>
-      </p:sp>
-      <p:graphicFrame>
-        <p:nvGraphicFramePr>
-          <p:cNvPr id="95" name="Gráfico normas"/>
-          <p:cNvGraphicFramePr>
-            <a:graphicFrameLocks noGrp="1"/>
-          </p:cNvGraphicFramePr>
-          <p:nvPr/>
-        </p:nvGraphicFramePr>
-        <p:xfrm>
-          <a:off x="8915400" y="3977639"/>
-          <a:ext cx="2743200" cy="2423160"/>
-        </p:xfrm>
-        <a:graphic>
-          <a:graphicData uri="http://schemas.openxmlformats.org/drawingml/2006/chart">
-            <c:chart xmlns:c="http://schemas.openxmlformats.org/drawingml/2006/chart" r:id="rId3"/>
-          </a:graphicData>
-        </a:graphic>
-      </p:graphicFrame>
-      <p:sp>
-        <p:nvSpPr>
-          <p:cNvPr id="96" name="Fuente"/>
+          <p:cNvPr id="100" name="Fuente"/>
           <p:cNvSpPr txBox="1"/>
           <p:nvPr/>
         </p:nvSpPr>
